--- a/slides/Education_and_Income_Presentation_cleaned.pptx
+++ b/slides/Education_and_Income_Presentation_cleaned.pptx
@@ -12,10 +12,8 @@
     <p:sldId id="260" r:id="rId6"/>
     <p:sldId id="263" r:id="rId7"/>
     <p:sldId id="266" r:id="rId8"/>
-    <p:sldId id="267" r:id="rId9"/>
-    <p:sldId id="261" r:id="rId10"/>
-    <p:sldId id="265" r:id="rId11"/>
-    <p:sldId id="262" r:id="rId12"/>
+    <p:sldId id="261" r:id="rId9"/>
+    <p:sldId id="262" r:id="rId10"/>
   </p:sldIdLst>
   <p:sldSz cx="9144000" cy="6858000" type="screen4x3"/>
   <p:notesSz cx="6858000" cy="9144000"/>
@@ -131,6 +129,377 @@
     </p:ext>
   </p:extLst>
 </p:presentation>
+</file>
+
+<file path=ppt/revisionInfo.xml><?xml version="1.0" encoding="utf-8"?>
+<p1510:revInfo xmlns:a="http://schemas.openxmlformats.org/drawingml/2006/main" xmlns:r="http://schemas.openxmlformats.org/officeDocument/2006/relationships" xmlns:p1510="http://schemas.microsoft.com/office/powerpoint/2015/10/main">
+  <p1510:revLst>
+    <p1510:client id="{016BEFF7-7608-4788-8F77-9F3C5D1B3EEA}" v="12" dt="2026-05-25T09:38:12.087"/>
+  </p1510:revLst>
+</p1510:revInfo>
+</file>
+
+<file path=ppt/changesInfos/changesInfo1.xml><?xml version="1.0" encoding="utf-8"?>
+<pc:chgInfo xmlns:a="http://schemas.openxmlformats.org/drawingml/2006/main" xmlns:r="http://schemas.openxmlformats.org/officeDocument/2006/relationships" xmlns:ac="http://schemas.microsoft.com/office/drawing/2013/main/command" xmlns:pc="http://schemas.microsoft.com/office/powerpoint/2013/main/command">
+  <pc:docChgLst>
+    <pc:chgData name="George Lewis" userId="09c2c9ccd486a171" providerId="LiveId" clId="{C7FFF7A7-2C27-497E-8D5C-F9765F6B16A5}"/>
+    <pc:docChg chg="undo custSel addSld delSld modSld sldOrd">
+      <pc:chgData name="George Lewis" userId="09c2c9ccd486a171" providerId="LiveId" clId="{C7FFF7A7-2C27-497E-8D5C-F9765F6B16A5}" dt="2026-05-25T09:38:23.597" v="170" actId="26606"/>
+      <pc:docMkLst>
+        <pc:docMk/>
+      </pc:docMkLst>
+      <pc:sldChg chg="addSp delSp modSp mod setBg addAnim delAnim">
+        <pc:chgData name="George Lewis" userId="09c2c9ccd486a171" providerId="LiveId" clId="{C7FFF7A7-2C27-497E-8D5C-F9765F6B16A5}" dt="2026-05-25T09:38:23.597" v="170" actId="26606"/>
+        <pc:sldMkLst>
+          <pc:docMk/>
+          <pc:sldMk cId="0" sldId="256"/>
+        </pc:sldMkLst>
+        <pc:spChg chg="mod">
+          <ac:chgData name="George Lewis" userId="09c2c9ccd486a171" providerId="LiveId" clId="{C7FFF7A7-2C27-497E-8D5C-F9765F6B16A5}" dt="2026-05-25T09:38:23.597" v="170" actId="26606"/>
+          <ac:spMkLst>
+            <pc:docMk/>
+            <pc:sldMk cId="0" sldId="256"/>
+            <ac:spMk id="2" creationId="{00000000-0000-0000-0000-000000000000}"/>
+          </ac:spMkLst>
+        </pc:spChg>
+        <pc:spChg chg="mod ord">
+          <ac:chgData name="George Lewis" userId="09c2c9ccd486a171" providerId="LiveId" clId="{C7FFF7A7-2C27-497E-8D5C-F9765F6B16A5}" dt="2026-05-25T09:38:23.597" v="170" actId="26606"/>
+          <ac:spMkLst>
+            <pc:docMk/>
+            <pc:sldMk cId="0" sldId="256"/>
+            <ac:spMk id="3" creationId="{00000000-0000-0000-0000-000000000000}"/>
+          </ac:spMkLst>
+        </pc:spChg>
+        <pc:spChg chg="add del">
+          <ac:chgData name="George Lewis" userId="09c2c9ccd486a171" providerId="LiveId" clId="{C7FFF7A7-2C27-497E-8D5C-F9765F6B16A5}" dt="2026-05-25T09:38:23.566" v="169" actId="26606"/>
+          <ac:spMkLst>
+            <pc:docMk/>
+            <pc:sldMk cId="0" sldId="256"/>
+            <ac:spMk id="2055" creationId="{9B7AD9F6-8CE7-4299-8FC6-328F4DCD3FF9}"/>
+          </ac:spMkLst>
+        </pc:spChg>
+        <pc:spChg chg="add del">
+          <ac:chgData name="George Lewis" userId="09c2c9ccd486a171" providerId="LiveId" clId="{C7FFF7A7-2C27-497E-8D5C-F9765F6B16A5}" dt="2026-05-25T09:38:23.566" v="169" actId="26606"/>
+          <ac:spMkLst>
+            <pc:docMk/>
+            <pc:sldMk cId="0" sldId="256"/>
+            <ac:spMk id="2057" creationId="{F49775AF-8896-43EE-92C6-83497D6DC56F}"/>
+          </ac:spMkLst>
+        </pc:spChg>
+        <pc:spChg chg="add">
+          <ac:chgData name="George Lewis" userId="09c2c9ccd486a171" providerId="LiveId" clId="{C7FFF7A7-2C27-497E-8D5C-F9765F6B16A5}" dt="2026-05-25T09:38:23.597" v="170" actId="26606"/>
+          <ac:spMkLst>
+            <pc:docMk/>
+            <pc:sldMk cId="0" sldId="256"/>
+            <ac:spMk id="2062" creationId="{870A1295-61BC-4214-AA3E-D396673024D0}"/>
+          </ac:spMkLst>
+        </pc:spChg>
+        <pc:grpChg chg="add">
+          <ac:chgData name="George Lewis" userId="09c2c9ccd486a171" providerId="LiveId" clId="{C7FFF7A7-2C27-497E-8D5C-F9765F6B16A5}" dt="2026-05-25T09:38:23.597" v="170" actId="26606"/>
+          <ac:grpSpMkLst>
+            <pc:docMk/>
+            <pc:sldMk cId="0" sldId="256"/>
+            <ac:grpSpMk id="2063" creationId="{0B139475-2B26-4CA9-9413-DE741E49F7BB}"/>
+          </ac:grpSpMkLst>
+        </pc:grpChg>
+        <pc:picChg chg="add mod">
+          <ac:chgData name="George Lewis" userId="09c2c9ccd486a171" providerId="LiveId" clId="{C7FFF7A7-2C27-497E-8D5C-F9765F6B16A5}" dt="2026-05-25T09:38:23.597" v="170" actId="26606"/>
+          <ac:picMkLst>
+            <pc:docMk/>
+            <pc:sldMk cId="0" sldId="256"/>
+            <ac:picMk id="2050" creationId="{7CD7971F-E871-4AD5-CB09-C5D40FBDA557}"/>
+          </ac:picMkLst>
+        </pc:picChg>
+      </pc:sldChg>
+      <pc:sldChg chg="addSp delSp modSp mod setBg">
+        <pc:chgData name="George Lewis" userId="09c2c9ccd486a171" providerId="LiveId" clId="{C7FFF7A7-2C27-497E-8D5C-F9765F6B16A5}" dt="2026-05-25T09:37:23.015" v="164" actId="27636"/>
+        <pc:sldMkLst>
+          <pc:docMk/>
+          <pc:sldMk cId="0" sldId="257"/>
+        </pc:sldMkLst>
+        <pc:spChg chg="mod">
+          <ac:chgData name="George Lewis" userId="09c2c9ccd486a171" providerId="LiveId" clId="{C7FFF7A7-2C27-497E-8D5C-F9765F6B16A5}" dt="2026-05-25T09:37:16.092" v="162" actId="26606"/>
+          <ac:spMkLst>
+            <pc:docMk/>
+            <pc:sldMk cId="0" sldId="257"/>
+            <ac:spMk id="2" creationId="{00000000-0000-0000-0000-000000000000}"/>
+          </ac:spMkLst>
+        </pc:spChg>
+        <pc:spChg chg="mod">
+          <ac:chgData name="George Lewis" userId="09c2c9ccd486a171" providerId="LiveId" clId="{C7FFF7A7-2C27-497E-8D5C-F9765F6B16A5}" dt="2026-05-25T09:37:23.015" v="164" actId="27636"/>
+          <ac:spMkLst>
+            <pc:docMk/>
+            <pc:sldMk cId="0" sldId="257"/>
+            <ac:spMk id="3" creationId="{00000000-0000-0000-0000-000000000000}"/>
+          </ac:spMkLst>
+        </pc:spChg>
+        <pc:spChg chg="add del">
+          <ac:chgData name="George Lewis" userId="09c2c9ccd486a171" providerId="LiveId" clId="{C7FFF7A7-2C27-497E-8D5C-F9765F6B16A5}" dt="2026-05-25T09:36:52.622" v="158" actId="26606"/>
+          <ac:spMkLst>
+            <pc:docMk/>
+            <pc:sldMk cId="0" sldId="257"/>
+            <ac:spMk id="1031" creationId="{F13C74B1-5B17-4795-BED0-7140497B445A}"/>
+          </ac:spMkLst>
+        </pc:spChg>
+        <pc:spChg chg="add del">
+          <ac:chgData name="George Lewis" userId="09c2c9ccd486a171" providerId="LiveId" clId="{C7FFF7A7-2C27-497E-8D5C-F9765F6B16A5}" dt="2026-05-25T09:36:52.622" v="158" actId="26606"/>
+          <ac:spMkLst>
+            <pc:docMk/>
+            <pc:sldMk cId="0" sldId="257"/>
+            <ac:spMk id="1033" creationId="{D4974D33-8DC5-464E-8C6D-BE58F0669C17}"/>
+          </ac:spMkLst>
+        </pc:spChg>
+        <pc:spChg chg="add del">
+          <ac:chgData name="George Lewis" userId="09c2c9ccd486a171" providerId="LiveId" clId="{C7FFF7A7-2C27-497E-8D5C-F9765F6B16A5}" dt="2026-05-25T09:37:16.092" v="162" actId="26606"/>
+          <ac:spMkLst>
+            <pc:docMk/>
+            <pc:sldMk cId="0" sldId="257"/>
+            <ac:spMk id="1042" creationId="{F13C74B1-5B17-4795-BED0-7140497B445A}"/>
+          </ac:spMkLst>
+        </pc:spChg>
+        <pc:spChg chg="add del">
+          <ac:chgData name="George Lewis" userId="09c2c9ccd486a171" providerId="LiveId" clId="{C7FFF7A7-2C27-497E-8D5C-F9765F6B16A5}" dt="2026-05-25T09:37:16.092" v="162" actId="26606"/>
+          <ac:spMkLst>
+            <pc:docMk/>
+            <pc:sldMk cId="0" sldId="257"/>
+            <ac:spMk id="1043" creationId="{D4974D33-8DC5-464E-8C6D-BE58F0669C17}"/>
+          </ac:spMkLst>
+        </pc:spChg>
+        <pc:spChg chg="add del">
+          <ac:chgData name="George Lewis" userId="09c2c9ccd486a171" providerId="LiveId" clId="{C7FFF7A7-2C27-497E-8D5C-F9765F6B16A5}" dt="2026-05-25T09:37:16.074" v="161" actId="26606"/>
+          <ac:spMkLst>
+            <pc:docMk/>
+            <pc:sldMk cId="0" sldId="257"/>
+            <ac:spMk id="1048" creationId="{45D37F4E-DDB4-456B-97E0-9937730A039F}"/>
+          </ac:spMkLst>
+        </pc:spChg>
+        <pc:spChg chg="add del">
+          <ac:chgData name="George Lewis" userId="09c2c9ccd486a171" providerId="LiveId" clId="{C7FFF7A7-2C27-497E-8D5C-F9765F6B16A5}" dt="2026-05-25T09:37:16.074" v="161" actId="26606"/>
+          <ac:spMkLst>
+            <pc:docMk/>
+            <pc:sldMk cId="0" sldId="257"/>
+            <ac:spMk id="1050" creationId="{B2DD41CD-8F47-4F56-AD12-4E2FF7696987}"/>
+          </ac:spMkLst>
+        </pc:spChg>
+        <pc:spChg chg="add">
+          <ac:chgData name="George Lewis" userId="09c2c9ccd486a171" providerId="LiveId" clId="{C7FFF7A7-2C27-497E-8D5C-F9765F6B16A5}" dt="2026-05-25T09:37:16.092" v="162" actId="26606"/>
+          <ac:spMkLst>
+            <pc:docMk/>
+            <pc:sldMk cId="0" sldId="257"/>
+            <ac:spMk id="1052" creationId="{9F7D5CDA-D291-4307-BF55-1381FED29634}"/>
+          </ac:spMkLst>
+        </pc:spChg>
+        <pc:grpChg chg="add del">
+          <ac:chgData name="George Lewis" userId="09c2c9ccd486a171" providerId="LiveId" clId="{C7FFF7A7-2C27-497E-8D5C-F9765F6B16A5}" dt="2026-05-25T09:36:52.602" v="157" actId="26606"/>
+          <ac:grpSpMkLst>
+            <pc:docMk/>
+            <pc:sldMk cId="0" sldId="257"/>
+            <ac:grpSpMk id="1038" creationId="{1FD67D68-9B83-C338-8342-3348D8F22347}"/>
+          </ac:grpSpMkLst>
+        </pc:grpChg>
+        <pc:picChg chg="add mod">
+          <ac:chgData name="George Lewis" userId="09c2c9ccd486a171" providerId="LiveId" clId="{C7FFF7A7-2C27-497E-8D5C-F9765F6B16A5}" dt="2026-05-25T09:36:20.156" v="150"/>
+          <ac:picMkLst>
+            <pc:docMk/>
+            <pc:sldMk cId="0" sldId="257"/>
+            <ac:picMk id="4" creationId="{1C889D05-1EA8-6247-3215-1C8AAF903716}"/>
+          </ac:picMkLst>
+        </pc:picChg>
+        <pc:picChg chg="add mod">
+          <ac:chgData name="George Lewis" userId="09c2c9ccd486a171" providerId="LiveId" clId="{C7FFF7A7-2C27-497E-8D5C-F9765F6B16A5}" dt="2026-05-25T09:37:16.092" v="162" actId="26606"/>
+          <ac:picMkLst>
+            <pc:docMk/>
+            <pc:sldMk cId="0" sldId="257"/>
+            <ac:picMk id="1026" creationId="{E72D8A67-6CCF-A01D-2092-0B924804857A}"/>
+          </ac:picMkLst>
+        </pc:picChg>
+      </pc:sldChg>
+      <pc:sldChg chg="modSp mod">
+        <pc:chgData name="George Lewis" userId="09c2c9ccd486a171" providerId="LiveId" clId="{C7FFF7A7-2C27-497E-8D5C-F9765F6B16A5}" dt="2026-05-25T09:13:51.612" v="74" actId="1076"/>
+        <pc:sldMkLst>
+          <pc:docMk/>
+          <pc:sldMk cId="0" sldId="258"/>
+        </pc:sldMkLst>
+        <pc:graphicFrameChg chg="mod modGraphic">
+          <ac:chgData name="George Lewis" userId="09c2c9ccd486a171" providerId="LiveId" clId="{C7FFF7A7-2C27-497E-8D5C-F9765F6B16A5}" dt="2026-05-25T09:13:51.612" v="74" actId="1076"/>
+          <ac:graphicFrameMkLst>
+            <pc:docMk/>
+            <pc:sldMk cId="0" sldId="258"/>
+            <ac:graphicFrameMk id="4" creationId="{00000000-0000-0000-0000-000000000000}"/>
+          </ac:graphicFrameMkLst>
+        </pc:graphicFrameChg>
+      </pc:sldChg>
+      <pc:sldChg chg="modSp mod">
+        <pc:chgData name="George Lewis" userId="09c2c9ccd486a171" providerId="LiveId" clId="{C7FFF7A7-2C27-497E-8D5C-F9765F6B16A5}" dt="2026-05-25T09:13:05.265" v="56" actId="403"/>
+        <pc:sldMkLst>
+          <pc:docMk/>
+          <pc:sldMk cId="0" sldId="259"/>
+        </pc:sldMkLst>
+        <pc:spChg chg="mod">
+          <ac:chgData name="George Lewis" userId="09c2c9ccd486a171" providerId="LiveId" clId="{C7FFF7A7-2C27-497E-8D5C-F9765F6B16A5}" dt="2026-05-25T09:13:05.265" v="56" actId="403"/>
+          <ac:spMkLst>
+            <pc:docMk/>
+            <pc:sldMk cId="0" sldId="259"/>
+            <ac:spMk id="3" creationId="{00000000-0000-0000-0000-000000000000}"/>
+          </ac:spMkLst>
+        </pc:spChg>
+      </pc:sldChg>
+      <pc:sldChg chg="addSp modSp mod">
+        <pc:chgData name="George Lewis" userId="09c2c9ccd486a171" providerId="LiveId" clId="{C7FFF7A7-2C27-497E-8D5C-F9765F6B16A5}" dt="2026-05-25T09:18:59.006" v="143" actId="20577"/>
+        <pc:sldMkLst>
+          <pc:docMk/>
+          <pc:sldMk cId="0" sldId="260"/>
+        </pc:sldMkLst>
+        <pc:spChg chg="mod">
+          <ac:chgData name="George Lewis" userId="09c2c9ccd486a171" providerId="LiveId" clId="{C7FFF7A7-2C27-497E-8D5C-F9765F6B16A5}" dt="2026-05-25T08:46:20.322" v="13" actId="27636"/>
+          <ac:spMkLst>
+            <pc:docMk/>
+            <pc:sldMk cId="0" sldId="260"/>
+            <ac:spMk id="2" creationId="{00000000-0000-0000-0000-000000000000}"/>
+          </ac:spMkLst>
+        </pc:spChg>
+        <pc:spChg chg="add mod">
+          <ac:chgData name="George Lewis" userId="09c2c9ccd486a171" providerId="LiveId" clId="{C7FFF7A7-2C27-497E-8D5C-F9765F6B16A5}" dt="2026-05-25T09:18:59.006" v="143" actId="20577"/>
+          <ac:spMkLst>
+            <pc:docMk/>
+            <pc:sldMk cId="0" sldId="260"/>
+            <ac:spMk id="4" creationId="{0C56EC9B-3CC7-5D47-81B3-512901F32CF5}"/>
+          </ac:spMkLst>
+        </pc:spChg>
+        <pc:graphicFrameChg chg="mod modGraphic">
+          <ac:chgData name="George Lewis" userId="09c2c9ccd486a171" providerId="LiveId" clId="{C7FFF7A7-2C27-497E-8D5C-F9765F6B16A5}" dt="2026-05-25T08:46:52.837" v="27" actId="403"/>
+          <ac:graphicFrameMkLst>
+            <pc:docMk/>
+            <pc:sldMk cId="0" sldId="260"/>
+            <ac:graphicFrameMk id="3" creationId="{00000000-0000-0000-0000-000000000000}"/>
+          </ac:graphicFrameMkLst>
+        </pc:graphicFrameChg>
+      </pc:sldChg>
+      <pc:sldChg chg="addSp modSp mod">
+        <pc:chgData name="George Lewis" userId="09c2c9ccd486a171" providerId="LiveId" clId="{C7FFF7A7-2C27-497E-8D5C-F9765F6B16A5}" dt="2026-05-25T08:45:54.529" v="9" actId="404"/>
+        <pc:sldMkLst>
+          <pc:docMk/>
+          <pc:sldMk cId="0" sldId="261"/>
+        </pc:sldMkLst>
+        <pc:graphicFrameChg chg="add mod modGraphic">
+          <ac:chgData name="George Lewis" userId="09c2c9ccd486a171" providerId="LiveId" clId="{C7FFF7A7-2C27-497E-8D5C-F9765F6B16A5}" dt="2026-05-25T08:45:54.529" v="9" actId="404"/>
+          <ac:graphicFrameMkLst>
+            <pc:docMk/>
+            <pc:sldMk cId="0" sldId="261"/>
+            <ac:graphicFrameMk id="4" creationId="{FDC5C96E-FD2C-4B67-8F6E-B943FDC8D1BB}"/>
+          </ac:graphicFrameMkLst>
+        </pc:graphicFrameChg>
+      </pc:sldChg>
+      <pc:sldChg chg="modSp mod">
+        <pc:chgData name="George Lewis" userId="09c2c9ccd486a171" providerId="LiveId" clId="{C7FFF7A7-2C27-497E-8D5C-F9765F6B16A5}" dt="2026-05-25T09:35:15.528" v="149" actId="403"/>
+        <pc:sldMkLst>
+          <pc:docMk/>
+          <pc:sldMk cId="0" sldId="262"/>
+        </pc:sldMkLst>
+        <pc:spChg chg="mod">
+          <ac:chgData name="George Lewis" userId="09c2c9ccd486a171" providerId="LiveId" clId="{C7FFF7A7-2C27-497E-8D5C-F9765F6B16A5}" dt="2026-05-25T09:35:15.528" v="149" actId="403"/>
+          <ac:spMkLst>
+            <pc:docMk/>
+            <pc:sldMk cId="0" sldId="262"/>
+            <ac:spMk id="3" creationId="{00000000-0000-0000-0000-000000000000}"/>
+          </ac:spMkLst>
+        </pc:spChg>
+      </pc:sldChg>
+      <pc:sldChg chg="addSp delSp modSp mod ord setBg">
+        <pc:chgData name="George Lewis" userId="09c2c9ccd486a171" providerId="LiveId" clId="{C7FFF7A7-2C27-497E-8D5C-F9765F6B16A5}" dt="2026-05-25T09:16:22.375" v="80" actId="1076"/>
+        <pc:sldMkLst>
+          <pc:docMk/>
+          <pc:sldMk cId="0" sldId="263"/>
+        </pc:sldMkLst>
+        <pc:spChg chg="del">
+          <ac:chgData name="George Lewis" userId="09c2c9ccd486a171" providerId="LiveId" clId="{C7FFF7A7-2C27-497E-8D5C-F9765F6B16A5}" dt="2026-05-25T08:47:15.188" v="29" actId="478"/>
+          <ac:spMkLst>
+            <pc:docMk/>
+            <pc:sldMk cId="0" sldId="263"/>
+            <ac:spMk id="2" creationId="{00000000-0000-0000-0000-000000000000}"/>
+          </ac:spMkLst>
+        </pc:spChg>
+        <pc:spChg chg="del">
+          <ac:chgData name="George Lewis" userId="09c2c9ccd486a171" providerId="LiveId" clId="{C7FFF7A7-2C27-497E-8D5C-F9765F6B16A5}" dt="2026-05-25T08:47:12.627" v="28" actId="478"/>
+          <ac:spMkLst>
+            <pc:docMk/>
+            <pc:sldMk cId="0" sldId="263"/>
+            <ac:spMk id="3" creationId="{00000000-0000-0000-0000-000000000000}"/>
+          </ac:spMkLst>
+        </pc:spChg>
+        <pc:spChg chg="add mod">
+          <ac:chgData name="George Lewis" userId="09c2c9ccd486a171" providerId="LiveId" clId="{C7FFF7A7-2C27-497E-8D5C-F9765F6B16A5}" dt="2026-05-25T08:48:21.443" v="45" actId="26606"/>
+          <ac:spMkLst>
+            <pc:docMk/>
+            <pc:sldMk cId="0" sldId="263"/>
+            <ac:spMk id="6" creationId="{D688E792-2A76-50BD-4B8E-FC104A823315}"/>
+          </ac:spMkLst>
+        </pc:spChg>
+        <pc:spChg chg="add del">
+          <ac:chgData name="George Lewis" userId="09c2c9ccd486a171" providerId="LiveId" clId="{C7FFF7A7-2C27-497E-8D5C-F9765F6B16A5}" dt="2026-05-25T08:48:21.443" v="45" actId="26606"/>
+          <ac:spMkLst>
+            <pc:docMk/>
+            <pc:sldMk cId="0" sldId="263"/>
+            <ac:spMk id="12" creationId="{022BDE4A-8A20-4A69-9C5A-581C82036A4D}"/>
+          </ac:spMkLst>
+        </pc:spChg>
+        <pc:spChg chg="add del">
+          <ac:chgData name="George Lewis" userId="09c2c9ccd486a171" providerId="LiveId" clId="{C7FFF7A7-2C27-497E-8D5C-F9765F6B16A5}" dt="2026-05-25T08:48:09.642" v="38" actId="26606"/>
+          <ac:spMkLst>
+            <pc:docMk/>
+            <pc:sldMk cId="0" sldId="263"/>
+            <ac:spMk id="17" creationId="{022BDE4A-8A20-4A69-9C5A-581C82036A4D}"/>
+          </ac:spMkLst>
+        </pc:spChg>
+        <pc:picChg chg="mod ord modCrop">
+          <ac:chgData name="George Lewis" userId="09c2c9ccd486a171" providerId="LiveId" clId="{C7FFF7A7-2C27-497E-8D5C-F9765F6B16A5}" dt="2026-05-25T09:16:22.375" v="80" actId="1076"/>
+          <ac:picMkLst>
+            <pc:docMk/>
+            <pc:sldMk cId="0" sldId="263"/>
+            <ac:picMk id="4" creationId="{00000000-0000-0000-0000-000000000000}"/>
+          </ac:picMkLst>
+        </pc:picChg>
+        <pc:picChg chg="add del mod">
+          <ac:chgData name="George Lewis" userId="09c2c9ccd486a171" providerId="LiveId" clId="{C7FFF7A7-2C27-497E-8D5C-F9765F6B16A5}" dt="2026-05-25T08:48:21.443" v="45" actId="26606"/>
+          <ac:picMkLst>
+            <pc:docMk/>
+            <pc:sldMk cId="0" sldId="263"/>
+            <ac:picMk id="7" creationId="{EA8B2224-BC47-A243-C00C-B386FEF5560F}"/>
+          </ac:picMkLst>
+        </pc:picChg>
+      </pc:sldChg>
+      <pc:sldChg chg="del">
+        <pc:chgData name="George Lewis" userId="09c2c9ccd486a171" providerId="LiveId" clId="{C7FFF7A7-2C27-497E-8D5C-F9765F6B16A5}" dt="2026-05-25T08:46:03.299" v="10" actId="47"/>
+        <pc:sldMkLst>
+          <pc:docMk/>
+          <pc:sldMk cId="0" sldId="265"/>
+        </pc:sldMkLst>
+      </pc:sldChg>
+      <pc:sldChg chg="modSp add del mod">
+        <pc:chgData name="George Lewis" userId="09c2c9ccd486a171" providerId="LiveId" clId="{C7FFF7A7-2C27-497E-8D5C-F9765F6B16A5}" dt="2026-05-25T08:48:52.371" v="53" actId="1076"/>
+        <pc:sldMkLst>
+          <pc:docMk/>
+          <pc:sldMk cId="3320729550" sldId="266"/>
+        </pc:sldMkLst>
+        <pc:picChg chg="mod">
+          <ac:chgData name="George Lewis" userId="09c2c9ccd486a171" providerId="LiveId" clId="{C7FFF7A7-2C27-497E-8D5C-F9765F6B16A5}" dt="2026-05-25T08:48:52.371" v="53" actId="1076"/>
+          <ac:picMkLst>
+            <pc:docMk/>
+            <pc:sldMk cId="3320729550" sldId="266"/>
+            <ac:picMk id="5" creationId="{00000000-0000-0000-0000-000000000000}"/>
+          </ac:picMkLst>
+        </pc:picChg>
+      </pc:sldChg>
+      <pc:sldChg chg="add del">
+        <pc:chgData name="George Lewis" userId="09c2c9ccd486a171" providerId="LiveId" clId="{C7FFF7A7-2C27-497E-8D5C-F9765F6B16A5}" dt="2026-05-25T08:48:23.888" v="46" actId="47"/>
+        <pc:sldMkLst>
+          <pc:docMk/>
+          <pc:sldMk cId="1808836265" sldId="267"/>
+        </pc:sldMkLst>
+      </pc:sldChg>
+    </pc:docChg>
+  </pc:docChgLst>
+</pc:chgInfo>
 </file>
 
 <file path=ppt/slideLayouts/slideLayout1.xml><?xml version="1.0" encoding="utf-8"?>
@@ -3086,6 +3455,14 @@
 <file path=ppt/slides/slide1.xml><?xml version="1.0" encoding="utf-8"?>
 <p:sld xmlns:a="http://schemas.openxmlformats.org/drawingml/2006/main" xmlns:r="http://schemas.openxmlformats.org/officeDocument/2006/relationships" xmlns:p="http://schemas.openxmlformats.org/presentationml/2006/main">
   <p:cSld>
+    <p:bg>
+      <p:bgPr>
+        <a:solidFill>
+          <a:schemeClr val="bg1"/>
+        </a:solidFill>
+        <a:effectLst/>
+      </p:bgPr>
+    </p:bg>
     <p:spTree>
       <p:nvGrpSpPr>
         <p:cNvPr id="1" name=""/>
@@ -3100,6 +3477,66 @@
           <a:chExt cx="0" cy="0"/>
         </a:xfrm>
       </p:grpSpPr>
+      <p:sp useBgFill="1">
+        <p:nvSpPr>
+          <p:cNvPr id="2062" name="Rectangle 2061">
+            <a:extLst>
+              <a:ext uri="{FF2B5EF4-FFF2-40B4-BE49-F238E27FC236}">
+                <a16:creationId xmlns:a16="http://schemas.microsoft.com/office/drawing/2014/main" id="{870A1295-61BC-4214-AA3E-D396673024D0}"/>
+              </a:ext>
+              <a:ext uri="{C183D7F6-B498-43B3-948B-1728B52AA6E4}">
+                <adec:decorative xmlns:adec="http://schemas.microsoft.com/office/drawing/2017/decorative" val="1"/>
+              </a:ext>
+            </a:extLst>
+          </p:cNvPr>
+          <p:cNvSpPr>
+            <a:spLocks noGrp="1" noRot="1" noChangeAspect="1" noMove="1" noResize="1" noEditPoints="1" noAdjustHandles="1" noChangeArrowheads="1" noChangeShapeType="1" noTextEdit="1"/>
+          </p:cNvSpPr>
+          <p:nvPr>
+            <p:extLst>
+              <p:ext uri="{386F3935-93C4-4BCD-93E2-E3B085C9AB24}">
+                <p16:designElem xmlns:p16="http://schemas.microsoft.com/office/powerpoint/2015/main" val="1"/>
+              </p:ext>
+            </p:extLst>
+          </p:nvPr>
+        </p:nvSpPr>
+        <p:spPr>
+          <a:xfrm>
+            <a:off x="0" y="0"/>
+            <a:ext cx="9143771" cy="6858000"/>
+          </a:xfrm>
+          <a:prstGeom prst="rect">
+            <a:avLst/>
+          </a:prstGeom>
+          <a:ln>
+            <a:noFill/>
+          </a:ln>
+        </p:spPr>
+        <p:style>
+          <a:lnRef idx="2">
+            <a:schemeClr val="accent1">
+              <a:shade val="50000"/>
+            </a:schemeClr>
+          </a:lnRef>
+          <a:fillRef idx="1">
+            <a:schemeClr val="accent1"/>
+          </a:fillRef>
+          <a:effectRef idx="0">
+            <a:schemeClr val="accent1"/>
+          </a:effectRef>
+          <a:fontRef idx="minor">
+            <a:schemeClr val="lt1"/>
+          </a:fontRef>
+        </p:style>
+        <p:txBody>
+          <a:bodyPr rtlCol="0" anchor="ctr"/>
+          <a:lstStyle/>
+          <a:p>
+            <a:pPr algn="ctr"/>
+            <a:endParaRPr lang="en-US"/>
+          </a:p>
+        </p:txBody>
+      </p:sp>
       <p:sp>
         <p:nvSpPr>
           <p:cNvPr id="2" name="Title 1"/>
@@ -3110,17 +3547,3276 @@
             <p:ph type="ctrTitle"/>
           </p:nvPr>
         </p:nvSpPr>
-        <p:spPr/>
+        <p:spPr>
+          <a:xfrm>
+            <a:off x="603504" y="5116529"/>
+            <a:ext cx="7944130" cy="1000655"/>
+          </a:xfrm>
+        </p:spPr>
         <p:txBody>
-          <a:bodyPr/>
+          <a:bodyPr anchor="t">
+            <a:normAutofit/>
+          </a:bodyPr>
           <a:lstStyle/>
           <a:p>
+            <a:pPr algn="l"/>
             <a:r>
+              <a:rPr lang="en-US" sz="3500">
+                <a:solidFill>
+                  <a:schemeClr val="tx2"/>
+                </a:solidFill>
+              </a:rPr>
               <a:t>Education and Income in Australia</a:t>
             </a:r>
           </a:p>
         </p:txBody>
       </p:sp>
+      <p:pic>
+        <p:nvPicPr>
+          <p:cNvPr id="2050" name="Picture 2" descr="AUD to EGP Exchange Rate and Currency Converter | OFX">
+            <a:extLst>
+              <a:ext uri="{FF2B5EF4-FFF2-40B4-BE49-F238E27FC236}">
+                <a16:creationId xmlns:a16="http://schemas.microsoft.com/office/drawing/2014/main" id="{7CD7971F-E871-4AD5-CB09-C5D40FBDA557}"/>
+              </a:ext>
+            </a:extLst>
+          </p:cNvPr>
+          <p:cNvPicPr>
+            <a:picLocks noChangeAspect="1" noChangeArrowheads="1"/>
+          </p:cNvPicPr>
+          <p:nvPr/>
+        </p:nvPicPr>
+        <p:blipFill>
+          <a:blip r:embed="rId2">
+            <a:extLst>
+              <a:ext uri="{28A0092B-C50C-407E-A947-70E740481C1C}">
+                <a14:useLocalDpi xmlns:a14="http://schemas.microsoft.com/office/drawing/2010/main" val="0"/>
+              </a:ext>
+            </a:extLst>
+          </a:blip>
+          <a:srcRect t="19153" b="12012"/>
+          <a:stretch>
+            <a:fillRect/>
+          </a:stretch>
+        </p:blipFill>
+        <p:spPr bwMode="auto">
+          <a:xfrm>
+            <a:off x="20" y="10"/>
+            <a:ext cx="9143980" cy="4201449"/>
+          </a:xfrm>
+          <a:prstGeom prst="rect">
+            <a:avLst/>
+          </a:prstGeom>
+          <a:noFill/>
+          <a:extLst>
+            <a:ext uri="{909E8E84-426E-40DD-AFC4-6F175D3DCCD1}">
+              <a14:hiddenFill xmlns:a14="http://schemas.microsoft.com/office/drawing/2010/main">
+                <a:solidFill>
+                  <a:srgbClr val="FFFFFF"/>
+                </a:solidFill>
+              </a14:hiddenFill>
+            </a:ext>
+          </a:extLst>
+        </p:spPr>
+      </p:pic>
+      <p:grpSp>
+        <p:nvGrpSpPr>
+          <p:cNvPr id="2063" name="Group 2062">
+            <a:extLst>
+              <a:ext uri="{FF2B5EF4-FFF2-40B4-BE49-F238E27FC236}">
+                <a16:creationId xmlns:a16="http://schemas.microsoft.com/office/drawing/2014/main" id="{0B139475-2B26-4CA9-9413-DE741E49F7BB}"/>
+              </a:ext>
+              <a:ext uri="{C183D7F6-B498-43B3-948B-1728B52AA6E4}">
+                <adec:decorative xmlns:adec="http://schemas.microsoft.com/office/drawing/2017/decorative" val="1"/>
+              </a:ext>
+            </a:extLst>
+          </p:cNvPr>
+          <p:cNvGrpSpPr>
+            <a:grpSpLocks noGrp="1" noUngrp="1" noRot="1" noChangeAspect="1" noMove="1" noResize="1"/>
+          </p:cNvGrpSpPr>
+          <p:nvPr>
+            <p:extLst>
+              <p:ext uri="{386F3935-93C4-4BCD-93E2-E3B085C9AB24}">
+                <p16:designElem xmlns:p16="http://schemas.microsoft.com/office/powerpoint/2015/main" val="1"/>
+              </p:ext>
+            </p:extLst>
+          </p:nvPr>
+        </p:nvGrpSpPr>
+        <p:grpSpPr>
+          <a:xfrm>
+            <a:off x="0" y="2941813"/>
+            <a:ext cx="9141713" cy="1828800"/>
+            <a:chOff x="-305" y="3144820"/>
+            <a:chExt cx="9182100" cy="1551136"/>
+          </a:xfrm>
+        </p:grpSpPr>
+        <p:sp useBgFill="1">
+          <p:nvSpPr>
+            <p:cNvPr id="2058" name="Freeform: Shape 2057">
+              <a:extLst>
+                <a:ext uri="{FF2B5EF4-FFF2-40B4-BE49-F238E27FC236}">
+                  <a16:creationId xmlns:a16="http://schemas.microsoft.com/office/drawing/2014/main" id="{16C6BF63-6277-4C39-BE5D-3C341662CE4E}"/>
+                </a:ext>
+                <a:ext uri="{C183D7F6-B498-43B3-948B-1728B52AA6E4}">
+                  <adec:decorative xmlns:adec="http://schemas.microsoft.com/office/drawing/2017/decorative" val="1"/>
+                </a:ext>
+              </a:extLst>
+            </p:cNvPr>
+            <p:cNvSpPr/>
+            <p:nvPr>
+              <p:extLst>
+                <p:ext uri="{386F3935-93C4-4BCD-93E2-E3B085C9AB24}">
+                  <p16:designElem xmlns:p16="http://schemas.microsoft.com/office/powerpoint/2015/main" val="1"/>
+                </p:ext>
+              </p:extLst>
+            </p:nvPr>
+          </p:nvSpPr>
+          <p:spPr>
+            <a:xfrm>
+              <a:off x="-305" y="3676854"/>
+              <a:ext cx="9182100" cy="1019102"/>
+            </a:xfrm>
+            <a:custGeom>
+              <a:avLst/>
+              <a:gdLst>
+                <a:gd name="connsiteX0" fmla="*/ 0 w 9182100"/>
+                <a:gd name="connsiteY0" fmla="*/ 1019102 h 1019102"/>
+                <a:gd name="connsiteX1" fmla="*/ 9182100 w 9182100"/>
+                <a:gd name="connsiteY1" fmla="*/ 1019102 h 1019102"/>
+                <a:gd name="connsiteX2" fmla="*/ 9182100 w 9182100"/>
+                <a:gd name="connsiteY2" fmla="*/ 273009 h 1019102"/>
+                <a:gd name="connsiteX3" fmla="*/ 9065895 w 9182100"/>
+                <a:gd name="connsiteY3" fmla="*/ 278343 h 1019102"/>
+                <a:gd name="connsiteX4" fmla="*/ 8261890 w 9182100"/>
+                <a:gd name="connsiteY4" fmla="*/ 257769 h 1019102"/>
+                <a:gd name="connsiteX5" fmla="*/ 8038624 w 9182100"/>
+                <a:gd name="connsiteY5" fmla="*/ 235956 h 1019102"/>
+                <a:gd name="connsiteX6" fmla="*/ 7862221 w 9182100"/>
+                <a:gd name="connsiteY6" fmla="*/ 213097 h 1019102"/>
+                <a:gd name="connsiteX7" fmla="*/ 6238780 w 9182100"/>
+                <a:gd name="connsiteY7" fmla="*/ 126419 h 1019102"/>
+                <a:gd name="connsiteX8" fmla="*/ 5828729 w 9182100"/>
+                <a:gd name="connsiteY8" fmla="*/ 142421 h 1019102"/>
+                <a:gd name="connsiteX9" fmla="*/ 5227606 w 9182100"/>
+                <a:gd name="connsiteY9" fmla="*/ 219764 h 1019102"/>
+                <a:gd name="connsiteX10" fmla="*/ 4394359 w 9182100"/>
+                <a:gd name="connsiteY10" fmla="*/ 190713 h 1019102"/>
+                <a:gd name="connsiteX11" fmla="*/ 3789236 w 9182100"/>
+                <a:gd name="connsiteY11" fmla="*/ 107655 h 1019102"/>
+                <a:gd name="connsiteX12" fmla="*/ 3391567 w 9182100"/>
+                <a:gd name="connsiteY12" fmla="*/ 30502 h 1019102"/>
+                <a:gd name="connsiteX13" fmla="*/ 2180177 w 9182100"/>
+                <a:gd name="connsiteY13" fmla="*/ 67745 h 1019102"/>
+                <a:gd name="connsiteX14" fmla="*/ 1543336 w 9182100"/>
+                <a:gd name="connsiteY14" fmla="*/ 209953 h 1019102"/>
+                <a:gd name="connsiteX15" fmla="*/ 1276731 w 9182100"/>
+                <a:gd name="connsiteY15" fmla="*/ 286439 h 1019102"/>
+                <a:gd name="connsiteX16" fmla="*/ 441293 w 9182100"/>
+                <a:gd name="connsiteY16" fmla="*/ 292345 h 1019102"/>
+                <a:gd name="connsiteX17" fmla="*/ 0 w 9182100"/>
+                <a:gd name="connsiteY17" fmla="*/ 135563 h 1019102"/>
+                <a:gd name="connsiteX18" fmla="*/ 0 w 9182100"/>
+                <a:gd name="connsiteY18" fmla="*/ 1019102 h 1019102"/>
+              </a:gdLst>
+              <a:ahLst/>
+              <a:cxnLst>
+                <a:cxn ang="0">
+                  <a:pos x="connsiteX0" y="connsiteY0"/>
+                </a:cxn>
+                <a:cxn ang="0">
+                  <a:pos x="connsiteX1" y="connsiteY1"/>
+                </a:cxn>
+                <a:cxn ang="0">
+                  <a:pos x="connsiteX2" y="connsiteY2"/>
+                </a:cxn>
+                <a:cxn ang="0">
+                  <a:pos x="connsiteX3" y="connsiteY3"/>
+                </a:cxn>
+                <a:cxn ang="0">
+                  <a:pos x="connsiteX4" y="connsiteY4"/>
+                </a:cxn>
+                <a:cxn ang="0">
+                  <a:pos x="connsiteX5" y="connsiteY5"/>
+                </a:cxn>
+                <a:cxn ang="0">
+                  <a:pos x="connsiteX6" y="connsiteY6"/>
+                </a:cxn>
+                <a:cxn ang="0">
+                  <a:pos x="connsiteX7" y="connsiteY7"/>
+                </a:cxn>
+                <a:cxn ang="0">
+                  <a:pos x="connsiteX8" y="connsiteY8"/>
+                </a:cxn>
+                <a:cxn ang="0">
+                  <a:pos x="connsiteX9" y="connsiteY9"/>
+                </a:cxn>
+                <a:cxn ang="0">
+                  <a:pos x="connsiteX10" y="connsiteY10"/>
+                </a:cxn>
+                <a:cxn ang="0">
+                  <a:pos x="connsiteX11" y="connsiteY11"/>
+                </a:cxn>
+                <a:cxn ang="0">
+                  <a:pos x="connsiteX12" y="connsiteY12"/>
+                </a:cxn>
+                <a:cxn ang="0">
+                  <a:pos x="connsiteX13" y="connsiteY13"/>
+                </a:cxn>
+                <a:cxn ang="0">
+                  <a:pos x="connsiteX14" y="connsiteY14"/>
+                </a:cxn>
+                <a:cxn ang="0">
+                  <a:pos x="connsiteX15" y="connsiteY15"/>
+                </a:cxn>
+                <a:cxn ang="0">
+                  <a:pos x="connsiteX16" y="connsiteY16"/>
+                </a:cxn>
+                <a:cxn ang="0">
+                  <a:pos x="connsiteX17" y="connsiteY17"/>
+                </a:cxn>
+                <a:cxn ang="0">
+                  <a:pos x="connsiteX18" y="connsiteY18"/>
+                </a:cxn>
+              </a:cxnLst>
+              <a:rect l="l" t="t" r="r" b="b"/>
+              <a:pathLst>
+                <a:path w="9182100" h="1019102">
+                  <a:moveTo>
+                    <a:pt x="0" y="1019102"/>
+                  </a:moveTo>
+                  <a:lnTo>
+                    <a:pt x="9182100" y="1019102"/>
+                  </a:lnTo>
+                  <a:lnTo>
+                    <a:pt x="9182100" y="273009"/>
+                  </a:lnTo>
+                  <a:cubicBezTo>
+                    <a:pt x="9143429" y="275485"/>
+                    <a:pt x="9104662" y="277200"/>
+                    <a:pt x="9065895" y="278343"/>
+                  </a:cubicBezTo>
+                  <a:cubicBezTo>
+                    <a:pt x="8798243" y="285201"/>
+                    <a:pt x="8529066" y="277009"/>
+                    <a:pt x="8261890" y="257769"/>
+                  </a:cubicBezTo>
+                  <a:cubicBezTo>
+                    <a:pt x="8187024" y="251863"/>
+                    <a:pt x="8112443" y="245386"/>
+                    <a:pt x="8038624" y="235956"/>
+                  </a:cubicBezTo>
+                  <a:cubicBezTo>
+                    <a:pt x="7980140" y="228051"/>
+                    <a:pt x="7920228" y="219002"/>
+                    <a:pt x="7862221" y="213097"/>
+                  </a:cubicBezTo>
+                  <a:cubicBezTo>
+                    <a:pt x="7322439" y="159280"/>
+                    <a:pt x="6780943" y="130991"/>
+                    <a:pt x="6238780" y="126419"/>
+                  </a:cubicBezTo>
+                  <a:cubicBezTo>
+                    <a:pt x="6102477" y="126324"/>
+                    <a:pt x="5964745" y="128800"/>
+                    <a:pt x="5828729" y="142421"/>
+                  </a:cubicBezTo>
+                  <a:cubicBezTo>
+                    <a:pt x="5624703" y="162328"/>
+                    <a:pt x="5429441" y="202048"/>
+                    <a:pt x="5227606" y="219764"/>
+                  </a:cubicBezTo>
+                  <a:cubicBezTo>
+                    <a:pt x="4950238" y="245767"/>
+                    <a:pt x="4670393" y="228527"/>
+                    <a:pt x="4394359" y="190713"/>
+                  </a:cubicBezTo>
+                  <a:cubicBezTo>
+                    <a:pt x="4193381" y="163090"/>
+                    <a:pt x="3988880" y="147755"/>
+                    <a:pt x="3789236" y="107655"/>
+                  </a:cubicBezTo>
+                  <a:cubicBezTo>
+                    <a:pt x="3660743" y="85271"/>
+                    <a:pt x="3520249" y="51648"/>
+                    <a:pt x="3391567" y="30502"/>
+                  </a:cubicBezTo>
+                  <a:cubicBezTo>
+                    <a:pt x="2990469" y="-28553"/>
+                    <a:pt x="2579370" y="5928"/>
+                    <a:pt x="2180177" y="67745"/>
+                  </a:cubicBezTo>
+                  <a:cubicBezTo>
+                    <a:pt x="1965198" y="103273"/>
+                    <a:pt x="1751648" y="146136"/>
+                    <a:pt x="1543336" y="209953"/>
+                  </a:cubicBezTo>
+                  <a:cubicBezTo>
+                    <a:pt x="1456087" y="238528"/>
+                    <a:pt x="1365885" y="264627"/>
+                    <a:pt x="1276731" y="286439"/>
+                  </a:cubicBezTo>
+                  <a:cubicBezTo>
+                    <a:pt x="1001173" y="335398"/>
+                    <a:pt x="716471" y="346923"/>
+                    <a:pt x="441293" y="292345"/>
+                  </a:cubicBezTo>
+                  <a:cubicBezTo>
+                    <a:pt x="285655" y="263198"/>
+                    <a:pt x="143923" y="198237"/>
+                    <a:pt x="0" y="135563"/>
+                  </a:cubicBezTo>
+                  <a:lnTo>
+                    <a:pt x="0" y="1019102"/>
+                  </a:lnTo>
+                  <a:close/>
+                </a:path>
+              </a:pathLst>
+            </a:custGeom>
+            <a:ln w="9525" cap="flat">
+              <a:noFill/>
+              <a:prstDash val="solid"/>
+              <a:miter/>
+            </a:ln>
+          </p:spPr>
+          <p:txBody>
+            <a:bodyPr rtlCol="0" anchor="ctr"/>
+            <a:lstStyle/>
+            <a:p>
+              <a:endParaRPr lang="en-US" dirty="0"/>
+            </a:p>
+          </p:txBody>
+        </p:sp>
+        <p:sp>
+          <p:nvSpPr>
+            <p:cNvPr id="2059" name="Freeform: Shape 2058">
+              <a:extLst>
+                <a:ext uri="{FF2B5EF4-FFF2-40B4-BE49-F238E27FC236}">
+                  <a16:creationId xmlns:a16="http://schemas.microsoft.com/office/drawing/2014/main" id="{6EA3BAD9-C130-4A9C-9086-20D132A6CF29}"/>
+                </a:ext>
+                <a:ext uri="{C183D7F6-B498-43B3-948B-1728B52AA6E4}">
+                  <adec:decorative xmlns:adec="http://schemas.microsoft.com/office/drawing/2017/decorative" val="1"/>
+                </a:ext>
+              </a:extLst>
+            </p:cNvPr>
+            <p:cNvSpPr/>
+            <p:nvPr>
+              <p:extLst>
+                <p:ext uri="{386F3935-93C4-4BCD-93E2-E3B085C9AB24}">
+                  <p16:designElem xmlns:p16="http://schemas.microsoft.com/office/powerpoint/2015/main" val="1"/>
+                </p:ext>
+              </p:extLst>
+            </p:nvPr>
+          </p:nvSpPr>
+          <p:spPr>
+            <a:xfrm>
+              <a:off x="-305" y="3144820"/>
+              <a:ext cx="9182100" cy="932744"/>
+            </a:xfrm>
+            <a:custGeom>
+              <a:avLst/>
+              <a:gdLst>
+                <a:gd name="connsiteX0" fmla="*/ 9182100 w 9182100"/>
+                <a:gd name="connsiteY0" fmla="*/ 396420 h 932744"/>
+                <a:gd name="connsiteX1" fmla="*/ 9103805 w 9182100"/>
+                <a:gd name="connsiteY1" fmla="*/ 392229 h 932744"/>
+                <a:gd name="connsiteX2" fmla="*/ 8712422 w 9182100"/>
+                <a:gd name="connsiteY2" fmla="*/ 359749 h 932744"/>
+                <a:gd name="connsiteX3" fmla="*/ 8322755 w 9182100"/>
+                <a:gd name="connsiteY3" fmla="*/ 313362 h 932744"/>
+                <a:gd name="connsiteX4" fmla="*/ 8134826 w 9182100"/>
+                <a:gd name="connsiteY4" fmla="*/ 283930 h 932744"/>
+                <a:gd name="connsiteX5" fmla="*/ 8090916 w 9182100"/>
+                <a:gd name="connsiteY5" fmla="*/ 275643 h 932744"/>
+                <a:gd name="connsiteX6" fmla="*/ 8069485 w 9182100"/>
+                <a:gd name="connsiteY6" fmla="*/ 271262 h 932744"/>
+                <a:gd name="connsiteX7" fmla="*/ 8041862 w 9182100"/>
+                <a:gd name="connsiteY7" fmla="*/ 266595 h 932744"/>
+                <a:gd name="connsiteX8" fmla="*/ 7986903 w 9182100"/>
+                <a:gd name="connsiteY8" fmla="*/ 257546 h 932744"/>
+                <a:gd name="connsiteX9" fmla="*/ 7934230 w 9182100"/>
+                <a:gd name="connsiteY9" fmla="*/ 249640 h 932744"/>
+                <a:gd name="connsiteX10" fmla="*/ 7727537 w 9182100"/>
+                <a:gd name="connsiteY10" fmla="*/ 221922 h 932744"/>
+                <a:gd name="connsiteX11" fmla="*/ 7625239 w 9182100"/>
+                <a:gd name="connsiteY11" fmla="*/ 209730 h 932744"/>
+                <a:gd name="connsiteX12" fmla="*/ 7523227 w 9182100"/>
+                <a:gd name="connsiteY12" fmla="*/ 198110 h 932744"/>
+                <a:gd name="connsiteX13" fmla="*/ 7115651 w 9182100"/>
+                <a:gd name="connsiteY13" fmla="*/ 158010 h 932744"/>
+                <a:gd name="connsiteX14" fmla="*/ 6706839 w 9182100"/>
+                <a:gd name="connsiteY14" fmla="*/ 126958 h 932744"/>
+                <a:gd name="connsiteX15" fmla="*/ 6604064 w 9182100"/>
+                <a:gd name="connsiteY15" fmla="*/ 120862 h 932744"/>
+                <a:gd name="connsiteX16" fmla="*/ 6501003 w 9182100"/>
+                <a:gd name="connsiteY16" fmla="*/ 115338 h 932744"/>
+                <a:gd name="connsiteX17" fmla="*/ 6397467 w 9182100"/>
+                <a:gd name="connsiteY17" fmla="*/ 110385 h 932744"/>
+                <a:gd name="connsiteX18" fmla="*/ 6293168 w 9182100"/>
+                <a:gd name="connsiteY18" fmla="*/ 106860 h 932744"/>
+                <a:gd name="connsiteX19" fmla="*/ 6079712 w 9182100"/>
+                <a:gd name="connsiteY19" fmla="*/ 103908 h 932744"/>
+                <a:gd name="connsiteX20" fmla="*/ 6024563 w 9182100"/>
+                <a:gd name="connsiteY20" fmla="*/ 104479 h 932744"/>
+                <a:gd name="connsiteX21" fmla="*/ 5968080 w 9182100"/>
+                <a:gd name="connsiteY21" fmla="*/ 106479 h 932744"/>
+                <a:gd name="connsiteX22" fmla="*/ 5855875 w 9182100"/>
+                <a:gd name="connsiteY22" fmla="*/ 113242 h 932744"/>
+                <a:gd name="connsiteX23" fmla="*/ 5439251 w 9182100"/>
+                <a:gd name="connsiteY23" fmla="*/ 160105 h 932744"/>
+                <a:gd name="connsiteX24" fmla="*/ 5075396 w 9182100"/>
+                <a:gd name="connsiteY24" fmla="*/ 186585 h 932744"/>
+                <a:gd name="connsiteX25" fmla="*/ 4712780 w 9182100"/>
+                <a:gd name="connsiteY25" fmla="*/ 171249 h 932744"/>
+                <a:gd name="connsiteX26" fmla="*/ 4666679 w 9182100"/>
+                <a:gd name="connsiteY26" fmla="*/ 166773 h 932744"/>
+                <a:gd name="connsiteX27" fmla="*/ 4620292 w 9182100"/>
+                <a:gd name="connsiteY27" fmla="*/ 161629 h 932744"/>
+                <a:gd name="connsiteX28" fmla="*/ 4573810 w 9182100"/>
+                <a:gd name="connsiteY28" fmla="*/ 156009 h 932744"/>
+                <a:gd name="connsiteX29" fmla="*/ 4550569 w 9182100"/>
+                <a:gd name="connsiteY29" fmla="*/ 153057 h 932744"/>
+                <a:gd name="connsiteX30" fmla="*/ 4538948 w 9182100"/>
+                <a:gd name="connsiteY30" fmla="*/ 151628 h 932744"/>
+                <a:gd name="connsiteX31" fmla="*/ 4526566 w 9182100"/>
+                <a:gd name="connsiteY31" fmla="*/ 149913 h 932744"/>
+                <a:gd name="connsiteX32" fmla="*/ 4327779 w 9182100"/>
+                <a:gd name="connsiteY32" fmla="*/ 122862 h 932744"/>
+                <a:gd name="connsiteX33" fmla="*/ 3929729 w 9182100"/>
+                <a:gd name="connsiteY33" fmla="*/ 68189 h 932744"/>
+                <a:gd name="connsiteX34" fmla="*/ 3729133 w 9182100"/>
+                <a:gd name="connsiteY34" fmla="*/ 41900 h 932744"/>
+                <a:gd name="connsiteX35" fmla="*/ 3628930 w 9182100"/>
+                <a:gd name="connsiteY35" fmla="*/ 28946 h 932744"/>
+                <a:gd name="connsiteX36" fmla="*/ 3573399 w 9182100"/>
+                <a:gd name="connsiteY36" fmla="*/ 22278 h 932744"/>
+                <a:gd name="connsiteX37" fmla="*/ 3516916 w 9182100"/>
+                <a:gd name="connsiteY37" fmla="*/ 16468 h 932744"/>
+                <a:gd name="connsiteX38" fmla="*/ 3074670 w 9182100"/>
+                <a:gd name="connsiteY38" fmla="*/ 752 h 932744"/>
+                <a:gd name="connsiteX39" fmla="*/ 2858738 w 9182100"/>
+                <a:gd name="connsiteY39" fmla="*/ 8753 h 932744"/>
+                <a:gd name="connsiteX40" fmla="*/ 2645474 w 9182100"/>
+                <a:gd name="connsiteY40" fmla="*/ 25326 h 932744"/>
+                <a:gd name="connsiteX41" fmla="*/ 1810798 w 9182100"/>
+                <a:gd name="connsiteY41" fmla="*/ 158010 h 932744"/>
+                <a:gd name="connsiteX42" fmla="*/ 1602772 w 9182100"/>
+                <a:gd name="connsiteY42" fmla="*/ 208111 h 932744"/>
+                <a:gd name="connsiteX43" fmla="*/ 1548860 w 9182100"/>
+                <a:gd name="connsiteY43" fmla="*/ 222780 h 932744"/>
+                <a:gd name="connsiteX44" fmla="*/ 1501331 w 9182100"/>
+                <a:gd name="connsiteY44" fmla="*/ 236115 h 932744"/>
+                <a:gd name="connsiteX45" fmla="*/ 1411224 w 9182100"/>
+                <a:gd name="connsiteY45" fmla="*/ 260880 h 932744"/>
+                <a:gd name="connsiteX46" fmla="*/ 1050893 w 9182100"/>
+                <a:gd name="connsiteY46" fmla="*/ 338032 h 932744"/>
+                <a:gd name="connsiteX47" fmla="*/ 871252 w 9182100"/>
+                <a:gd name="connsiteY47" fmla="*/ 360511 h 932744"/>
+                <a:gd name="connsiteX48" fmla="*/ 781812 w 9182100"/>
+                <a:gd name="connsiteY48" fmla="*/ 366512 h 932744"/>
+                <a:gd name="connsiteX49" fmla="*/ 692563 w 9182100"/>
+                <a:gd name="connsiteY49" fmla="*/ 369655 h 932744"/>
+                <a:gd name="connsiteX50" fmla="*/ 515017 w 9182100"/>
+                <a:gd name="connsiteY50" fmla="*/ 363940 h 932744"/>
+                <a:gd name="connsiteX51" fmla="*/ 337661 w 9182100"/>
+                <a:gd name="connsiteY51" fmla="*/ 341937 h 932744"/>
+                <a:gd name="connsiteX52" fmla="*/ 156972 w 9182100"/>
+                <a:gd name="connsiteY52" fmla="*/ 303456 h 932744"/>
+                <a:gd name="connsiteX53" fmla="*/ 0 w 9182100"/>
+                <a:gd name="connsiteY53" fmla="*/ 261642 h 932744"/>
+                <a:gd name="connsiteX54" fmla="*/ 0 w 9182100"/>
+                <a:gd name="connsiteY54" fmla="*/ 713412 h 932744"/>
+                <a:gd name="connsiteX55" fmla="*/ 9144 w 9182100"/>
+                <a:gd name="connsiteY55" fmla="*/ 717699 h 932744"/>
+                <a:gd name="connsiteX56" fmla="*/ 213360 w 9182100"/>
+                <a:gd name="connsiteY56" fmla="*/ 801042 h 932744"/>
+                <a:gd name="connsiteX57" fmla="*/ 653510 w 9182100"/>
+                <a:gd name="connsiteY57" fmla="*/ 908199 h 932744"/>
+                <a:gd name="connsiteX58" fmla="*/ 1101947 w 9182100"/>
+                <a:gd name="connsiteY58" fmla="*/ 930773 h 932744"/>
+                <a:gd name="connsiteX59" fmla="*/ 1540002 w 9182100"/>
+                <a:gd name="connsiteY59" fmla="*/ 889434 h 932744"/>
+                <a:gd name="connsiteX60" fmla="*/ 1647158 w 9182100"/>
+                <a:gd name="connsiteY60" fmla="*/ 871242 h 932744"/>
+                <a:gd name="connsiteX61" fmla="*/ 1698117 w 9182100"/>
+                <a:gd name="connsiteY61" fmla="*/ 862193 h 932744"/>
+                <a:gd name="connsiteX62" fmla="*/ 1742789 w 9182100"/>
+                <a:gd name="connsiteY62" fmla="*/ 854668 h 932744"/>
+                <a:gd name="connsiteX63" fmla="*/ 1931003 w 9182100"/>
+                <a:gd name="connsiteY63" fmla="*/ 826950 h 932744"/>
+                <a:gd name="connsiteX64" fmla="*/ 2314861 w 9182100"/>
+                <a:gd name="connsiteY64" fmla="*/ 783897 h 932744"/>
+                <a:gd name="connsiteX65" fmla="*/ 2506885 w 9182100"/>
+                <a:gd name="connsiteY65" fmla="*/ 768086 h 932744"/>
+                <a:gd name="connsiteX66" fmla="*/ 2602611 w 9182100"/>
+                <a:gd name="connsiteY66" fmla="*/ 762085 h 932744"/>
+                <a:gd name="connsiteX67" fmla="*/ 2698052 w 9182100"/>
+                <a:gd name="connsiteY67" fmla="*/ 756846 h 932744"/>
+                <a:gd name="connsiteX68" fmla="*/ 2887980 w 9182100"/>
+                <a:gd name="connsiteY68" fmla="*/ 750846 h 932744"/>
+                <a:gd name="connsiteX69" fmla="*/ 3075813 w 9182100"/>
+                <a:gd name="connsiteY69" fmla="*/ 750179 h 932744"/>
+                <a:gd name="connsiteX70" fmla="*/ 3168587 w 9182100"/>
+                <a:gd name="connsiteY70" fmla="*/ 752751 h 932744"/>
+                <a:gd name="connsiteX71" fmla="*/ 3260408 w 9182100"/>
+                <a:gd name="connsiteY71" fmla="*/ 756656 h 932744"/>
+                <a:gd name="connsiteX72" fmla="*/ 3440049 w 9182100"/>
+                <a:gd name="connsiteY72" fmla="*/ 771610 h 932744"/>
+                <a:gd name="connsiteX73" fmla="*/ 3483864 w 9182100"/>
+                <a:gd name="connsiteY73" fmla="*/ 776849 h 932744"/>
+                <a:gd name="connsiteX74" fmla="*/ 3528536 w 9182100"/>
+                <a:gd name="connsiteY74" fmla="*/ 782469 h 932744"/>
+                <a:gd name="connsiteX75" fmla="*/ 3628549 w 9182100"/>
+                <a:gd name="connsiteY75" fmla="*/ 796089 h 932744"/>
+                <a:gd name="connsiteX76" fmla="*/ 3828574 w 9182100"/>
+                <a:gd name="connsiteY76" fmla="*/ 823140 h 932744"/>
+                <a:gd name="connsiteX77" fmla="*/ 4231196 w 9182100"/>
+                <a:gd name="connsiteY77" fmla="*/ 874099 h 932744"/>
+                <a:gd name="connsiteX78" fmla="*/ 4433126 w 9182100"/>
+                <a:gd name="connsiteY78" fmla="*/ 897435 h 932744"/>
+                <a:gd name="connsiteX79" fmla="*/ 4485990 w 9182100"/>
+                <a:gd name="connsiteY79" fmla="*/ 903246 h 932744"/>
+                <a:gd name="connsiteX80" fmla="*/ 4539806 w 9182100"/>
+                <a:gd name="connsiteY80" fmla="*/ 908961 h 932744"/>
+                <a:gd name="connsiteX81" fmla="*/ 4593908 w 9182100"/>
+                <a:gd name="connsiteY81" fmla="*/ 914199 h 932744"/>
+                <a:gd name="connsiteX82" fmla="*/ 4648296 w 9182100"/>
+                <a:gd name="connsiteY82" fmla="*/ 918771 h 932744"/>
+                <a:gd name="connsiteX83" fmla="*/ 5092446 w 9182100"/>
+                <a:gd name="connsiteY83" fmla="*/ 931154 h 932744"/>
+                <a:gd name="connsiteX84" fmla="*/ 5533168 w 9182100"/>
+                <a:gd name="connsiteY84" fmla="*/ 891816 h 932744"/>
+                <a:gd name="connsiteX85" fmla="*/ 5918169 w 9182100"/>
+                <a:gd name="connsiteY85" fmla="*/ 840666 h 932744"/>
+                <a:gd name="connsiteX86" fmla="*/ 6007323 w 9182100"/>
+                <a:gd name="connsiteY86" fmla="*/ 833237 h 932744"/>
+                <a:gd name="connsiteX87" fmla="*/ 6051709 w 9182100"/>
+                <a:gd name="connsiteY87" fmla="*/ 830570 h 932744"/>
+                <a:gd name="connsiteX88" fmla="*/ 6097429 w 9182100"/>
+                <a:gd name="connsiteY88" fmla="*/ 828379 h 932744"/>
+                <a:gd name="connsiteX89" fmla="*/ 6287834 w 9182100"/>
+                <a:gd name="connsiteY89" fmla="*/ 822569 h 932744"/>
+                <a:gd name="connsiteX90" fmla="*/ 6681597 w 9182100"/>
+                <a:gd name="connsiteY90" fmla="*/ 821235 h 932744"/>
+                <a:gd name="connsiteX91" fmla="*/ 7079647 w 9182100"/>
+                <a:gd name="connsiteY91" fmla="*/ 826569 h 932744"/>
+                <a:gd name="connsiteX92" fmla="*/ 7478173 w 9182100"/>
+                <a:gd name="connsiteY92" fmla="*/ 836094 h 932744"/>
+                <a:gd name="connsiteX93" fmla="*/ 7871937 w 9182100"/>
+                <a:gd name="connsiteY93" fmla="*/ 851430 h 932744"/>
+                <a:gd name="connsiteX94" fmla="*/ 7919657 w 9182100"/>
+                <a:gd name="connsiteY94" fmla="*/ 854097 h 932744"/>
+                <a:gd name="connsiteX95" fmla="*/ 7964901 w 9182100"/>
+                <a:gd name="connsiteY95" fmla="*/ 857240 h 932744"/>
+                <a:gd name="connsiteX96" fmla="*/ 8015955 w 9182100"/>
+                <a:gd name="connsiteY96" fmla="*/ 861050 h 932744"/>
+                <a:gd name="connsiteX97" fmla="*/ 8072247 w 9182100"/>
+                <a:gd name="connsiteY97" fmla="*/ 864384 h 932744"/>
+                <a:gd name="connsiteX98" fmla="*/ 8286750 w 9182100"/>
+                <a:gd name="connsiteY98" fmla="*/ 868384 h 932744"/>
+                <a:gd name="connsiteX99" fmla="*/ 8704040 w 9182100"/>
+                <a:gd name="connsiteY99" fmla="*/ 853716 h 932744"/>
+                <a:gd name="connsiteX100" fmla="*/ 9120188 w 9182100"/>
+                <a:gd name="connsiteY100" fmla="*/ 814092 h 932744"/>
+                <a:gd name="connsiteX101" fmla="*/ 9181909 w 9182100"/>
+                <a:gd name="connsiteY101" fmla="*/ 805519 h 932744"/>
+                <a:gd name="connsiteX102" fmla="*/ 9181909 w 9182100"/>
+                <a:gd name="connsiteY102" fmla="*/ 396420 h 932744"/>
+              </a:gdLst>
+              <a:ahLst/>
+              <a:cxnLst>
+                <a:cxn ang="0">
+                  <a:pos x="connsiteX0" y="connsiteY0"/>
+                </a:cxn>
+                <a:cxn ang="0">
+                  <a:pos x="connsiteX1" y="connsiteY1"/>
+                </a:cxn>
+                <a:cxn ang="0">
+                  <a:pos x="connsiteX2" y="connsiteY2"/>
+                </a:cxn>
+                <a:cxn ang="0">
+                  <a:pos x="connsiteX3" y="connsiteY3"/>
+                </a:cxn>
+                <a:cxn ang="0">
+                  <a:pos x="connsiteX4" y="connsiteY4"/>
+                </a:cxn>
+                <a:cxn ang="0">
+                  <a:pos x="connsiteX5" y="connsiteY5"/>
+                </a:cxn>
+                <a:cxn ang="0">
+                  <a:pos x="connsiteX6" y="connsiteY6"/>
+                </a:cxn>
+                <a:cxn ang="0">
+                  <a:pos x="connsiteX7" y="connsiteY7"/>
+                </a:cxn>
+                <a:cxn ang="0">
+                  <a:pos x="connsiteX8" y="connsiteY8"/>
+                </a:cxn>
+                <a:cxn ang="0">
+                  <a:pos x="connsiteX9" y="connsiteY9"/>
+                </a:cxn>
+                <a:cxn ang="0">
+                  <a:pos x="connsiteX10" y="connsiteY10"/>
+                </a:cxn>
+                <a:cxn ang="0">
+                  <a:pos x="connsiteX11" y="connsiteY11"/>
+                </a:cxn>
+                <a:cxn ang="0">
+                  <a:pos x="connsiteX12" y="connsiteY12"/>
+                </a:cxn>
+                <a:cxn ang="0">
+                  <a:pos x="connsiteX13" y="connsiteY13"/>
+                </a:cxn>
+                <a:cxn ang="0">
+                  <a:pos x="connsiteX14" y="connsiteY14"/>
+                </a:cxn>
+                <a:cxn ang="0">
+                  <a:pos x="connsiteX15" y="connsiteY15"/>
+                </a:cxn>
+                <a:cxn ang="0">
+                  <a:pos x="connsiteX16" y="connsiteY16"/>
+                </a:cxn>
+                <a:cxn ang="0">
+                  <a:pos x="connsiteX17" y="connsiteY17"/>
+                </a:cxn>
+                <a:cxn ang="0">
+                  <a:pos x="connsiteX18" y="connsiteY18"/>
+                </a:cxn>
+                <a:cxn ang="0">
+                  <a:pos x="connsiteX19" y="connsiteY19"/>
+                </a:cxn>
+                <a:cxn ang="0">
+                  <a:pos x="connsiteX20" y="connsiteY20"/>
+                </a:cxn>
+                <a:cxn ang="0">
+                  <a:pos x="connsiteX21" y="connsiteY21"/>
+                </a:cxn>
+                <a:cxn ang="0">
+                  <a:pos x="connsiteX22" y="connsiteY22"/>
+                </a:cxn>
+                <a:cxn ang="0">
+                  <a:pos x="connsiteX23" y="connsiteY23"/>
+                </a:cxn>
+                <a:cxn ang="0">
+                  <a:pos x="connsiteX24" y="connsiteY24"/>
+                </a:cxn>
+                <a:cxn ang="0">
+                  <a:pos x="connsiteX25" y="connsiteY25"/>
+                </a:cxn>
+                <a:cxn ang="0">
+                  <a:pos x="connsiteX26" y="connsiteY26"/>
+                </a:cxn>
+                <a:cxn ang="0">
+                  <a:pos x="connsiteX27" y="connsiteY27"/>
+                </a:cxn>
+                <a:cxn ang="0">
+                  <a:pos x="connsiteX28" y="connsiteY28"/>
+                </a:cxn>
+                <a:cxn ang="0">
+                  <a:pos x="connsiteX29" y="connsiteY29"/>
+                </a:cxn>
+                <a:cxn ang="0">
+                  <a:pos x="connsiteX30" y="connsiteY30"/>
+                </a:cxn>
+                <a:cxn ang="0">
+                  <a:pos x="connsiteX31" y="connsiteY31"/>
+                </a:cxn>
+                <a:cxn ang="0">
+                  <a:pos x="connsiteX32" y="connsiteY32"/>
+                </a:cxn>
+                <a:cxn ang="0">
+                  <a:pos x="connsiteX33" y="connsiteY33"/>
+                </a:cxn>
+                <a:cxn ang="0">
+                  <a:pos x="connsiteX34" y="connsiteY34"/>
+                </a:cxn>
+                <a:cxn ang="0">
+                  <a:pos x="connsiteX35" y="connsiteY35"/>
+                </a:cxn>
+                <a:cxn ang="0">
+                  <a:pos x="connsiteX36" y="connsiteY36"/>
+                </a:cxn>
+                <a:cxn ang="0">
+                  <a:pos x="connsiteX37" y="connsiteY37"/>
+                </a:cxn>
+                <a:cxn ang="0">
+                  <a:pos x="connsiteX38" y="connsiteY38"/>
+                </a:cxn>
+                <a:cxn ang="0">
+                  <a:pos x="connsiteX39" y="connsiteY39"/>
+                </a:cxn>
+                <a:cxn ang="0">
+                  <a:pos x="connsiteX40" y="connsiteY40"/>
+                </a:cxn>
+                <a:cxn ang="0">
+                  <a:pos x="connsiteX41" y="connsiteY41"/>
+                </a:cxn>
+                <a:cxn ang="0">
+                  <a:pos x="connsiteX42" y="connsiteY42"/>
+                </a:cxn>
+                <a:cxn ang="0">
+                  <a:pos x="connsiteX43" y="connsiteY43"/>
+                </a:cxn>
+                <a:cxn ang="0">
+                  <a:pos x="connsiteX44" y="connsiteY44"/>
+                </a:cxn>
+                <a:cxn ang="0">
+                  <a:pos x="connsiteX45" y="connsiteY45"/>
+                </a:cxn>
+                <a:cxn ang="0">
+                  <a:pos x="connsiteX46" y="connsiteY46"/>
+                </a:cxn>
+                <a:cxn ang="0">
+                  <a:pos x="connsiteX47" y="connsiteY47"/>
+                </a:cxn>
+                <a:cxn ang="0">
+                  <a:pos x="connsiteX48" y="connsiteY48"/>
+                </a:cxn>
+                <a:cxn ang="0">
+                  <a:pos x="connsiteX49" y="connsiteY49"/>
+                </a:cxn>
+                <a:cxn ang="0">
+                  <a:pos x="connsiteX50" y="connsiteY50"/>
+                </a:cxn>
+                <a:cxn ang="0">
+                  <a:pos x="connsiteX51" y="connsiteY51"/>
+                </a:cxn>
+                <a:cxn ang="0">
+                  <a:pos x="connsiteX52" y="connsiteY52"/>
+                </a:cxn>
+                <a:cxn ang="0">
+                  <a:pos x="connsiteX53" y="connsiteY53"/>
+                </a:cxn>
+                <a:cxn ang="0">
+                  <a:pos x="connsiteX54" y="connsiteY54"/>
+                </a:cxn>
+                <a:cxn ang="0">
+                  <a:pos x="connsiteX55" y="connsiteY55"/>
+                </a:cxn>
+                <a:cxn ang="0">
+                  <a:pos x="connsiteX56" y="connsiteY56"/>
+                </a:cxn>
+                <a:cxn ang="0">
+                  <a:pos x="connsiteX57" y="connsiteY57"/>
+                </a:cxn>
+                <a:cxn ang="0">
+                  <a:pos x="connsiteX58" y="connsiteY58"/>
+                </a:cxn>
+                <a:cxn ang="0">
+                  <a:pos x="connsiteX59" y="connsiteY59"/>
+                </a:cxn>
+                <a:cxn ang="0">
+                  <a:pos x="connsiteX60" y="connsiteY60"/>
+                </a:cxn>
+                <a:cxn ang="0">
+                  <a:pos x="connsiteX61" y="connsiteY61"/>
+                </a:cxn>
+                <a:cxn ang="0">
+                  <a:pos x="connsiteX62" y="connsiteY62"/>
+                </a:cxn>
+                <a:cxn ang="0">
+                  <a:pos x="connsiteX63" y="connsiteY63"/>
+                </a:cxn>
+                <a:cxn ang="0">
+                  <a:pos x="connsiteX64" y="connsiteY64"/>
+                </a:cxn>
+                <a:cxn ang="0">
+                  <a:pos x="connsiteX65" y="connsiteY65"/>
+                </a:cxn>
+                <a:cxn ang="0">
+                  <a:pos x="connsiteX66" y="connsiteY66"/>
+                </a:cxn>
+                <a:cxn ang="0">
+                  <a:pos x="connsiteX67" y="connsiteY67"/>
+                </a:cxn>
+                <a:cxn ang="0">
+                  <a:pos x="connsiteX68" y="connsiteY68"/>
+                </a:cxn>
+                <a:cxn ang="0">
+                  <a:pos x="connsiteX69" y="connsiteY69"/>
+                </a:cxn>
+                <a:cxn ang="0">
+                  <a:pos x="connsiteX70" y="connsiteY70"/>
+                </a:cxn>
+                <a:cxn ang="0">
+                  <a:pos x="connsiteX71" y="connsiteY71"/>
+                </a:cxn>
+                <a:cxn ang="0">
+                  <a:pos x="connsiteX72" y="connsiteY72"/>
+                </a:cxn>
+                <a:cxn ang="0">
+                  <a:pos x="connsiteX73" y="connsiteY73"/>
+                </a:cxn>
+                <a:cxn ang="0">
+                  <a:pos x="connsiteX74" y="connsiteY74"/>
+                </a:cxn>
+                <a:cxn ang="0">
+                  <a:pos x="connsiteX75" y="connsiteY75"/>
+                </a:cxn>
+                <a:cxn ang="0">
+                  <a:pos x="connsiteX76" y="connsiteY76"/>
+                </a:cxn>
+                <a:cxn ang="0">
+                  <a:pos x="connsiteX77" y="connsiteY77"/>
+                </a:cxn>
+                <a:cxn ang="0">
+                  <a:pos x="connsiteX78" y="connsiteY78"/>
+                </a:cxn>
+                <a:cxn ang="0">
+                  <a:pos x="connsiteX79" y="connsiteY79"/>
+                </a:cxn>
+                <a:cxn ang="0">
+                  <a:pos x="connsiteX80" y="connsiteY80"/>
+                </a:cxn>
+                <a:cxn ang="0">
+                  <a:pos x="connsiteX81" y="connsiteY81"/>
+                </a:cxn>
+                <a:cxn ang="0">
+                  <a:pos x="connsiteX82" y="connsiteY82"/>
+                </a:cxn>
+                <a:cxn ang="0">
+                  <a:pos x="connsiteX83" y="connsiteY83"/>
+                </a:cxn>
+                <a:cxn ang="0">
+                  <a:pos x="connsiteX84" y="connsiteY84"/>
+                </a:cxn>
+                <a:cxn ang="0">
+                  <a:pos x="connsiteX85" y="connsiteY85"/>
+                </a:cxn>
+                <a:cxn ang="0">
+                  <a:pos x="connsiteX86" y="connsiteY86"/>
+                </a:cxn>
+                <a:cxn ang="0">
+                  <a:pos x="connsiteX87" y="connsiteY87"/>
+                </a:cxn>
+                <a:cxn ang="0">
+                  <a:pos x="connsiteX88" y="connsiteY88"/>
+                </a:cxn>
+                <a:cxn ang="0">
+                  <a:pos x="connsiteX89" y="connsiteY89"/>
+                </a:cxn>
+                <a:cxn ang="0">
+                  <a:pos x="connsiteX90" y="connsiteY90"/>
+                </a:cxn>
+                <a:cxn ang="0">
+                  <a:pos x="connsiteX91" y="connsiteY91"/>
+                </a:cxn>
+                <a:cxn ang="0">
+                  <a:pos x="connsiteX92" y="connsiteY92"/>
+                </a:cxn>
+                <a:cxn ang="0">
+                  <a:pos x="connsiteX93" y="connsiteY93"/>
+                </a:cxn>
+                <a:cxn ang="0">
+                  <a:pos x="connsiteX94" y="connsiteY94"/>
+                </a:cxn>
+                <a:cxn ang="0">
+                  <a:pos x="connsiteX95" y="connsiteY95"/>
+                </a:cxn>
+                <a:cxn ang="0">
+                  <a:pos x="connsiteX96" y="connsiteY96"/>
+                </a:cxn>
+                <a:cxn ang="0">
+                  <a:pos x="connsiteX97" y="connsiteY97"/>
+                </a:cxn>
+                <a:cxn ang="0">
+                  <a:pos x="connsiteX98" y="connsiteY98"/>
+                </a:cxn>
+                <a:cxn ang="0">
+                  <a:pos x="connsiteX99" y="connsiteY99"/>
+                </a:cxn>
+                <a:cxn ang="0">
+                  <a:pos x="connsiteX100" y="connsiteY100"/>
+                </a:cxn>
+                <a:cxn ang="0">
+                  <a:pos x="connsiteX101" y="connsiteY101"/>
+                </a:cxn>
+                <a:cxn ang="0">
+                  <a:pos x="connsiteX102" y="connsiteY102"/>
+                </a:cxn>
+              </a:cxnLst>
+              <a:rect l="l" t="t" r="r" b="b"/>
+              <a:pathLst>
+                <a:path w="9182100" h="932744">
+                  <a:moveTo>
+                    <a:pt x="9182100" y="396420"/>
+                  </a:moveTo>
+                  <a:cubicBezTo>
+                    <a:pt x="9156097" y="395182"/>
+                    <a:pt x="9129999" y="393753"/>
+                    <a:pt x="9103805" y="392229"/>
+                  </a:cubicBezTo>
+                  <a:cubicBezTo>
+                    <a:pt x="8974169" y="384419"/>
+                    <a:pt x="8843105" y="372989"/>
+                    <a:pt x="8712422" y="359749"/>
+                  </a:cubicBezTo>
+                  <a:cubicBezTo>
+                    <a:pt x="8581739" y="346319"/>
+                    <a:pt x="8451056" y="331269"/>
+                    <a:pt x="8322755" y="313362"/>
+                  </a:cubicBezTo>
+                  <a:cubicBezTo>
+                    <a:pt x="8258747" y="304695"/>
+                    <a:pt x="8195120" y="294979"/>
+                    <a:pt x="8134826" y="283930"/>
+                  </a:cubicBezTo>
+                  <a:cubicBezTo>
+                    <a:pt x="8119872" y="281168"/>
+                    <a:pt x="8105013" y="278501"/>
+                    <a:pt x="8090916" y="275643"/>
+                  </a:cubicBezTo>
+                  <a:lnTo>
+                    <a:pt x="8069485" y="271262"/>
+                  </a:lnTo>
+                  <a:lnTo>
+                    <a:pt x="8041862" y="266595"/>
+                  </a:lnTo>
+                  <a:cubicBezTo>
+                    <a:pt x="8023574" y="263547"/>
+                    <a:pt x="8004524" y="260213"/>
+                    <a:pt x="7986903" y="257546"/>
+                  </a:cubicBezTo>
+                  <a:lnTo>
+                    <a:pt x="7934230" y="249640"/>
+                  </a:lnTo>
+                  <a:cubicBezTo>
+                    <a:pt x="7864221" y="239258"/>
+                    <a:pt x="7795832" y="230209"/>
+                    <a:pt x="7727537" y="221922"/>
+                  </a:cubicBezTo>
+                  <a:lnTo>
+                    <a:pt x="7625239" y="209730"/>
+                  </a:lnTo>
+                  <a:lnTo>
+                    <a:pt x="7523227" y="198110"/>
+                  </a:lnTo>
+                  <a:cubicBezTo>
+                    <a:pt x="7387209" y="183060"/>
+                    <a:pt x="7251573" y="170392"/>
+                    <a:pt x="7115651" y="158010"/>
+                  </a:cubicBezTo>
+                  <a:cubicBezTo>
+                    <a:pt x="6979730" y="146580"/>
+                    <a:pt x="6843522" y="135721"/>
+                    <a:pt x="6706839" y="126958"/>
+                  </a:cubicBezTo>
+                  <a:lnTo>
+                    <a:pt x="6604064" y="120862"/>
+                  </a:lnTo>
+                  <a:cubicBezTo>
+                    <a:pt x="6569869" y="118767"/>
+                    <a:pt x="6535484" y="116862"/>
+                    <a:pt x="6501003" y="115338"/>
+                  </a:cubicBezTo>
+                  <a:lnTo>
+                    <a:pt x="6397467" y="110385"/>
+                  </a:lnTo>
+                  <a:lnTo>
+                    <a:pt x="6293168" y="106860"/>
+                  </a:lnTo>
+                  <a:cubicBezTo>
+                    <a:pt x="6222969" y="105146"/>
+                    <a:pt x="6152769" y="103527"/>
+                    <a:pt x="6079712" y="103908"/>
+                  </a:cubicBezTo>
+                  <a:cubicBezTo>
+                    <a:pt x="6061710" y="103908"/>
+                    <a:pt x="6043708" y="103812"/>
+                    <a:pt x="6024563" y="104479"/>
+                  </a:cubicBezTo>
+                  <a:cubicBezTo>
+                    <a:pt x="6005703" y="104955"/>
+                    <a:pt x="5986844" y="105527"/>
+                    <a:pt x="5968080" y="106479"/>
+                  </a:cubicBezTo>
+                  <a:cubicBezTo>
+                    <a:pt x="5930456" y="108003"/>
+                    <a:pt x="5893023" y="110385"/>
+                    <a:pt x="5855875" y="113242"/>
+                  </a:cubicBezTo>
+                  <a:cubicBezTo>
+                    <a:pt x="5706904" y="124577"/>
+                    <a:pt x="5565934" y="145151"/>
+                    <a:pt x="5439251" y="160105"/>
+                  </a:cubicBezTo>
+                  <a:cubicBezTo>
+                    <a:pt x="5311902" y="175536"/>
+                    <a:pt x="5194745" y="184680"/>
+                    <a:pt x="5075396" y="186585"/>
+                  </a:cubicBezTo>
+                  <a:cubicBezTo>
+                    <a:pt x="4956429" y="188490"/>
+                    <a:pt x="4835748" y="182775"/>
+                    <a:pt x="4712780" y="171249"/>
+                  </a:cubicBezTo>
+                  <a:lnTo>
+                    <a:pt x="4666679" y="166773"/>
+                  </a:lnTo>
+                  <a:lnTo>
+                    <a:pt x="4620292" y="161629"/>
+                  </a:lnTo>
+                  <a:cubicBezTo>
+                    <a:pt x="4604862" y="160010"/>
+                    <a:pt x="4589336" y="157914"/>
+                    <a:pt x="4573810" y="156009"/>
+                  </a:cubicBezTo>
+                  <a:lnTo>
+                    <a:pt x="4550569" y="153057"/>
+                  </a:lnTo>
+                  <a:lnTo>
+                    <a:pt x="4538948" y="151628"/>
+                  </a:lnTo>
+                  <a:lnTo>
+                    <a:pt x="4526566" y="149913"/>
+                  </a:lnTo>
+                  <a:lnTo>
+                    <a:pt x="4327779" y="122862"/>
+                  </a:lnTo>
+                  <a:lnTo>
+                    <a:pt x="3929729" y="68189"/>
+                  </a:lnTo>
+                  <a:lnTo>
+                    <a:pt x="3729133" y="41900"/>
+                  </a:lnTo>
+                  <a:lnTo>
+                    <a:pt x="3628930" y="28946"/>
+                  </a:lnTo>
+                  <a:lnTo>
+                    <a:pt x="3573399" y="22278"/>
+                  </a:lnTo>
+                  <a:cubicBezTo>
+                    <a:pt x="3554445" y="19992"/>
+                    <a:pt x="3535585" y="17992"/>
+                    <a:pt x="3516916" y="16468"/>
+                  </a:cubicBezTo>
+                  <a:cubicBezTo>
+                    <a:pt x="3366611" y="2752"/>
+                    <a:pt x="3219736" y="-2010"/>
+                    <a:pt x="3074670" y="752"/>
+                  </a:cubicBezTo>
+                  <a:cubicBezTo>
+                    <a:pt x="3002280" y="2181"/>
+                    <a:pt x="2930176" y="4467"/>
+                    <a:pt x="2858738" y="8753"/>
+                  </a:cubicBezTo>
+                  <a:cubicBezTo>
+                    <a:pt x="2787206" y="13039"/>
+                    <a:pt x="2716149" y="18754"/>
+                    <a:pt x="2645474" y="25326"/>
+                  </a:cubicBezTo>
+                  <a:cubicBezTo>
+                    <a:pt x="2362581" y="52473"/>
+                    <a:pt x="2085975" y="97145"/>
+                    <a:pt x="1810798" y="158010"/>
+                  </a:cubicBezTo>
+                  <a:cubicBezTo>
+                    <a:pt x="1741837" y="173345"/>
+                    <a:pt x="1673066" y="189442"/>
+                    <a:pt x="1602772" y="208111"/>
+                  </a:cubicBezTo>
+                  <a:lnTo>
+                    <a:pt x="1548860" y="222780"/>
+                  </a:lnTo>
+                  <a:lnTo>
+                    <a:pt x="1501331" y="236115"/>
+                  </a:lnTo>
+                  <a:cubicBezTo>
+                    <a:pt x="1471327" y="244497"/>
+                    <a:pt x="1441228" y="253450"/>
+                    <a:pt x="1411224" y="260880"/>
+                  </a:cubicBezTo>
+                  <a:cubicBezTo>
+                    <a:pt x="1291209" y="293074"/>
+                    <a:pt x="1170813" y="318982"/>
+                    <a:pt x="1050893" y="338032"/>
+                  </a:cubicBezTo>
+                  <a:cubicBezTo>
+                    <a:pt x="990790" y="347557"/>
+                    <a:pt x="931069" y="354796"/>
+                    <a:pt x="871252" y="360511"/>
+                  </a:cubicBezTo>
+                  <a:cubicBezTo>
+                    <a:pt x="841438" y="362702"/>
+                    <a:pt x="811530" y="365559"/>
+                    <a:pt x="781812" y="366512"/>
+                  </a:cubicBezTo>
+                  <a:cubicBezTo>
+                    <a:pt x="751904" y="368512"/>
+                    <a:pt x="722376" y="368893"/>
+                    <a:pt x="692563" y="369655"/>
+                  </a:cubicBezTo>
+                  <a:cubicBezTo>
+                    <a:pt x="633222" y="370036"/>
+                    <a:pt x="574167" y="368131"/>
+                    <a:pt x="515017" y="363940"/>
+                  </a:cubicBezTo>
+                  <a:cubicBezTo>
+                    <a:pt x="455867" y="359749"/>
+                    <a:pt x="397097" y="351748"/>
+                    <a:pt x="337661" y="341937"/>
+                  </a:cubicBezTo>
+                  <a:cubicBezTo>
+                    <a:pt x="278225" y="331936"/>
+                    <a:pt x="218599" y="318696"/>
+                    <a:pt x="156972" y="303456"/>
+                  </a:cubicBezTo>
+                  <a:cubicBezTo>
+                    <a:pt x="106680" y="290883"/>
+                    <a:pt x="55150" y="276405"/>
+                    <a:pt x="0" y="261642"/>
+                  </a:cubicBezTo>
+                  <a:lnTo>
+                    <a:pt x="0" y="713412"/>
+                  </a:lnTo>
+                  <a:cubicBezTo>
+                    <a:pt x="3048" y="714841"/>
+                    <a:pt x="6096" y="716270"/>
+                    <a:pt x="9144" y="717699"/>
+                  </a:cubicBezTo>
+                  <a:cubicBezTo>
+                    <a:pt x="74295" y="747798"/>
+                    <a:pt x="142875" y="775896"/>
+                    <a:pt x="213360" y="801042"/>
+                  </a:cubicBezTo>
+                  <a:cubicBezTo>
+                    <a:pt x="354521" y="851715"/>
+                    <a:pt x="503873" y="887244"/>
+                    <a:pt x="653510" y="908199"/>
+                  </a:cubicBezTo>
+                  <a:cubicBezTo>
+                    <a:pt x="803338" y="928773"/>
+                    <a:pt x="953929" y="935631"/>
+                    <a:pt x="1101947" y="930773"/>
+                  </a:cubicBezTo>
+                  <a:cubicBezTo>
+                    <a:pt x="1250252" y="926582"/>
+                    <a:pt x="1396365" y="911437"/>
+                    <a:pt x="1540002" y="889434"/>
+                  </a:cubicBezTo>
+                  <a:cubicBezTo>
+                    <a:pt x="1576197" y="884386"/>
+                    <a:pt x="1611535" y="877433"/>
+                    <a:pt x="1647158" y="871242"/>
+                  </a:cubicBezTo>
+                  <a:lnTo>
+                    <a:pt x="1698117" y="862193"/>
+                  </a:lnTo>
+                  <a:lnTo>
+                    <a:pt x="1742789" y="854668"/>
+                  </a:lnTo>
+                  <a:cubicBezTo>
+                    <a:pt x="1804035" y="845048"/>
+                    <a:pt x="1867472" y="835428"/>
+                    <a:pt x="1931003" y="826950"/>
+                  </a:cubicBezTo>
+                  <a:cubicBezTo>
+                    <a:pt x="2058353" y="810282"/>
+                    <a:pt x="2186750" y="795327"/>
+                    <a:pt x="2314861" y="783897"/>
+                  </a:cubicBezTo>
+                  <a:cubicBezTo>
+                    <a:pt x="2378964" y="778087"/>
+                    <a:pt x="2442972" y="772467"/>
+                    <a:pt x="2506885" y="768086"/>
+                  </a:cubicBezTo>
+                  <a:cubicBezTo>
+                    <a:pt x="2538794" y="765990"/>
+                    <a:pt x="2570798" y="763800"/>
+                    <a:pt x="2602611" y="762085"/>
+                  </a:cubicBezTo>
+                  <a:cubicBezTo>
+                    <a:pt x="2634520" y="760180"/>
+                    <a:pt x="2666333" y="758370"/>
+                    <a:pt x="2698052" y="756846"/>
+                  </a:cubicBezTo>
+                  <a:cubicBezTo>
+                    <a:pt x="2761583" y="753894"/>
+                    <a:pt x="2825020" y="751703"/>
+                    <a:pt x="2887980" y="750846"/>
+                  </a:cubicBezTo>
+                  <a:cubicBezTo>
+                    <a:pt x="2951036" y="749417"/>
+                    <a:pt x="3013615" y="749322"/>
+                    <a:pt x="3075813" y="750179"/>
+                  </a:cubicBezTo>
+                  <a:cubicBezTo>
+                    <a:pt x="3106865" y="750846"/>
+                    <a:pt x="3137916" y="751417"/>
+                    <a:pt x="3168587" y="752751"/>
+                  </a:cubicBezTo>
+                  <a:cubicBezTo>
+                    <a:pt x="3199448" y="753703"/>
+                    <a:pt x="3229928" y="755227"/>
+                    <a:pt x="3260408" y="756656"/>
+                  </a:cubicBezTo>
+                  <a:cubicBezTo>
+                    <a:pt x="3320987" y="760466"/>
+                    <a:pt x="3381470" y="764562"/>
+                    <a:pt x="3440049" y="771610"/>
+                  </a:cubicBezTo>
+                  <a:cubicBezTo>
+                    <a:pt x="3454908" y="773039"/>
+                    <a:pt x="3469386" y="775039"/>
+                    <a:pt x="3483864" y="776849"/>
+                  </a:cubicBezTo>
+                  <a:lnTo>
+                    <a:pt x="3528536" y="782469"/>
+                  </a:lnTo>
+                  <a:lnTo>
+                    <a:pt x="3628549" y="796089"/>
+                  </a:lnTo>
+                  <a:lnTo>
+                    <a:pt x="3828574" y="823140"/>
+                  </a:lnTo>
+                  <a:cubicBezTo>
+                    <a:pt x="3962019" y="840190"/>
+                    <a:pt x="4095750" y="858573"/>
+                    <a:pt x="4231196" y="874099"/>
+                  </a:cubicBezTo>
+                  <a:lnTo>
+                    <a:pt x="4433126" y="897435"/>
+                  </a:lnTo>
+                  <a:lnTo>
+                    <a:pt x="4485990" y="903246"/>
+                  </a:lnTo>
+                  <a:cubicBezTo>
+                    <a:pt x="4503897" y="905151"/>
+                    <a:pt x="4521708" y="907341"/>
+                    <a:pt x="4539806" y="908961"/>
+                  </a:cubicBezTo>
+                  <a:lnTo>
+                    <a:pt x="4593908" y="914199"/>
+                  </a:lnTo>
+                  <a:lnTo>
+                    <a:pt x="4648296" y="918771"/>
+                  </a:lnTo>
+                  <a:cubicBezTo>
+                    <a:pt x="4793456" y="930392"/>
+                    <a:pt x="4942237" y="935631"/>
+                    <a:pt x="5092446" y="931154"/>
+                  </a:cubicBezTo>
+                  <a:cubicBezTo>
+                    <a:pt x="5242274" y="927249"/>
+                    <a:pt x="5393627" y="911437"/>
+                    <a:pt x="5533168" y="891816"/>
+                  </a:cubicBezTo>
+                  <a:cubicBezTo>
+                    <a:pt x="5673471" y="872289"/>
+                    <a:pt x="5798820" y="851906"/>
+                    <a:pt x="5918169" y="840666"/>
+                  </a:cubicBezTo>
+                  <a:cubicBezTo>
+                    <a:pt x="5948077" y="837809"/>
+                    <a:pt x="5977795" y="835237"/>
+                    <a:pt x="6007323" y="833237"/>
+                  </a:cubicBezTo>
+                  <a:cubicBezTo>
+                    <a:pt x="6022086" y="832094"/>
+                    <a:pt x="6036945" y="831332"/>
+                    <a:pt x="6051709" y="830570"/>
+                  </a:cubicBezTo>
+                  <a:lnTo>
+                    <a:pt x="6097429" y="828379"/>
+                  </a:lnTo>
+                  <a:cubicBezTo>
+                    <a:pt x="6158960" y="825236"/>
+                    <a:pt x="6223445" y="823807"/>
+                    <a:pt x="6287834" y="822569"/>
+                  </a:cubicBezTo>
+                  <a:cubicBezTo>
+                    <a:pt x="6417374" y="820664"/>
+                    <a:pt x="6549485" y="820188"/>
+                    <a:pt x="6681597" y="821235"/>
+                  </a:cubicBezTo>
+                  <a:cubicBezTo>
+                    <a:pt x="6813899" y="822378"/>
+                    <a:pt x="6946773" y="823617"/>
+                    <a:pt x="7079647" y="826569"/>
+                  </a:cubicBezTo>
+                  <a:cubicBezTo>
+                    <a:pt x="7212520" y="828951"/>
+                    <a:pt x="7345585" y="831903"/>
+                    <a:pt x="7478173" y="836094"/>
+                  </a:cubicBezTo>
+                  <a:cubicBezTo>
+                    <a:pt x="7610475" y="839714"/>
+                    <a:pt x="7743539" y="844953"/>
+                    <a:pt x="7871937" y="851430"/>
+                  </a:cubicBezTo>
+                  <a:lnTo>
+                    <a:pt x="7919657" y="854097"/>
+                  </a:lnTo>
+                  <a:cubicBezTo>
+                    <a:pt x="7935564" y="854954"/>
+                    <a:pt x="7949756" y="856192"/>
+                    <a:pt x="7964901" y="857240"/>
+                  </a:cubicBezTo>
+                  <a:lnTo>
+                    <a:pt x="8015955" y="861050"/>
+                  </a:lnTo>
+                  <a:cubicBezTo>
+                    <a:pt x="8035195" y="862383"/>
+                    <a:pt x="8053769" y="863622"/>
+                    <a:pt x="8072247" y="864384"/>
+                  </a:cubicBezTo>
+                  <a:cubicBezTo>
+                    <a:pt x="8145780" y="867527"/>
+                    <a:pt x="8216456" y="868479"/>
+                    <a:pt x="8286750" y="868384"/>
+                  </a:cubicBezTo>
+                  <a:cubicBezTo>
+                    <a:pt x="8427148" y="867527"/>
+                    <a:pt x="8565452" y="862574"/>
+                    <a:pt x="8704040" y="853716"/>
+                  </a:cubicBezTo>
+                  <a:cubicBezTo>
+                    <a:pt x="8842534" y="844762"/>
+                    <a:pt x="8980741" y="832284"/>
+                    <a:pt x="9120188" y="814092"/>
+                  </a:cubicBezTo>
+                  <a:cubicBezTo>
+                    <a:pt x="9140761" y="811425"/>
+                    <a:pt x="9161336" y="808567"/>
+                    <a:pt x="9181909" y="805519"/>
+                  </a:cubicBezTo>
+                  <a:lnTo>
+                    <a:pt x="9181909" y="396420"/>
+                  </a:lnTo>
+                  <a:close/>
+                </a:path>
+              </a:pathLst>
+            </a:custGeom>
+            <a:solidFill>
+              <a:schemeClr val="bg1">
+                <a:alpha val="30000"/>
+              </a:schemeClr>
+            </a:solidFill>
+            <a:ln w="9525" cap="flat">
+              <a:noFill/>
+              <a:prstDash val="solid"/>
+              <a:miter/>
+            </a:ln>
+          </p:spPr>
+          <p:txBody>
+            <a:bodyPr rtlCol="0" anchor="ctr"/>
+            <a:lstStyle/>
+            <a:p>
+              <a:endParaRPr lang="en-US"/>
+            </a:p>
+          </p:txBody>
+        </p:sp>
+        <p:sp>
+          <p:nvSpPr>
+            <p:cNvPr id="2060" name="Freeform: Shape 2059">
+              <a:extLst>
+                <a:ext uri="{FF2B5EF4-FFF2-40B4-BE49-F238E27FC236}">
+                  <a16:creationId xmlns:a16="http://schemas.microsoft.com/office/drawing/2014/main" id="{2587D38B-9E07-4A8B-B285-5FEBF6A60DC7}"/>
+                </a:ext>
+                <a:ext uri="{C183D7F6-B498-43B3-948B-1728B52AA6E4}">
+                  <adec:decorative xmlns:adec="http://schemas.microsoft.com/office/drawing/2017/decorative" val="1"/>
+                </a:ext>
+              </a:extLst>
+            </p:cNvPr>
+            <p:cNvSpPr/>
+            <p:nvPr>
+              <p:extLst>
+                <p:ext uri="{386F3935-93C4-4BCD-93E2-E3B085C9AB24}">
+                  <p16:designElem xmlns:p16="http://schemas.microsoft.com/office/powerpoint/2015/main" val="1"/>
+                </p:ext>
+              </p:extLst>
+            </p:nvPr>
+          </p:nvSpPr>
+          <p:spPr>
+            <a:xfrm>
+              <a:off x="-305" y="3580789"/>
+              <a:ext cx="9182100" cy="544245"/>
+            </a:xfrm>
+            <a:custGeom>
+              <a:avLst/>
+              <a:gdLst>
+                <a:gd name="connsiteX0" fmla="*/ 9182100 w 9182100"/>
+                <a:gd name="connsiteY0" fmla="*/ 154189 h 544245"/>
+                <a:gd name="connsiteX1" fmla="*/ 9047702 w 9182100"/>
+                <a:gd name="connsiteY1" fmla="*/ 162762 h 544245"/>
+                <a:gd name="connsiteX2" fmla="*/ 8652224 w 9182100"/>
+                <a:gd name="connsiteY2" fmla="*/ 178287 h 544245"/>
+                <a:gd name="connsiteX3" fmla="*/ 8255603 w 9182100"/>
+                <a:gd name="connsiteY3" fmla="*/ 161047 h 544245"/>
+                <a:gd name="connsiteX4" fmla="*/ 8060722 w 9182100"/>
+                <a:gd name="connsiteY4" fmla="*/ 140854 h 544245"/>
+                <a:gd name="connsiteX5" fmla="*/ 8013478 w 9182100"/>
+                <a:gd name="connsiteY5" fmla="*/ 134187 h 544245"/>
+                <a:gd name="connsiteX6" fmla="*/ 7990428 w 9182100"/>
+                <a:gd name="connsiteY6" fmla="*/ 130567 h 544245"/>
+                <a:gd name="connsiteX7" fmla="*/ 7964139 w 9182100"/>
+                <a:gd name="connsiteY7" fmla="*/ 126853 h 544245"/>
+                <a:gd name="connsiteX8" fmla="*/ 7911656 w 9182100"/>
+                <a:gd name="connsiteY8" fmla="*/ 119518 h 544245"/>
+                <a:gd name="connsiteX9" fmla="*/ 7860220 w 9182100"/>
+                <a:gd name="connsiteY9" fmla="*/ 113232 h 544245"/>
+                <a:gd name="connsiteX10" fmla="*/ 7453884 w 9182100"/>
+                <a:gd name="connsiteY10" fmla="*/ 70369 h 544245"/>
+                <a:gd name="connsiteX11" fmla="*/ 7048976 w 9182100"/>
+                <a:gd name="connsiteY11" fmla="*/ 36556 h 544245"/>
+                <a:gd name="connsiteX12" fmla="*/ 6846285 w 9182100"/>
+                <a:gd name="connsiteY12" fmla="*/ 22649 h 544245"/>
+                <a:gd name="connsiteX13" fmla="*/ 6643212 w 9182100"/>
+                <a:gd name="connsiteY13" fmla="*/ 11600 h 544245"/>
+                <a:gd name="connsiteX14" fmla="*/ 6541485 w 9182100"/>
+                <a:gd name="connsiteY14" fmla="*/ 7314 h 544245"/>
+                <a:gd name="connsiteX15" fmla="*/ 6439567 w 9182100"/>
+                <a:gd name="connsiteY15" fmla="*/ 3885 h 544245"/>
+                <a:gd name="connsiteX16" fmla="*/ 6337459 w 9182100"/>
+                <a:gd name="connsiteY16" fmla="*/ 1313 h 544245"/>
+                <a:gd name="connsiteX17" fmla="*/ 6234970 w 9182100"/>
+                <a:gd name="connsiteY17" fmla="*/ 75 h 544245"/>
+                <a:gd name="connsiteX18" fmla="*/ 6027802 w 9182100"/>
+                <a:gd name="connsiteY18" fmla="*/ 2265 h 544245"/>
+                <a:gd name="connsiteX19" fmla="*/ 5921978 w 9182100"/>
+                <a:gd name="connsiteY19" fmla="*/ 6552 h 544245"/>
+                <a:gd name="connsiteX20" fmla="*/ 5815965 w 9182100"/>
+                <a:gd name="connsiteY20" fmla="*/ 14362 h 544245"/>
+                <a:gd name="connsiteX21" fmla="*/ 5408390 w 9182100"/>
+                <a:gd name="connsiteY21" fmla="*/ 67036 h 544245"/>
+                <a:gd name="connsiteX22" fmla="*/ 5023866 w 9182100"/>
+                <a:gd name="connsiteY22" fmla="*/ 103992 h 544245"/>
+                <a:gd name="connsiteX23" fmla="*/ 4831556 w 9182100"/>
+                <a:gd name="connsiteY23" fmla="*/ 106374 h 544245"/>
+                <a:gd name="connsiteX24" fmla="*/ 4637723 w 9182100"/>
+                <a:gd name="connsiteY24" fmla="*/ 98754 h 544245"/>
+                <a:gd name="connsiteX25" fmla="*/ 4442460 w 9182100"/>
+                <a:gd name="connsiteY25" fmla="*/ 83038 h 544245"/>
+                <a:gd name="connsiteX26" fmla="*/ 4341686 w 9182100"/>
+                <a:gd name="connsiteY26" fmla="*/ 77227 h 544245"/>
+                <a:gd name="connsiteX27" fmla="*/ 4241006 w 9182100"/>
+                <a:gd name="connsiteY27" fmla="*/ 71989 h 544245"/>
+                <a:gd name="connsiteX28" fmla="*/ 3836956 w 9182100"/>
+                <a:gd name="connsiteY28" fmla="*/ 54177 h 544245"/>
+                <a:gd name="connsiteX29" fmla="*/ 3634549 w 9182100"/>
+                <a:gd name="connsiteY29" fmla="*/ 45414 h 544245"/>
+                <a:gd name="connsiteX30" fmla="*/ 3533394 w 9182100"/>
+                <a:gd name="connsiteY30" fmla="*/ 40461 h 544245"/>
+                <a:gd name="connsiteX31" fmla="*/ 3481959 w 9182100"/>
+                <a:gd name="connsiteY31" fmla="*/ 37889 h 544245"/>
+                <a:gd name="connsiteX32" fmla="*/ 3430238 w 9182100"/>
+                <a:gd name="connsiteY32" fmla="*/ 35889 h 544245"/>
+                <a:gd name="connsiteX33" fmla="*/ 3020473 w 9182100"/>
+                <a:gd name="connsiteY33" fmla="*/ 37603 h 544245"/>
+                <a:gd name="connsiteX34" fmla="*/ 2614422 w 9182100"/>
+                <a:gd name="connsiteY34" fmla="*/ 56844 h 544245"/>
+                <a:gd name="connsiteX35" fmla="*/ 2208657 w 9182100"/>
+                <a:gd name="connsiteY35" fmla="*/ 81609 h 544245"/>
+                <a:gd name="connsiteX36" fmla="*/ 1800606 w 9182100"/>
+                <a:gd name="connsiteY36" fmla="*/ 107612 h 544245"/>
+                <a:gd name="connsiteX37" fmla="*/ 1594676 w 9182100"/>
+                <a:gd name="connsiteY37" fmla="*/ 124948 h 544245"/>
+                <a:gd name="connsiteX38" fmla="*/ 1491996 w 9182100"/>
+                <a:gd name="connsiteY38" fmla="*/ 136568 h 544245"/>
+                <a:gd name="connsiteX39" fmla="*/ 1442942 w 9182100"/>
+                <a:gd name="connsiteY39" fmla="*/ 141902 h 544245"/>
+                <a:gd name="connsiteX40" fmla="*/ 1418463 w 9182100"/>
+                <a:gd name="connsiteY40" fmla="*/ 144664 h 544245"/>
+                <a:gd name="connsiteX41" fmla="*/ 1393984 w 9182100"/>
+                <a:gd name="connsiteY41" fmla="*/ 146855 h 544245"/>
+                <a:gd name="connsiteX42" fmla="*/ 1006697 w 9182100"/>
+                <a:gd name="connsiteY42" fmla="*/ 169810 h 544245"/>
+                <a:gd name="connsiteX43" fmla="*/ 816864 w 9182100"/>
+                <a:gd name="connsiteY43" fmla="*/ 170953 h 544245"/>
+                <a:gd name="connsiteX44" fmla="*/ 769906 w 9182100"/>
+                <a:gd name="connsiteY44" fmla="*/ 169715 h 544245"/>
+                <a:gd name="connsiteX45" fmla="*/ 723043 w 9182100"/>
+                <a:gd name="connsiteY45" fmla="*/ 168096 h 544245"/>
+                <a:gd name="connsiteX46" fmla="*/ 676370 w 9182100"/>
+                <a:gd name="connsiteY46" fmla="*/ 166286 h 544245"/>
+                <a:gd name="connsiteX47" fmla="*/ 629888 w 9182100"/>
+                <a:gd name="connsiteY47" fmla="*/ 163333 h 544245"/>
+                <a:gd name="connsiteX48" fmla="*/ 445484 w 9182100"/>
+                <a:gd name="connsiteY48" fmla="*/ 146093 h 544245"/>
+                <a:gd name="connsiteX49" fmla="*/ 263366 w 9182100"/>
+                <a:gd name="connsiteY49" fmla="*/ 115232 h 544245"/>
+                <a:gd name="connsiteX50" fmla="*/ 81439 w 9182100"/>
+                <a:gd name="connsiteY50" fmla="*/ 70369 h 544245"/>
+                <a:gd name="connsiteX51" fmla="*/ 35338 w 9182100"/>
+                <a:gd name="connsiteY51" fmla="*/ 57034 h 544245"/>
+                <a:gd name="connsiteX52" fmla="*/ 0 w 9182100"/>
+                <a:gd name="connsiteY52" fmla="*/ 46652 h 544245"/>
+                <a:gd name="connsiteX53" fmla="*/ 0 w 9182100"/>
+                <a:gd name="connsiteY53" fmla="*/ 426795 h 544245"/>
+                <a:gd name="connsiteX54" fmla="*/ 178594 w 9182100"/>
+                <a:gd name="connsiteY54" fmla="*/ 479658 h 544245"/>
+                <a:gd name="connsiteX55" fmla="*/ 610457 w 9182100"/>
+                <a:gd name="connsiteY55" fmla="*/ 542619 h 544245"/>
+                <a:gd name="connsiteX56" fmla="*/ 826865 w 9182100"/>
+                <a:gd name="connsiteY56" fmla="*/ 539666 h 544245"/>
+                <a:gd name="connsiteX57" fmla="*/ 1039654 w 9182100"/>
+                <a:gd name="connsiteY57" fmla="*/ 515187 h 544245"/>
+                <a:gd name="connsiteX58" fmla="*/ 1449705 w 9182100"/>
+                <a:gd name="connsiteY58" fmla="*/ 415270 h 544245"/>
+                <a:gd name="connsiteX59" fmla="*/ 1548765 w 9182100"/>
+                <a:gd name="connsiteY59" fmla="*/ 382123 h 544245"/>
+                <a:gd name="connsiteX60" fmla="*/ 1642872 w 9182100"/>
+                <a:gd name="connsiteY60" fmla="*/ 349261 h 544245"/>
+                <a:gd name="connsiteX61" fmla="*/ 1832991 w 9182100"/>
+                <a:gd name="connsiteY61" fmla="*/ 289158 h 544245"/>
+                <a:gd name="connsiteX62" fmla="*/ 2222754 w 9182100"/>
+                <a:gd name="connsiteY62" fmla="*/ 193623 h 544245"/>
+                <a:gd name="connsiteX63" fmla="*/ 2620137 w 9182100"/>
+                <a:gd name="connsiteY63" fmla="*/ 138378 h 544245"/>
+                <a:gd name="connsiteX64" fmla="*/ 3020473 w 9182100"/>
+                <a:gd name="connsiteY64" fmla="*/ 127234 h 544245"/>
+                <a:gd name="connsiteX65" fmla="*/ 3219736 w 9182100"/>
+                <a:gd name="connsiteY65" fmla="*/ 139807 h 544245"/>
+                <a:gd name="connsiteX66" fmla="*/ 3318605 w 9182100"/>
+                <a:gd name="connsiteY66" fmla="*/ 151713 h 544245"/>
+                <a:gd name="connsiteX67" fmla="*/ 3367754 w 9182100"/>
+                <a:gd name="connsiteY67" fmla="*/ 158666 h 544245"/>
+                <a:gd name="connsiteX68" fmla="*/ 3416618 w 9182100"/>
+                <a:gd name="connsiteY68" fmla="*/ 166858 h 544245"/>
+                <a:gd name="connsiteX69" fmla="*/ 3465195 w 9182100"/>
+                <a:gd name="connsiteY69" fmla="*/ 176097 h 544245"/>
+                <a:gd name="connsiteX70" fmla="*/ 3513868 w 9182100"/>
+                <a:gd name="connsiteY70" fmla="*/ 185908 h 544245"/>
+                <a:gd name="connsiteX71" fmla="*/ 3612737 w 9182100"/>
+                <a:gd name="connsiteY71" fmla="*/ 207625 h 544245"/>
+                <a:gd name="connsiteX72" fmla="*/ 3810381 w 9182100"/>
+                <a:gd name="connsiteY72" fmla="*/ 252106 h 544245"/>
+                <a:gd name="connsiteX73" fmla="*/ 4206621 w 9182100"/>
+                <a:gd name="connsiteY73" fmla="*/ 339736 h 544245"/>
+                <a:gd name="connsiteX74" fmla="*/ 4306062 w 9182100"/>
+                <a:gd name="connsiteY74" fmla="*/ 359834 h 544245"/>
+                <a:gd name="connsiteX75" fmla="*/ 4405503 w 9182100"/>
+                <a:gd name="connsiteY75" fmla="*/ 378979 h 544245"/>
+                <a:gd name="connsiteX76" fmla="*/ 4611529 w 9182100"/>
+                <a:gd name="connsiteY76" fmla="*/ 405745 h 544245"/>
+                <a:gd name="connsiteX77" fmla="*/ 5031677 w 9182100"/>
+                <a:gd name="connsiteY77" fmla="*/ 427462 h 544245"/>
+                <a:gd name="connsiteX78" fmla="*/ 5243227 w 9182100"/>
+                <a:gd name="connsiteY78" fmla="*/ 418699 h 544245"/>
+                <a:gd name="connsiteX79" fmla="*/ 5451062 w 9182100"/>
+                <a:gd name="connsiteY79" fmla="*/ 398029 h 544245"/>
+                <a:gd name="connsiteX80" fmla="*/ 5844635 w 9182100"/>
+                <a:gd name="connsiteY80" fmla="*/ 353071 h 544245"/>
+                <a:gd name="connsiteX81" fmla="*/ 5939981 w 9182100"/>
+                <a:gd name="connsiteY81" fmla="*/ 346975 h 544245"/>
+                <a:gd name="connsiteX82" fmla="*/ 6035898 w 9182100"/>
+                <a:gd name="connsiteY82" fmla="*/ 344118 h 544245"/>
+                <a:gd name="connsiteX83" fmla="*/ 6232303 w 9182100"/>
+                <a:gd name="connsiteY83" fmla="*/ 343642 h 544245"/>
+                <a:gd name="connsiteX84" fmla="*/ 6630924 w 9182100"/>
+                <a:gd name="connsiteY84" fmla="*/ 351071 h 544245"/>
+                <a:gd name="connsiteX85" fmla="*/ 6831140 w 9182100"/>
+                <a:gd name="connsiteY85" fmla="*/ 356596 h 544245"/>
+                <a:gd name="connsiteX86" fmla="*/ 7031545 w 9182100"/>
+                <a:gd name="connsiteY86" fmla="*/ 362501 h 544245"/>
+                <a:gd name="connsiteX87" fmla="*/ 7432262 w 9182100"/>
+                <a:gd name="connsiteY87" fmla="*/ 378408 h 544245"/>
+                <a:gd name="connsiteX88" fmla="*/ 7830312 w 9182100"/>
+                <a:gd name="connsiteY88" fmla="*/ 402506 h 544245"/>
+                <a:gd name="connsiteX89" fmla="*/ 7879270 w 9182100"/>
+                <a:gd name="connsiteY89" fmla="*/ 406792 h 544245"/>
+                <a:gd name="connsiteX90" fmla="*/ 7926895 w 9182100"/>
+                <a:gd name="connsiteY90" fmla="*/ 411745 h 544245"/>
+                <a:gd name="connsiteX91" fmla="*/ 7977569 w 9182100"/>
+                <a:gd name="connsiteY91" fmla="*/ 417175 h 544245"/>
+                <a:gd name="connsiteX92" fmla="*/ 8030623 w 9182100"/>
+                <a:gd name="connsiteY92" fmla="*/ 422127 h 544245"/>
+                <a:gd name="connsiteX93" fmla="*/ 8237982 w 9182100"/>
+                <a:gd name="connsiteY93" fmla="*/ 435177 h 544245"/>
+                <a:gd name="connsiteX94" fmla="*/ 8647748 w 9182100"/>
+                <a:gd name="connsiteY94" fmla="*/ 449464 h 544245"/>
+                <a:gd name="connsiteX95" fmla="*/ 8852821 w 9182100"/>
+                <a:gd name="connsiteY95" fmla="*/ 456132 h 544245"/>
+                <a:gd name="connsiteX96" fmla="*/ 8955786 w 9182100"/>
+                <a:gd name="connsiteY96" fmla="*/ 458132 h 544245"/>
+                <a:gd name="connsiteX97" fmla="*/ 9059227 w 9182100"/>
+                <a:gd name="connsiteY97" fmla="*/ 457751 h 544245"/>
+                <a:gd name="connsiteX98" fmla="*/ 9182005 w 9182100"/>
+                <a:gd name="connsiteY98" fmla="*/ 452512 h 544245"/>
+                <a:gd name="connsiteX99" fmla="*/ 9182005 w 9182100"/>
+                <a:gd name="connsiteY99" fmla="*/ 154189 h 544245"/>
+              </a:gdLst>
+              <a:ahLst/>
+              <a:cxnLst>
+                <a:cxn ang="0">
+                  <a:pos x="connsiteX0" y="connsiteY0"/>
+                </a:cxn>
+                <a:cxn ang="0">
+                  <a:pos x="connsiteX1" y="connsiteY1"/>
+                </a:cxn>
+                <a:cxn ang="0">
+                  <a:pos x="connsiteX2" y="connsiteY2"/>
+                </a:cxn>
+                <a:cxn ang="0">
+                  <a:pos x="connsiteX3" y="connsiteY3"/>
+                </a:cxn>
+                <a:cxn ang="0">
+                  <a:pos x="connsiteX4" y="connsiteY4"/>
+                </a:cxn>
+                <a:cxn ang="0">
+                  <a:pos x="connsiteX5" y="connsiteY5"/>
+                </a:cxn>
+                <a:cxn ang="0">
+                  <a:pos x="connsiteX6" y="connsiteY6"/>
+                </a:cxn>
+                <a:cxn ang="0">
+                  <a:pos x="connsiteX7" y="connsiteY7"/>
+                </a:cxn>
+                <a:cxn ang="0">
+                  <a:pos x="connsiteX8" y="connsiteY8"/>
+                </a:cxn>
+                <a:cxn ang="0">
+                  <a:pos x="connsiteX9" y="connsiteY9"/>
+                </a:cxn>
+                <a:cxn ang="0">
+                  <a:pos x="connsiteX10" y="connsiteY10"/>
+                </a:cxn>
+                <a:cxn ang="0">
+                  <a:pos x="connsiteX11" y="connsiteY11"/>
+                </a:cxn>
+                <a:cxn ang="0">
+                  <a:pos x="connsiteX12" y="connsiteY12"/>
+                </a:cxn>
+                <a:cxn ang="0">
+                  <a:pos x="connsiteX13" y="connsiteY13"/>
+                </a:cxn>
+                <a:cxn ang="0">
+                  <a:pos x="connsiteX14" y="connsiteY14"/>
+                </a:cxn>
+                <a:cxn ang="0">
+                  <a:pos x="connsiteX15" y="connsiteY15"/>
+                </a:cxn>
+                <a:cxn ang="0">
+                  <a:pos x="connsiteX16" y="connsiteY16"/>
+                </a:cxn>
+                <a:cxn ang="0">
+                  <a:pos x="connsiteX17" y="connsiteY17"/>
+                </a:cxn>
+                <a:cxn ang="0">
+                  <a:pos x="connsiteX18" y="connsiteY18"/>
+                </a:cxn>
+                <a:cxn ang="0">
+                  <a:pos x="connsiteX19" y="connsiteY19"/>
+                </a:cxn>
+                <a:cxn ang="0">
+                  <a:pos x="connsiteX20" y="connsiteY20"/>
+                </a:cxn>
+                <a:cxn ang="0">
+                  <a:pos x="connsiteX21" y="connsiteY21"/>
+                </a:cxn>
+                <a:cxn ang="0">
+                  <a:pos x="connsiteX22" y="connsiteY22"/>
+                </a:cxn>
+                <a:cxn ang="0">
+                  <a:pos x="connsiteX23" y="connsiteY23"/>
+                </a:cxn>
+                <a:cxn ang="0">
+                  <a:pos x="connsiteX24" y="connsiteY24"/>
+                </a:cxn>
+                <a:cxn ang="0">
+                  <a:pos x="connsiteX25" y="connsiteY25"/>
+                </a:cxn>
+                <a:cxn ang="0">
+                  <a:pos x="connsiteX26" y="connsiteY26"/>
+                </a:cxn>
+                <a:cxn ang="0">
+                  <a:pos x="connsiteX27" y="connsiteY27"/>
+                </a:cxn>
+                <a:cxn ang="0">
+                  <a:pos x="connsiteX28" y="connsiteY28"/>
+                </a:cxn>
+                <a:cxn ang="0">
+                  <a:pos x="connsiteX29" y="connsiteY29"/>
+                </a:cxn>
+                <a:cxn ang="0">
+                  <a:pos x="connsiteX30" y="connsiteY30"/>
+                </a:cxn>
+                <a:cxn ang="0">
+                  <a:pos x="connsiteX31" y="connsiteY31"/>
+                </a:cxn>
+                <a:cxn ang="0">
+                  <a:pos x="connsiteX32" y="connsiteY32"/>
+                </a:cxn>
+                <a:cxn ang="0">
+                  <a:pos x="connsiteX33" y="connsiteY33"/>
+                </a:cxn>
+                <a:cxn ang="0">
+                  <a:pos x="connsiteX34" y="connsiteY34"/>
+                </a:cxn>
+                <a:cxn ang="0">
+                  <a:pos x="connsiteX35" y="connsiteY35"/>
+                </a:cxn>
+                <a:cxn ang="0">
+                  <a:pos x="connsiteX36" y="connsiteY36"/>
+                </a:cxn>
+                <a:cxn ang="0">
+                  <a:pos x="connsiteX37" y="connsiteY37"/>
+                </a:cxn>
+                <a:cxn ang="0">
+                  <a:pos x="connsiteX38" y="connsiteY38"/>
+                </a:cxn>
+                <a:cxn ang="0">
+                  <a:pos x="connsiteX39" y="connsiteY39"/>
+                </a:cxn>
+                <a:cxn ang="0">
+                  <a:pos x="connsiteX40" y="connsiteY40"/>
+                </a:cxn>
+                <a:cxn ang="0">
+                  <a:pos x="connsiteX41" y="connsiteY41"/>
+                </a:cxn>
+                <a:cxn ang="0">
+                  <a:pos x="connsiteX42" y="connsiteY42"/>
+                </a:cxn>
+                <a:cxn ang="0">
+                  <a:pos x="connsiteX43" y="connsiteY43"/>
+                </a:cxn>
+                <a:cxn ang="0">
+                  <a:pos x="connsiteX44" y="connsiteY44"/>
+                </a:cxn>
+                <a:cxn ang="0">
+                  <a:pos x="connsiteX45" y="connsiteY45"/>
+                </a:cxn>
+                <a:cxn ang="0">
+                  <a:pos x="connsiteX46" y="connsiteY46"/>
+                </a:cxn>
+                <a:cxn ang="0">
+                  <a:pos x="connsiteX47" y="connsiteY47"/>
+                </a:cxn>
+                <a:cxn ang="0">
+                  <a:pos x="connsiteX48" y="connsiteY48"/>
+                </a:cxn>
+                <a:cxn ang="0">
+                  <a:pos x="connsiteX49" y="connsiteY49"/>
+                </a:cxn>
+                <a:cxn ang="0">
+                  <a:pos x="connsiteX50" y="connsiteY50"/>
+                </a:cxn>
+                <a:cxn ang="0">
+                  <a:pos x="connsiteX51" y="connsiteY51"/>
+                </a:cxn>
+                <a:cxn ang="0">
+                  <a:pos x="connsiteX52" y="connsiteY52"/>
+                </a:cxn>
+                <a:cxn ang="0">
+                  <a:pos x="connsiteX53" y="connsiteY53"/>
+                </a:cxn>
+                <a:cxn ang="0">
+                  <a:pos x="connsiteX54" y="connsiteY54"/>
+                </a:cxn>
+                <a:cxn ang="0">
+                  <a:pos x="connsiteX55" y="connsiteY55"/>
+                </a:cxn>
+                <a:cxn ang="0">
+                  <a:pos x="connsiteX56" y="connsiteY56"/>
+                </a:cxn>
+                <a:cxn ang="0">
+                  <a:pos x="connsiteX57" y="connsiteY57"/>
+                </a:cxn>
+                <a:cxn ang="0">
+                  <a:pos x="connsiteX58" y="connsiteY58"/>
+                </a:cxn>
+                <a:cxn ang="0">
+                  <a:pos x="connsiteX59" y="connsiteY59"/>
+                </a:cxn>
+                <a:cxn ang="0">
+                  <a:pos x="connsiteX60" y="connsiteY60"/>
+                </a:cxn>
+                <a:cxn ang="0">
+                  <a:pos x="connsiteX61" y="connsiteY61"/>
+                </a:cxn>
+                <a:cxn ang="0">
+                  <a:pos x="connsiteX62" y="connsiteY62"/>
+                </a:cxn>
+                <a:cxn ang="0">
+                  <a:pos x="connsiteX63" y="connsiteY63"/>
+                </a:cxn>
+                <a:cxn ang="0">
+                  <a:pos x="connsiteX64" y="connsiteY64"/>
+                </a:cxn>
+                <a:cxn ang="0">
+                  <a:pos x="connsiteX65" y="connsiteY65"/>
+                </a:cxn>
+                <a:cxn ang="0">
+                  <a:pos x="connsiteX66" y="connsiteY66"/>
+                </a:cxn>
+                <a:cxn ang="0">
+                  <a:pos x="connsiteX67" y="connsiteY67"/>
+                </a:cxn>
+                <a:cxn ang="0">
+                  <a:pos x="connsiteX68" y="connsiteY68"/>
+                </a:cxn>
+                <a:cxn ang="0">
+                  <a:pos x="connsiteX69" y="connsiteY69"/>
+                </a:cxn>
+                <a:cxn ang="0">
+                  <a:pos x="connsiteX70" y="connsiteY70"/>
+                </a:cxn>
+                <a:cxn ang="0">
+                  <a:pos x="connsiteX71" y="connsiteY71"/>
+                </a:cxn>
+                <a:cxn ang="0">
+                  <a:pos x="connsiteX72" y="connsiteY72"/>
+                </a:cxn>
+                <a:cxn ang="0">
+                  <a:pos x="connsiteX73" y="connsiteY73"/>
+                </a:cxn>
+                <a:cxn ang="0">
+                  <a:pos x="connsiteX74" y="connsiteY74"/>
+                </a:cxn>
+                <a:cxn ang="0">
+                  <a:pos x="connsiteX75" y="connsiteY75"/>
+                </a:cxn>
+                <a:cxn ang="0">
+                  <a:pos x="connsiteX76" y="connsiteY76"/>
+                </a:cxn>
+                <a:cxn ang="0">
+                  <a:pos x="connsiteX77" y="connsiteY77"/>
+                </a:cxn>
+                <a:cxn ang="0">
+                  <a:pos x="connsiteX78" y="connsiteY78"/>
+                </a:cxn>
+                <a:cxn ang="0">
+                  <a:pos x="connsiteX79" y="connsiteY79"/>
+                </a:cxn>
+                <a:cxn ang="0">
+                  <a:pos x="connsiteX80" y="connsiteY80"/>
+                </a:cxn>
+                <a:cxn ang="0">
+                  <a:pos x="connsiteX81" y="connsiteY81"/>
+                </a:cxn>
+                <a:cxn ang="0">
+                  <a:pos x="connsiteX82" y="connsiteY82"/>
+                </a:cxn>
+                <a:cxn ang="0">
+                  <a:pos x="connsiteX83" y="connsiteY83"/>
+                </a:cxn>
+                <a:cxn ang="0">
+                  <a:pos x="connsiteX84" y="connsiteY84"/>
+                </a:cxn>
+                <a:cxn ang="0">
+                  <a:pos x="connsiteX85" y="connsiteY85"/>
+                </a:cxn>
+                <a:cxn ang="0">
+                  <a:pos x="connsiteX86" y="connsiteY86"/>
+                </a:cxn>
+                <a:cxn ang="0">
+                  <a:pos x="connsiteX87" y="connsiteY87"/>
+                </a:cxn>
+                <a:cxn ang="0">
+                  <a:pos x="connsiteX88" y="connsiteY88"/>
+                </a:cxn>
+                <a:cxn ang="0">
+                  <a:pos x="connsiteX89" y="connsiteY89"/>
+                </a:cxn>
+                <a:cxn ang="0">
+                  <a:pos x="connsiteX90" y="connsiteY90"/>
+                </a:cxn>
+                <a:cxn ang="0">
+                  <a:pos x="connsiteX91" y="connsiteY91"/>
+                </a:cxn>
+                <a:cxn ang="0">
+                  <a:pos x="connsiteX92" y="connsiteY92"/>
+                </a:cxn>
+                <a:cxn ang="0">
+                  <a:pos x="connsiteX93" y="connsiteY93"/>
+                </a:cxn>
+                <a:cxn ang="0">
+                  <a:pos x="connsiteX94" y="connsiteY94"/>
+                </a:cxn>
+                <a:cxn ang="0">
+                  <a:pos x="connsiteX95" y="connsiteY95"/>
+                </a:cxn>
+                <a:cxn ang="0">
+                  <a:pos x="connsiteX96" y="connsiteY96"/>
+                </a:cxn>
+                <a:cxn ang="0">
+                  <a:pos x="connsiteX97" y="connsiteY97"/>
+                </a:cxn>
+                <a:cxn ang="0">
+                  <a:pos x="connsiteX98" y="connsiteY98"/>
+                </a:cxn>
+                <a:cxn ang="0">
+                  <a:pos x="connsiteX99" y="connsiteY99"/>
+                </a:cxn>
+              </a:cxnLst>
+              <a:rect l="l" t="t" r="r" b="b"/>
+              <a:pathLst>
+                <a:path w="9182100" h="544245">
+                  <a:moveTo>
+                    <a:pt x="9182100" y="154189"/>
+                  </a:moveTo>
+                  <a:cubicBezTo>
+                    <a:pt x="9137618" y="157142"/>
+                    <a:pt x="9092851" y="159904"/>
+                    <a:pt x="9047702" y="162762"/>
+                  </a:cubicBezTo>
+                  <a:cubicBezTo>
+                    <a:pt x="8917114" y="170668"/>
+                    <a:pt x="8784717" y="178002"/>
+                    <a:pt x="8652224" y="178287"/>
+                  </a:cubicBezTo>
+                  <a:cubicBezTo>
+                    <a:pt x="8519732" y="178764"/>
+                    <a:pt x="8387049" y="171239"/>
+                    <a:pt x="8255603" y="161047"/>
+                  </a:cubicBezTo>
+                  <a:cubicBezTo>
+                    <a:pt x="8189881" y="155904"/>
+                    <a:pt x="8124539" y="149236"/>
+                    <a:pt x="8060722" y="140854"/>
+                  </a:cubicBezTo>
+                  <a:cubicBezTo>
+                    <a:pt x="8044815" y="138759"/>
+                    <a:pt x="8029099" y="136473"/>
+                    <a:pt x="8013478" y="134187"/>
+                  </a:cubicBezTo>
+                  <a:lnTo>
+                    <a:pt x="7990428" y="130567"/>
+                  </a:lnTo>
+                  <a:lnTo>
+                    <a:pt x="7964139" y="126853"/>
+                  </a:lnTo>
+                  <a:cubicBezTo>
+                    <a:pt x="7946708" y="124376"/>
+                    <a:pt x="7928896" y="121709"/>
+                    <a:pt x="7911656" y="119518"/>
+                  </a:cubicBezTo>
+                  <a:lnTo>
+                    <a:pt x="7860220" y="113232"/>
+                  </a:lnTo>
+                  <a:cubicBezTo>
+                    <a:pt x="7723728" y="96277"/>
+                    <a:pt x="7589044" y="83038"/>
+                    <a:pt x="7453884" y="70369"/>
+                  </a:cubicBezTo>
+                  <a:cubicBezTo>
+                    <a:pt x="7318915" y="57701"/>
+                    <a:pt x="7184041" y="46366"/>
+                    <a:pt x="7048976" y="36556"/>
+                  </a:cubicBezTo>
+                  <a:cubicBezTo>
+                    <a:pt x="6981444" y="31793"/>
+                    <a:pt x="6913912" y="26840"/>
+                    <a:pt x="6846285" y="22649"/>
+                  </a:cubicBezTo>
+                  <a:cubicBezTo>
+                    <a:pt x="6778657" y="18553"/>
+                    <a:pt x="6710934" y="14934"/>
+                    <a:pt x="6643212" y="11600"/>
+                  </a:cubicBezTo>
+                  <a:lnTo>
+                    <a:pt x="6541485" y="7314"/>
+                  </a:lnTo>
+                  <a:cubicBezTo>
+                    <a:pt x="6507576" y="5790"/>
+                    <a:pt x="6473667" y="4647"/>
+                    <a:pt x="6439567" y="3885"/>
+                  </a:cubicBezTo>
+                  <a:lnTo>
+                    <a:pt x="6337459" y="1313"/>
+                  </a:lnTo>
+                  <a:lnTo>
+                    <a:pt x="6234970" y="75"/>
+                  </a:lnTo>
+                  <a:cubicBezTo>
+                    <a:pt x="6166295" y="-116"/>
+                    <a:pt x="6097715" y="-116"/>
+                    <a:pt x="6027802" y="2265"/>
+                  </a:cubicBezTo>
+                  <a:cubicBezTo>
+                    <a:pt x="5993320" y="3123"/>
+                    <a:pt x="5957412" y="4456"/>
+                    <a:pt x="5921978" y="6552"/>
+                  </a:cubicBezTo>
+                  <a:cubicBezTo>
+                    <a:pt x="5886546" y="8552"/>
+                    <a:pt x="5851112" y="11124"/>
+                    <a:pt x="5815965" y="14362"/>
+                  </a:cubicBezTo>
+                  <a:cubicBezTo>
+                    <a:pt x="5674995" y="27126"/>
+                    <a:pt x="5538597" y="48938"/>
+                    <a:pt x="5408390" y="67036"/>
+                  </a:cubicBezTo>
+                  <a:cubicBezTo>
+                    <a:pt x="5277993" y="85514"/>
+                    <a:pt x="5151692" y="99039"/>
+                    <a:pt x="5023866" y="103992"/>
+                  </a:cubicBezTo>
+                  <a:cubicBezTo>
+                    <a:pt x="4960049" y="106660"/>
+                    <a:pt x="4895946" y="107231"/>
+                    <a:pt x="4831556" y="106374"/>
+                  </a:cubicBezTo>
+                  <a:cubicBezTo>
+                    <a:pt x="4767167" y="105231"/>
+                    <a:pt x="4702588" y="102468"/>
+                    <a:pt x="4637723" y="98754"/>
+                  </a:cubicBezTo>
+                  <a:cubicBezTo>
+                    <a:pt x="4572762" y="95230"/>
+                    <a:pt x="4507992" y="88848"/>
+                    <a:pt x="4442460" y="83038"/>
+                  </a:cubicBezTo>
+                  <a:cubicBezTo>
+                    <a:pt x="4408837" y="80752"/>
+                    <a:pt x="4375214" y="79228"/>
+                    <a:pt x="4341686" y="77227"/>
+                  </a:cubicBezTo>
+                  <a:cubicBezTo>
+                    <a:pt x="4308158" y="75227"/>
+                    <a:pt x="4274534" y="73417"/>
+                    <a:pt x="4241006" y="71989"/>
+                  </a:cubicBezTo>
+                  <a:cubicBezTo>
+                    <a:pt x="4106895" y="65131"/>
+                    <a:pt x="3971925" y="59797"/>
+                    <a:pt x="3836956" y="54177"/>
+                  </a:cubicBezTo>
+                  <a:lnTo>
+                    <a:pt x="3634549" y="45414"/>
+                  </a:lnTo>
+                  <a:lnTo>
+                    <a:pt x="3533394" y="40461"/>
+                  </a:lnTo>
+                  <a:lnTo>
+                    <a:pt x="3481959" y="37889"/>
+                  </a:lnTo>
+                  <a:cubicBezTo>
+                    <a:pt x="3464719" y="37127"/>
+                    <a:pt x="3447479" y="36079"/>
+                    <a:pt x="3430238" y="35889"/>
+                  </a:cubicBezTo>
+                  <a:cubicBezTo>
+                    <a:pt x="3292602" y="31126"/>
+                    <a:pt x="3156299" y="33603"/>
+                    <a:pt x="3020473" y="37603"/>
+                  </a:cubicBezTo>
+                  <a:cubicBezTo>
+                    <a:pt x="2884741" y="41985"/>
+                    <a:pt x="2749487" y="48843"/>
+                    <a:pt x="2614422" y="56844"/>
+                  </a:cubicBezTo>
+                  <a:lnTo>
+                    <a:pt x="2208657" y="81609"/>
+                  </a:lnTo>
+                  <a:cubicBezTo>
+                    <a:pt x="2073116" y="89991"/>
+                    <a:pt x="1937195" y="97515"/>
+                    <a:pt x="1800606" y="107612"/>
+                  </a:cubicBezTo>
+                  <a:cubicBezTo>
+                    <a:pt x="1732217" y="112184"/>
+                    <a:pt x="1663827" y="117804"/>
+                    <a:pt x="1594676" y="124948"/>
+                  </a:cubicBezTo>
+                  <a:lnTo>
+                    <a:pt x="1491996" y="136568"/>
+                  </a:lnTo>
+                  <a:lnTo>
+                    <a:pt x="1442942" y="141902"/>
+                  </a:lnTo>
+                  <a:lnTo>
+                    <a:pt x="1418463" y="144664"/>
+                  </a:lnTo>
+                  <a:lnTo>
+                    <a:pt x="1393984" y="146855"/>
+                  </a:lnTo>
+                  <a:cubicBezTo>
+                    <a:pt x="1263491" y="159142"/>
+                    <a:pt x="1134142" y="166667"/>
+                    <a:pt x="1006697" y="169810"/>
+                  </a:cubicBezTo>
+                  <a:cubicBezTo>
+                    <a:pt x="942975" y="172001"/>
+                    <a:pt x="879729" y="171239"/>
+                    <a:pt x="816864" y="170953"/>
+                  </a:cubicBezTo>
+                  <a:lnTo>
+                    <a:pt x="769906" y="169715"/>
+                  </a:lnTo>
+                  <a:cubicBezTo>
+                    <a:pt x="754285" y="169525"/>
+                    <a:pt x="738569" y="169048"/>
+                    <a:pt x="723043" y="168096"/>
+                  </a:cubicBezTo>
+                  <a:lnTo>
+                    <a:pt x="676370" y="166286"/>
+                  </a:lnTo>
+                  <a:cubicBezTo>
+                    <a:pt x="660845" y="165238"/>
+                    <a:pt x="645414" y="164095"/>
+                    <a:pt x="629888" y="163333"/>
+                  </a:cubicBezTo>
+                  <a:cubicBezTo>
+                    <a:pt x="568071" y="159047"/>
+                    <a:pt x="506540" y="154094"/>
+                    <a:pt x="445484" y="146093"/>
+                  </a:cubicBezTo>
+                  <a:cubicBezTo>
+                    <a:pt x="384524" y="137997"/>
+                    <a:pt x="323850" y="128091"/>
+                    <a:pt x="263366" y="115232"/>
+                  </a:cubicBezTo>
+                  <a:cubicBezTo>
+                    <a:pt x="202787" y="102850"/>
+                    <a:pt x="142589" y="87419"/>
+                    <a:pt x="81439" y="70369"/>
+                  </a:cubicBezTo>
+                  <a:cubicBezTo>
+                    <a:pt x="66199" y="66178"/>
+                    <a:pt x="50864" y="61702"/>
+                    <a:pt x="35338" y="57034"/>
+                  </a:cubicBezTo>
+                  <a:lnTo>
+                    <a:pt x="0" y="46652"/>
+                  </a:lnTo>
+                  <a:lnTo>
+                    <a:pt x="0" y="426795"/>
+                  </a:lnTo>
+                  <a:cubicBezTo>
+                    <a:pt x="58198" y="446416"/>
+                    <a:pt x="117920" y="464323"/>
+                    <a:pt x="178594" y="479658"/>
+                  </a:cubicBezTo>
+                  <a:cubicBezTo>
+                    <a:pt x="319850" y="514901"/>
+                    <a:pt x="465582" y="537094"/>
+                    <a:pt x="610457" y="542619"/>
+                  </a:cubicBezTo>
+                  <a:cubicBezTo>
+                    <a:pt x="682943" y="545953"/>
+                    <a:pt x="755142" y="543762"/>
+                    <a:pt x="826865" y="539666"/>
+                  </a:cubicBezTo>
+                  <a:cubicBezTo>
+                    <a:pt x="898398" y="534523"/>
+                    <a:pt x="969645" y="526903"/>
+                    <a:pt x="1039654" y="515187"/>
+                  </a:cubicBezTo>
+                  <a:cubicBezTo>
+                    <a:pt x="1180052" y="492517"/>
+                    <a:pt x="1316736" y="457751"/>
+                    <a:pt x="1449705" y="415270"/>
+                  </a:cubicBezTo>
+                  <a:cubicBezTo>
+                    <a:pt x="1483138" y="405364"/>
+                    <a:pt x="1515809" y="393172"/>
+                    <a:pt x="1548765" y="382123"/>
+                  </a:cubicBezTo>
+                  <a:lnTo>
+                    <a:pt x="1642872" y="349261"/>
+                  </a:lnTo>
+                  <a:cubicBezTo>
+                    <a:pt x="1705261" y="328211"/>
+                    <a:pt x="1768983" y="308208"/>
+                    <a:pt x="1832991" y="289158"/>
+                  </a:cubicBezTo>
+                  <a:cubicBezTo>
+                    <a:pt x="1961198" y="251821"/>
+                    <a:pt x="2091404" y="219435"/>
+                    <a:pt x="2222754" y="193623"/>
+                  </a:cubicBezTo>
+                  <a:cubicBezTo>
+                    <a:pt x="2354199" y="168382"/>
+                    <a:pt x="2486882" y="149332"/>
+                    <a:pt x="2620137" y="138378"/>
+                  </a:cubicBezTo>
+                  <a:cubicBezTo>
+                    <a:pt x="2753392" y="127424"/>
+                    <a:pt x="2887123" y="122947"/>
+                    <a:pt x="3020473" y="127234"/>
+                  </a:cubicBezTo>
+                  <a:cubicBezTo>
+                    <a:pt x="3087148" y="129043"/>
+                    <a:pt x="3153632" y="133711"/>
+                    <a:pt x="3219736" y="139807"/>
+                  </a:cubicBezTo>
+                  <a:cubicBezTo>
+                    <a:pt x="3252788" y="143426"/>
+                    <a:pt x="3285839" y="146760"/>
+                    <a:pt x="3318605" y="151713"/>
+                  </a:cubicBezTo>
+                  <a:lnTo>
+                    <a:pt x="3367754" y="158666"/>
+                  </a:lnTo>
+                  <a:cubicBezTo>
+                    <a:pt x="3384042" y="161238"/>
+                    <a:pt x="3400330" y="164000"/>
+                    <a:pt x="3416618" y="166858"/>
+                  </a:cubicBezTo>
+                  <a:cubicBezTo>
+                    <a:pt x="3432905" y="169525"/>
+                    <a:pt x="3449003" y="172954"/>
+                    <a:pt x="3465195" y="176097"/>
+                  </a:cubicBezTo>
+                  <a:cubicBezTo>
+                    <a:pt x="3481483" y="179431"/>
+                    <a:pt x="3497199" y="182288"/>
+                    <a:pt x="3513868" y="185908"/>
+                  </a:cubicBezTo>
+                  <a:lnTo>
+                    <a:pt x="3612737" y="207625"/>
+                  </a:lnTo>
+                  <a:lnTo>
+                    <a:pt x="3810381" y="252106"/>
+                  </a:lnTo>
+                  <a:cubicBezTo>
+                    <a:pt x="3942112" y="282015"/>
+                    <a:pt x="4073843" y="312590"/>
+                    <a:pt x="4206621" y="339736"/>
+                  </a:cubicBezTo>
+                  <a:cubicBezTo>
+                    <a:pt x="4239768" y="346785"/>
+                    <a:pt x="4272915" y="353452"/>
+                    <a:pt x="4306062" y="359834"/>
+                  </a:cubicBezTo>
+                  <a:cubicBezTo>
+                    <a:pt x="4339209" y="366216"/>
+                    <a:pt x="4372356" y="372979"/>
+                    <a:pt x="4405503" y="378979"/>
+                  </a:cubicBezTo>
+                  <a:cubicBezTo>
+                    <a:pt x="4473416" y="389266"/>
+                    <a:pt x="4542378" y="398410"/>
+                    <a:pt x="4611529" y="405745"/>
+                  </a:cubicBezTo>
+                  <a:cubicBezTo>
+                    <a:pt x="4749832" y="420794"/>
+                    <a:pt x="4890326" y="428795"/>
+                    <a:pt x="5031677" y="427462"/>
+                  </a:cubicBezTo>
+                  <a:cubicBezTo>
+                    <a:pt x="5102352" y="426985"/>
+                    <a:pt x="5173028" y="423747"/>
+                    <a:pt x="5243227" y="418699"/>
+                  </a:cubicBezTo>
+                  <a:cubicBezTo>
+                    <a:pt x="5313427" y="413650"/>
+                    <a:pt x="5382959" y="406030"/>
+                    <a:pt x="5451062" y="398029"/>
+                  </a:cubicBezTo>
+                  <a:cubicBezTo>
+                    <a:pt x="5587651" y="381551"/>
+                    <a:pt x="5717381" y="362501"/>
+                    <a:pt x="5844635" y="353071"/>
+                  </a:cubicBezTo>
+                  <a:cubicBezTo>
+                    <a:pt x="5876544" y="350690"/>
+                    <a:pt x="5908262" y="348404"/>
+                    <a:pt x="5939981" y="346975"/>
+                  </a:cubicBezTo>
+                  <a:cubicBezTo>
+                    <a:pt x="5971794" y="345356"/>
+                    <a:pt x="6003036" y="344308"/>
+                    <a:pt x="6035898" y="344118"/>
+                  </a:cubicBezTo>
+                  <a:cubicBezTo>
+                    <a:pt x="6100477" y="343070"/>
+                    <a:pt x="6166390" y="343356"/>
+                    <a:pt x="6232303" y="343642"/>
+                  </a:cubicBezTo>
+                  <a:cubicBezTo>
+                    <a:pt x="6364415" y="344880"/>
+                    <a:pt x="6497669" y="347833"/>
+                    <a:pt x="6630924" y="351071"/>
+                  </a:cubicBezTo>
+                  <a:lnTo>
+                    <a:pt x="6831140" y="356596"/>
+                  </a:lnTo>
+                  <a:lnTo>
+                    <a:pt x="7031545" y="362501"/>
+                  </a:lnTo>
+                  <a:cubicBezTo>
+                    <a:pt x="7165086" y="367454"/>
+                    <a:pt x="7298818" y="371835"/>
+                    <a:pt x="7432262" y="378408"/>
+                  </a:cubicBezTo>
+                  <a:cubicBezTo>
+                    <a:pt x="7565518" y="384790"/>
+                    <a:pt x="7699153" y="392124"/>
+                    <a:pt x="7830312" y="402506"/>
+                  </a:cubicBezTo>
+                  <a:lnTo>
+                    <a:pt x="7879270" y="406792"/>
+                  </a:lnTo>
+                  <a:lnTo>
+                    <a:pt x="7926895" y="411745"/>
+                  </a:lnTo>
+                  <a:lnTo>
+                    <a:pt x="7977569" y="417175"/>
+                  </a:lnTo>
+                  <a:cubicBezTo>
+                    <a:pt x="7995380" y="418984"/>
+                    <a:pt x="8013097" y="420699"/>
+                    <a:pt x="8030623" y="422127"/>
+                  </a:cubicBezTo>
+                  <a:cubicBezTo>
+                    <a:pt x="8100632" y="427843"/>
+                    <a:pt x="8169402" y="431748"/>
+                    <a:pt x="8237982" y="435177"/>
+                  </a:cubicBezTo>
+                  <a:cubicBezTo>
+                    <a:pt x="8375047" y="442035"/>
+                    <a:pt x="8511254" y="444511"/>
+                    <a:pt x="8647748" y="449464"/>
+                  </a:cubicBezTo>
+                  <a:cubicBezTo>
+                    <a:pt x="8715946" y="451750"/>
+                    <a:pt x="8784336" y="454513"/>
+                    <a:pt x="8852821" y="456132"/>
+                  </a:cubicBezTo>
+                  <a:cubicBezTo>
+                    <a:pt x="8887111" y="456989"/>
+                    <a:pt x="8921401" y="457751"/>
+                    <a:pt x="8955786" y="458132"/>
+                  </a:cubicBezTo>
+                  <a:cubicBezTo>
+                    <a:pt x="8990171" y="458323"/>
+                    <a:pt x="9024651" y="458227"/>
+                    <a:pt x="9059227" y="457751"/>
+                  </a:cubicBezTo>
+                  <a:cubicBezTo>
+                    <a:pt x="9099995" y="456989"/>
+                    <a:pt x="9140857" y="455275"/>
+                    <a:pt x="9182005" y="452512"/>
+                  </a:cubicBezTo>
+                  <a:lnTo>
+                    <a:pt x="9182005" y="154189"/>
+                  </a:lnTo>
+                  <a:close/>
+                </a:path>
+              </a:pathLst>
+            </a:custGeom>
+            <a:solidFill>
+              <a:schemeClr val="bg1">
+                <a:alpha val="30000"/>
+              </a:schemeClr>
+            </a:solidFill>
+            <a:ln w="9525" cap="flat">
+              <a:noFill/>
+              <a:prstDash val="solid"/>
+              <a:miter/>
+            </a:ln>
+          </p:spPr>
+          <p:txBody>
+            <a:bodyPr rtlCol="0" anchor="ctr"/>
+            <a:lstStyle/>
+            <a:p>
+              <a:endParaRPr lang="en-US"/>
+            </a:p>
+          </p:txBody>
+        </p:sp>
+        <p:sp>
+          <p:nvSpPr>
+            <p:cNvPr id="2061" name="Freeform: Shape 2060">
+              <a:extLst>
+                <a:ext uri="{FF2B5EF4-FFF2-40B4-BE49-F238E27FC236}">
+                  <a16:creationId xmlns:a16="http://schemas.microsoft.com/office/drawing/2014/main" id="{5EF4DD4B-217B-4346-A2B8-4327936399CA}"/>
+                </a:ext>
+                <a:ext uri="{C183D7F6-B498-43B3-948B-1728B52AA6E4}">
+                  <adec:decorative xmlns:adec="http://schemas.microsoft.com/office/drawing/2017/decorative" val="1"/>
+                </a:ext>
+              </a:extLst>
+            </p:cNvPr>
+            <p:cNvSpPr/>
+            <p:nvPr>
+              <p:extLst>
+                <p:ext uri="{386F3935-93C4-4BCD-93E2-E3B085C9AB24}">
+                  <p16:designElem xmlns:p16="http://schemas.microsoft.com/office/powerpoint/2015/main" val="1"/>
+                </p:ext>
+              </p:extLst>
+            </p:nvPr>
+          </p:nvSpPr>
+          <p:spPr>
+            <a:xfrm>
+              <a:off x="-305" y="3324550"/>
+              <a:ext cx="9182100" cy="765639"/>
+            </a:xfrm>
+            <a:custGeom>
+              <a:avLst/>
+              <a:gdLst>
+                <a:gd name="connsiteX0" fmla="*/ 9182100 w 9182100"/>
+                <a:gd name="connsiteY0" fmla="*/ 351088 h 765639"/>
+                <a:gd name="connsiteX1" fmla="*/ 9178480 w 9182100"/>
+                <a:gd name="connsiteY1" fmla="*/ 350993 h 765639"/>
+                <a:gd name="connsiteX2" fmla="*/ 8783955 w 9182100"/>
+                <a:gd name="connsiteY2" fmla="*/ 327561 h 765639"/>
+                <a:gd name="connsiteX3" fmla="*/ 8390763 w 9182100"/>
+                <a:gd name="connsiteY3" fmla="*/ 288795 h 765639"/>
+                <a:gd name="connsiteX4" fmla="*/ 8199502 w 9182100"/>
+                <a:gd name="connsiteY4" fmla="*/ 262601 h 765639"/>
+                <a:gd name="connsiteX5" fmla="*/ 8153972 w 9182100"/>
+                <a:gd name="connsiteY5" fmla="*/ 254886 h 765639"/>
+                <a:gd name="connsiteX6" fmla="*/ 8131588 w 9182100"/>
+                <a:gd name="connsiteY6" fmla="*/ 250790 h 765639"/>
+                <a:gd name="connsiteX7" fmla="*/ 8104632 w 9182100"/>
+                <a:gd name="connsiteY7" fmla="*/ 246504 h 765639"/>
+                <a:gd name="connsiteX8" fmla="*/ 8050911 w 9182100"/>
+                <a:gd name="connsiteY8" fmla="*/ 238217 h 765639"/>
+                <a:gd name="connsiteX9" fmla="*/ 7998810 w 9182100"/>
+                <a:gd name="connsiteY9" fmla="*/ 230978 h 765639"/>
+                <a:gd name="connsiteX10" fmla="*/ 7589902 w 9182100"/>
+                <a:gd name="connsiteY10" fmla="*/ 183925 h 765639"/>
+                <a:gd name="connsiteX11" fmla="*/ 7183469 w 9182100"/>
+                <a:gd name="connsiteY11" fmla="*/ 147634 h 765639"/>
+                <a:gd name="connsiteX12" fmla="*/ 6775990 w 9182100"/>
+                <a:gd name="connsiteY12" fmla="*/ 119821 h 765639"/>
+                <a:gd name="connsiteX13" fmla="*/ 6364795 w 9182100"/>
+                <a:gd name="connsiteY13" fmla="*/ 102391 h 765639"/>
+                <a:gd name="connsiteX14" fmla="*/ 6154293 w 9182100"/>
+                <a:gd name="connsiteY14" fmla="*/ 100581 h 765639"/>
+                <a:gd name="connsiteX15" fmla="*/ 6100287 w 9182100"/>
+                <a:gd name="connsiteY15" fmla="*/ 101343 h 765639"/>
+                <a:gd name="connsiteX16" fmla="*/ 6045327 w 9182100"/>
+                <a:gd name="connsiteY16" fmla="*/ 103438 h 765639"/>
+                <a:gd name="connsiteX17" fmla="*/ 5935980 w 9182100"/>
+                <a:gd name="connsiteY17" fmla="*/ 110296 h 765639"/>
+                <a:gd name="connsiteX18" fmla="*/ 5523357 w 9182100"/>
+                <a:gd name="connsiteY18" fmla="*/ 157635 h 765639"/>
+                <a:gd name="connsiteX19" fmla="*/ 5149882 w 9182100"/>
+                <a:gd name="connsiteY19" fmla="*/ 185639 h 765639"/>
+                <a:gd name="connsiteX20" fmla="*/ 4777073 w 9182100"/>
+                <a:gd name="connsiteY20" fmla="*/ 170685 h 765639"/>
+                <a:gd name="connsiteX21" fmla="*/ 4729925 w 9182100"/>
+                <a:gd name="connsiteY21" fmla="*/ 166208 h 765639"/>
+                <a:gd name="connsiteX22" fmla="*/ 4682585 w 9182100"/>
+                <a:gd name="connsiteY22" fmla="*/ 161064 h 765639"/>
+                <a:gd name="connsiteX23" fmla="*/ 4635151 w 9182100"/>
+                <a:gd name="connsiteY23" fmla="*/ 155445 h 765639"/>
+                <a:gd name="connsiteX24" fmla="*/ 4611434 w 9182100"/>
+                <a:gd name="connsiteY24" fmla="*/ 152492 h 765639"/>
+                <a:gd name="connsiteX25" fmla="*/ 4587145 w 9182100"/>
+                <a:gd name="connsiteY25" fmla="*/ 149349 h 765639"/>
+                <a:gd name="connsiteX26" fmla="*/ 4387977 w 9182100"/>
+                <a:gd name="connsiteY26" fmla="*/ 122774 h 765639"/>
+                <a:gd name="connsiteX27" fmla="*/ 3989356 w 9182100"/>
+                <a:gd name="connsiteY27" fmla="*/ 68577 h 765639"/>
+                <a:gd name="connsiteX28" fmla="*/ 3789140 w 9182100"/>
+                <a:gd name="connsiteY28" fmla="*/ 42192 h 765639"/>
+                <a:gd name="connsiteX29" fmla="*/ 3689033 w 9182100"/>
+                <a:gd name="connsiteY29" fmla="*/ 29143 h 765639"/>
+                <a:gd name="connsiteX30" fmla="*/ 3634835 w 9182100"/>
+                <a:gd name="connsiteY30" fmla="*/ 22571 h 765639"/>
+                <a:gd name="connsiteX31" fmla="*/ 3579876 w 9182100"/>
+                <a:gd name="connsiteY31" fmla="*/ 16856 h 765639"/>
+                <a:gd name="connsiteX32" fmla="*/ 3147441 w 9182100"/>
+                <a:gd name="connsiteY32" fmla="*/ 473 h 765639"/>
+                <a:gd name="connsiteX33" fmla="*/ 2724722 w 9182100"/>
+                <a:gd name="connsiteY33" fmla="*/ 22857 h 765639"/>
+                <a:gd name="connsiteX34" fmla="*/ 1898428 w 9182100"/>
+                <a:gd name="connsiteY34" fmla="*/ 147730 h 765639"/>
+                <a:gd name="connsiteX35" fmla="*/ 1692878 w 9182100"/>
+                <a:gd name="connsiteY35" fmla="*/ 195069 h 765639"/>
+                <a:gd name="connsiteX36" fmla="*/ 1640205 w 9182100"/>
+                <a:gd name="connsiteY36" fmla="*/ 208785 h 765639"/>
+                <a:gd name="connsiteX37" fmla="*/ 1592294 w 9182100"/>
+                <a:gd name="connsiteY37" fmla="*/ 221643 h 765639"/>
+                <a:gd name="connsiteX38" fmla="*/ 1500092 w 9182100"/>
+                <a:gd name="connsiteY38" fmla="*/ 245551 h 765639"/>
+                <a:gd name="connsiteX39" fmla="*/ 1130046 w 9182100"/>
+                <a:gd name="connsiteY39" fmla="*/ 318227 h 765639"/>
+                <a:gd name="connsiteX40" fmla="*/ 944880 w 9182100"/>
+                <a:gd name="connsiteY40" fmla="*/ 337658 h 765639"/>
+                <a:gd name="connsiteX41" fmla="*/ 852583 w 9182100"/>
+                <a:gd name="connsiteY41" fmla="*/ 341944 h 765639"/>
+                <a:gd name="connsiteX42" fmla="*/ 760476 w 9182100"/>
+                <a:gd name="connsiteY42" fmla="*/ 343087 h 765639"/>
+                <a:gd name="connsiteX43" fmla="*/ 577215 w 9182100"/>
+                <a:gd name="connsiteY43" fmla="*/ 332800 h 765639"/>
+                <a:gd name="connsiteX44" fmla="*/ 394907 w 9182100"/>
+                <a:gd name="connsiteY44" fmla="*/ 305463 h 765639"/>
+                <a:gd name="connsiteX45" fmla="*/ 211265 w 9182100"/>
+                <a:gd name="connsiteY45" fmla="*/ 261363 h 765639"/>
+                <a:gd name="connsiteX46" fmla="*/ 17526 w 9182100"/>
+                <a:gd name="connsiteY46" fmla="*/ 204880 h 765639"/>
+                <a:gd name="connsiteX47" fmla="*/ 0 w 9182100"/>
+                <a:gd name="connsiteY47" fmla="*/ 199927 h 765639"/>
+                <a:gd name="connsiteX48" fmla="*/ 0 w 9182100"/>
+                <a:gd name="connsiteY48" fmla="*/ 526920 h 765639"/>
+                <a:gd name="connsiteX49" fmla="*/ 100298 w 9182100"/>
+                <a:gd name="connsiteY49" fmla="*/ 571973 h 765639"/>
+                <a:gd name="connsiteX50" fmla="*/ 301562 w 9182100"/>
+                <a:gd name="connsiteY50" fmla="*/ 649697 h 765639"/>
+                <a:gd name="connsiteX51" fmla="*/ 731044 w 9182100"/>
+                <a:gd name="connsiteY51" fmla="*/ 746947 h 765639"/>
+                <a:gd name="connsiteX52" fmla="*/ 1168241 w 9182100"/>
+                <a:gd name="connsiteY52" fmla="*/ 762759 h 765639"/>
+                <a:gd name="connsiteX53" fmla="*/ 1596581 w 9182100"/>
+                <a:gd name="connsiteY53" fmla="*/ 716944 h 765639"/>
+                <a:gd name="connsiteX54" fmla="*/ 1701641 w 9182100"/>
+                <a:gd name="connsiteY54" fmla="*/ 697894 h 765639"/>
+                <a:gd name="connsiteX55" fmla="*/ 1752124 w 9182100"/>
+                <a:gd name="connsiteY55" fmla="*/ 688273 h 765639"/>
+                <a:gd name="connsiteX56" fmla="*/ 1797939 w 9182100"/>
+                <a:gd name="connsiteY56" fmla="*/ 679891 h 765639"/>
+                <a:gd name="connsiteX57" fmla="*/ 1988630 w 9182100"/>
+                <a:gd name="connsiteY57" fmla="*/ 649316 h 765639"/>
+                <a:gd name="connsiteX58" fmla="*/ 2376297 w 9182100"/>
+                <a:gd name="connsiteY58" fmla="*/ 601691 h 765639"/>
+                <a:gd name="connsiteX59" fmla="*/ 2570416 w 9182100"/>
+                <a:gd name="connsiteY59" fmla="*/ 584165 h 765639"/>
+                <a:gd name="connsiteX60" fmla="*/ 2764155 w 9182100"/>
+                <a:gd name="connsiteY60" fmla="*/ 571497 h 765639"/>
+                <a:gd name="connsiteX61" fmla="*/ 2956941 w 9182100"/>
+                <a:gd name="connsiteY61" fmla="*/ 564163 h 765639"/>
+                <a:gd name="connsiteX62" fmla="*/ 3148298 w 9182100"/>
+                <a:gd name="connsiteY62" fmla="*/ 562639 h 765639"/>
+                <a:gd name="connsiteX63" fmla="*/ 3337274 w 9182100"/>
+                <a:gd name="connsiteY63" fmla="*/ 568544 h 765639"/>
+                <a:gd name="connsiteX64" fmla="*/ 3522345 w 9182100"/>
+                <a:gd name="connsiteY64" fmla="*/ 583308 h 765639"/>
+                <a:gd name="connsiteX65" fmla="*/ 3567779 w 9182100"/>
+                <a:gd name="connsiteY65" fmla="*/ 588642 h 765639"/>
+                <a:gd name="connsiteX66" fmla="*/ 3613785 w 9182100"/>
+                <a:gd name="connsiteY66" fmla="*/ 594357 h 765639"/>
+                <a:gd name="connsiteX67" fmla="*/ 3713798 w 9182100"/>
+                <a:gd name="connsiteY67" fmla="*/ 607882 h 765639"/>
+                <a:gd name="connsiteX68" fmla="*/ 3913823 w 9182100"/>
+                <a:gd name="connsiteY68" fmla="*/ 634838 h 765639"/>
+                <a:gd name="connsiteX69" fmla="*/ 4315873 w 9182100"/>
+                <a:gd name="connsiteY69" fmla="*/ 686273 h 765639"/>
+                <a:gd name="connsiteX70" fmla="*/ 4517422 w 9182100"/>
+                <a:gd name="connsiteY70" fmla="*/ 710086 h 765639"/>
+                <a:gd name="connsiteX71" fmla="*/ 4728972 w 9182100"/>
+                <a:gd name="connsiteY71" fmla="*/ 731422 h 765639"/>
+                <a:gd name="connsiteX72" fmla="*/ 5162931 w 9182100"/>
+                <a:gd name="connsiteY72" fmla="*/ 744185 h 765639"/>
+                <a:gd name="connsiteX73" fmla="*/ 5594033 w 9182100"/>
+                <a:gd name="connsiteY73" fmla="*/ 706466 h 765639"/>
+                <a:gd name="connsiteX74" fmla="*/ 5982939 w 9182100"/>
+                <a:gd name="connsiteY74" fmla="*/ 655793 h 765639"/>
+                <a:gd name="connsiteX75" fmla="*/ 6075045 w 9182100"/>
+                <a:gd name="connsiteY75" fmla="*/ 648459 h 765639"/>
+                <a:gd name="connsiteX76" fmla="*/ 6167819 w 9182100"/>
+                <a:gd name="connsiteY76" fmla="*/ 643887 h 765639"/>
+                <a:gd name="connsiteX77" fmla="*/ 6361081 w 9182100"/>
+                <a:gd name="connsiteY77" fmla="*/ 639124 h 765639"/>
+                <a:gd name="connsiteX78" fmla="*/ 6757321 w 9182100"/>
+                <a:gd name="connsiteY78" fmla="*/ 640458 h 765639"/>
+                <a:gd name="connsiteX79" fmla="*/ 7156704 w 9182100"/>
+                <a:gd name="connsiteY79" fmla="*/ 649030 h 765639"/>
+                <a:gd name="connsiteX80" fmla="*/ 7556373 w 9182100"/>
+                <a:gd name="connsiteY80" fmla="*/ 662365 h 765639"/>
+                <a:gd name="connsiteX81" fmla="*/ 7952328 w 9182100"/>
+                <a:gd name="connsiteY81" fmla="*/ 682177 h 765639"/>
+                <a:gd name="connsiteX82" fmla="*/ 8000714 w 9182100"/>
+                <a:gd name="connsiteY82" fmla="*/ 685511 h 765639"/>
+                <a:gd name="connsiteX83" fmla="*/ 8047196 w 9182100"/>
+                <a:gd name="connsiteY83" fmla="*/ 689416 h 765639"/>
+                <a:gd name="connsiteX84" fmla="*/ 8097965 w 9182100"/>
+                <a:gd name="connsiteY84" fmla="*/ 693893 h 765639"/>
+                <a:gd name="connsiteX85" fmla="*/ 8152733 w 9182100"/>
+                <a:gd name="connsiteY85" fmla="*/ 697894 h 765639"/>
+                <a:gd name="connsiteX86" fmla="*/ 8363903 w 9182100"/>
+                <a:gd name="connsiteY86" fmla="*/ 705133 h 765639"/>
+                <a:gd name="connsiteX87" fmla="*/ 8777764 w 9182100"/>
+                <a:gd name="connsiteY87" fmla="*/ 698084 h 765639"/>
+                <a:gd name="connsiteX88" fmla="*/ 9182005 w 9182100"/>
+                <a:gd name="connsiteY88" fmla="*/ 668366 h 765639"/>
+                <a:gd name="connsiteX89" fmla="*/ 9182005 w 9182100"/>
+                <a:gd name="connsiteY89" fmla="*/ 351088 h 765639"/>
+              </a:gdLst>
+              <a:ahLst/>
+              <a:cxnLst>
+                <a:cxn ang="0">
+                  <a:pos x="connsiteX0" y="connsiteY0"/>
+                </a:cxn>
+                <a:cxn ang="0">
+                  <a:pos x="connsiteX1" y="connsiteY1"/>
+                </a:cxn>
+                <a:cxn ang="0">
+                  <a:pos x="connsiteX2" y="connsiteY2"/>
+                </a:cxn>
+                <a:cxn ang="0">
+                  <a:pos x="connsiteX3" y="connsiteY3"/>
+                </a:cxn>
+                <a:cxn ang="0">
+                  <a:pos x="connsiteX4" y="connsiteY4"/>
+                </a:cxn>
+                <a:cxn ang="0">
+                  <a:pos x="connsiteX5" y="connsiteY5"/>
+                </a:cxn>
+                <a:cxn ang="0">
+                  <a:pos x="connsiteX6" y="connsiteY6"/>
+                </a:cxn>
+                <a:cxn ang="0">
+                  <a:pos x="connsiteX7" y="connsiteY7"/>
+                </a:cxn>
+                <a:cxn ang="0">
+                  <a:pos x="connsiteX8" y="connsiteY8"/>
+                </a:cxn>
+                <a:cxn ang="0">
+                  <a:pos x="connsiteX9" y="connsiteY9"/>
+                </a:cxn>
+                <a:cxn ang="0">
+                  <a:pos x="connsiteX10" y="connsiteY10"/>
+                </a:cxn>
+                <a:cxn ang="0">
+                  <a:pos x="connsiteX11" y="connsiteY11"/>
+                </a:cxn>
+                <a:cxn ang="0">
+                  <a:pos x="connsiteX12" y="connsiteY12"/>
+                </a:cxn>
+                <a:cxn ang="0">
+                  <a:pos x="connsiteX13" y="connsiteY13"/>
+                </a:cxn>
+                <a:cxn ang="0">
+                  <a:pos x="connsiteX14" y="connsiteY14"/>
+                </a:cxn>
+                <a:cxn ang="0">
+                  <a:pos x="connsiteX15" y="connsiteY15"/>
+                </a:cxn>
+                <a:cxn ang="0">
+                  <a:pos x="connsiteX16" y="connsiteY16"/>
+                </a:cxn>
+                <a:cxn ang="0">
+                  <a:pos x="connsiteX17" y="connsiteY17"/>
+                </a:cxn>
+                <a:cxn ang="0">
+                  <a:pos x="connsiteX18" y="connsiteY18"/>
+                </a:cxn>
+                <a:cxn ang="0">
+                  <a:pos x="connsiteX19" y="connsiteY19"/>
+                </a:cxn>
+                <a:cxn ang="0">
+                  <a:pos x="connsiteX20" y="connsiteY20"/>
+                </a:cxn>
+                <a:cxn ang="0">
+                  <a:pos x="connsiteX21" y="connsiteY21"/>
+                </a:cxn>
+                <a:cxn ang="0">
+                  <a:pos x="connsiteX22" y="connsiteY22"/>
+                </a:cxn>
+                <a:cxn ang="0">
+                  <a:pos x="connsiteX23" y="connsiteY23"/>
+                </a:cxn>
+                <a:cxn ang="0">
+                  <a:pos x="connsiteX24" y="connsiteY24"/>
+                </a:cxn>
+                <a:cxn ang="0">
+                  <a:pos x="connsiteX25" y="connsiteY25"/>
+                </a:cxn>
+                <a:cxn ang="0">
+                  <a:pos x="connsiteX26" y="connsiteY26"/>
+                </a:cxn>
+                <a:cxn ang="0">
+                  <a:pos x="connsiteX27" y="connsiteY27"/>
+                </a:cxn>
+                <a:cxn ang="0">
+                  <a:pos x="connsiteX28" y="connsiteY28"/>
+                </a:cxn>
+                <a:cxn ang="0">
+                  <a:pos x="connsiteX29" y="connsiteY29"/>
+                </a:cxn>
+                <a:cxn ang="0">
+                  <a:pos x="connsiteX30" y="connsiteY30"/>
+                </a:cxn>
+                <a:cxn ang="0">
+                  <a:pos x="connsiteX31" y="connsiteY31"/>
+                </a:cxn>
+                <a:cxn ang="0">
+                  <a:pos x="connsiteX32" y="connsiteY32"/>
+                </a:cxn>
+                <a:cxn ang="0">
+                  <a:pos x="connsiteX33" y="connsiteY33"/>
+                </a:cxn>
+                <a:cxn ang="0">
+                  <a:pos x="connsiteX34" y="connsiteY34"/>
+                </a:cxn>
+                <a:cxn ang="0">
+                  <a:pos x="connsiteX35" y="connsiteY35"/>
+                </a:cxn>
+                <a:cxn ang="0">
+                  <a:pos x="connsiteX36" y="connsiteY36"/>
+                </a:cxn>
+                <a:cxn ang="0">
+                  <a:pos x="connsiteX37" y="connsiteY37"/>
+                </a:cxn>
+                <a:cxn ang="0">
+                  <a:pos x="connsiteX38" y="connsiteY38"/>
+                </a:cxn>
+                <a:cxn ang="0">
+                  <a:pos x="connsiteX39" y="connsiteY39"/>
+                </a:cxn>
+                <a:cxn ang="0">
+                  <a:pos x="connsiteX40" y="connsiteY40"/>
+                </a:cxn>
+                <a:cxn ang="0">
+                  <a:pos x="connsiteX41" y="connsiteY41"/>
+                </a:cxn>
+                <a:cxn ang="0">
+                  <a:pos x="connsiteX42" y="connsiteY42"/>
+                </a:cxn>
+                <a:cxn ang="0">
+                  <a:pos x="connsiteX43" y="connsiteY43"/>
+                </a:cxn>
+                <a:cxn ang="0">
+                  <a:pos x="connsiteX44" y="connsiteY44"/>
+                </a:cxn>
+                <a:cxn ang="0">
+                  <a:pos x="connsiteX45" y="connsiteY45"/>
+                </a:cxn>
+                <a:cxn ang="0">
+                  <a:pos x="connsiteX46" y="connsiteY46"/>
+                </a:cxn>
+                <a:cxn ang="0">
+                  <a:pos x="connsiteX47" y="connsiteY47"/>
+                </a:cxn>
+                <a:cxn ang="0">
+                  <a:pos x="connsiteX48" y="connsiteY48"/>
+                </a:cxn>
+                <a:cxn ang="0">
+                  <a:pos x="connsiteX49" y="connsiteY49"/>
+                </a:cxn>
+                <a:cxn ang="0">
+                  <a:pos x="connsiteX50" y="connsiteY50"/>
+                </a:cxn>
+                <a:cxn ang="0">
+                  <a:pos x="connsiteX51" y="connsiteY51"/>
+                </a:cxn>
+                <a:cxn ang="0">
+                  <a:pos x="connsiteX52" y="connsiteY52"/>
+                </a:cxn>
+                <a:cxn ang="0">
+                  <a:pos x="connsiteX53" y="connsiteY53"/>
+                </a:cxn>
+                <a:cxn ang="0">
+                  <a:pos x="connsiteX54" y="connsiteY54"/>
+                </a:cxn>
+                <a:cxn ang="0">
+                  <a:pos x="connsiteX55" y="connsiteY55"/>
+                </a:cxn>
+                <a:cxn ang="0">
+                  <a:pos x="connsiteX56" y="connsiteY56"/>
+                </a:cxn>
+                <a:cxn ang="0">
+                  <a:pos x="connsiteX57" y="connsiteY57"/>
+                </a:cxn>
+                <a:cxn ang="0">
+                  <a:pos x="connsiteX58" y="connsiteY58"/>
+                </a:cxn>
+                <a:cxn ang="0">
+                  <a:pos x="connsiteX59" y="connsiteY59"/>
+                </a:cxn>
+                <a:cxn ang="0">
+                  <a:pos x="connsiteX60" y="connsiteY60"/>
+                </a:cxn>
+                <a:cxn ang="0">
+                  <a:pos x="connsiteX61" y="connsiteY61"/>
+                </a:cxn>
+                <a:cxn ang="0">
+                  <a:pos x="connsiteX62" y="connsiteY62"/>
+                </a:cxn>
+                <a:cxn ang="0">
+                  <a:pos x="connsiteX63" y="connsiteY63"/>
+                </a:cxn>
+                <a:cxn ang="0">
+                  <a:pos x="connsiteX64" y="connsiteY64"/>
+                </a:cxn>
+                <a:cxn ang="0">
+                  <a:pos x="connsiteX65" y="connsiteY65"/>
+                </a:cxn>
+                <a:cxn ang="0">
+                  <a:pos x="connsiteX66" y="connsiteY66"/>
+                </a:cxn>
+                <a:cxn ang="0">
+                  <a:pos x="connsiteX67" y="connsiteY67"/>
+                </a:cxn>
+                <a:cxn ang="0">
+                  <a:pos x="connsiteX68" y="connsiteY68"/>
+                </a:cxn>
+                <a:cxn ang="0">
+                  <a:pos x="connsiteX69" y="connsiteY69"/>
+                </a:cxn>
+                <a:cxn ang="0">
+                  <a:pos x="connsiteX70" y="connsiteY70"/>
+                </a:cxn>
+                <a:cxn ang="0">
+                  <a:pos x="connsiteX71" y="connsiteY71"/>
+                </a:cxn>
+                <a:cxn ang="0">
+                  <a:pos x="connsiteX72" y="connsiteY72"/>
+                </a:cxn>
+                <a:cxn ang="0">
+                  <a:pos x="connsiteX73" y="connsiteY73"/>
+                </a:cxn>
+                <a:cxn ang="0">
+                  <a:pos x="connsiteX74" y="connsiteY74"/>
+                </a:cxn>
+                <a:cxn ang="0">
+                  <a:pos x="connsiteX75" y="connsiteY75"/>
+                </a:cxn>
+                <a:cxn ang="0">
+                  <a:pos x="connsiteX76" y="connsiteY76"/>
+                </a:cxn>
+                <a:cxn ang="0">
+                  <a:pos x="connsiteX77" y="connsiteY77"/>
+                </a:cxn>
+                <a:cxn ang="0">
+                  <a:pos x="connsiteX78" y="connsiteY78"/>
+                </a:cxn>
+                <a:cxn ang="0">
+                  <a:pos x="connsiteX79" y="connsiteY79"/>
+                </a:cxn>
+                <a:cxn ang="0">
+                  <a:pos x="connsiteX80" y="connsiteY80"/>
+                </a:cxn>
+                <a:cxn ang="0">
+                  <a:pos x="connsiteX81" y="connsiteY81"/>
+                </a:cxn>
+                <a:cxn ang="0">
+                  <a:pos x="connsiteX82" y="connsiteY82"/>
+                </a:cxn>
+                <a:cxn ang="0">
+                  <a:pos x="connsiteX83" y="connsiteY83"/>
+                </a:cxn>
+                <a:cxn ang="0">
+                  <a:pos x="connsiteX84" y="connsiteY84"/>
+                </a:cxn>
+                <a:cxn ang="0">
+                  <a:pos x="connsiteX85" y="connsiteY85"/>
+                </a:cxn>
+                <a:cxn ang="0">
+                  <a:pos x="connsiteX86" y="connsiteY86"/>
+                </a:cxn>
+                <a:cxn ang="0">
+                  <a:pos x="connsiteX87" y="connsiteY87"/>
+                </a:cxn>
+                <a:cxn ang="0">
+                  <a:pos x="connsiteX88" y="connsiteY88"/>
+                </a:cxn>
+                <a:cxn ang="0">
+                  <a:pos x="connsiteX89" y="connsiteY89"/>
+                </a:cxn>
+              </a:cxnLst>
+              <a:rect l="l" t="t" r="r" b="b"/>
+              <a:pathLst>
+                <a:path w="9182100" h="765639">
+                  <a:moveTo>
+                    <a:pt x="9182100" y="351088"/>
+                  </a:moveTo>
+                  <a:cubicBezTo>
+                    <a:pt x="9180862" y="351088"/>
+                    <a:pt x="9179719" y="350993"/>
+                    <a:pt x="9178480" y="350993"/>
+                  </a:cubicBezTo>
+                  <a:cubicBezTo>
+                    <a:pt x="9047607" y="346421"/>
+                    <a:pt x="8915591" y="337944"/>
+                    <a:pt x="8783955" y="327561"/>
+                  </a:cubicBezTo>
+                  <a:cubicBezTo>
+                    <a:pt x="8652320" y="316894"/>
+                    <a:pt x="8520589" y="304416"/>
+                    <a:pt x="8390763" y="288795"/>
+                  </a:cubicBezTo>
+                  <a:cubicBezTo>
+                    <a:pt x="8325898" y="281175"/>
+                    <a:pt x="8261509" y="272602"/>
+                    <a:pt x="8199502" y="262601"/>
+                  </a:cubicBezTo>
+                  <a:cubicBezTo>
+                    <a:pt x="8184070" y="260029"/>
+                    <a:pt x="8168831" y="257553"/>
+                    <a:pt x="8153972" y="254886"/>
+                  </a:cubicBezTo>
+                  <a:lnTo>
+                    <a:pt x="8131588" y="250790"/>
+                  </a:lnTo>
+                  <a:lnTo>
+                    <a:pt x="8104632" y="246504"/>
+                  </a:lnTo>
+                  <a:cubicBezTo>
+                    <a:pt x="8086725" y="243741"/>
+                    <a:pt x="8068247" y="240598"/>
+                    <a:pt x="8050911" y="238217"/>
+                  </a:cubicBezTo>
+                  <a:lnTo>
+                    <a:pt x="7998810" y="230978"/>
+                  </a:lnTo>
+                  <a:cubicBezTo>
+                    <a:pt x="7860697" y="212023"/>
+                    <a:pt x="7725633" y="198021"/>
+                    <a:pt x="7589902" y="183925"/>
+                  </a:cubicBezTo>
+                  <a:cubicBezTo>
+                    <a:pt x="7454360" y="170304"/>
+                    <a:pt x="7319010" y="158779"/>
+                    <a:pt x="7183469" y="147634"/>
+                  </a:cubicBezTo>
+                  <a:cubicBezTo>
+                    <a:pt x="7047929" y="137252"/>
+                    <a:pt x="6912198" y="127632"/>
+                    <a:pt x="6775990" y="119821"/>
+                  </a:cubicBezTo>
+                  <a:cubicBezTo>
+                    <a:pt x="6639592" y="112582"/>
+                    <a:pt x="6503194" y="105439"/>
+                    <a:pt x="6364795" y="102391"/>
+                  </a:cubicBezTo>
+                  <a:cubicBezTo>
+                    <a:pt x="6295263" y="101057"/>
+                    <a:pt x="6225826" y="99819"/>
+                    <a:pt x="6154293" y="100581"/>
+                  </a:cubicBezTo>
+                  <a:cubicBezTo>
+                    <a:pt x="6136577" y="100581"/>
+                    <a:pt x="6118860" y="100581"/>
+                    <a:pt x="6100287" y="101343"/>
+                  </a:cubicBezTo>
+                  <a:cubicBezTo>
+                    <a:pt x="6081903" y="101819"/>
+                    <a:pt x="6063615" y="102486"/>
+                    <a:pt x="6045327" y="103438"/>
+                  </a:cubicBezTo>
+                  <a:cubicBezTo>
+                    <a:pt x="6008656" y="104962"/>
+                    <a:pt x="5972175" y="107439"/>
+                    <a:pt x="5935980" y="110296"/>
+                  </a:cubicBezTo>
+                  <a:cubicBezTo>
+                    <a:pt x="5790724" y="121631"/>
+                    <a:pt x="5651659" y="142110"/>
+                    <a:pt x="5523357" y="157635"/>
+                  </a:cubicBezTo>
+                  <a:cubicBezTo>
+                    <a:pt x="5394484" y="173542"/>
+                    <a:pt x="5273040" y="183543"/>
+                    <a:pt x="5149882" y="185639"/>
+                  </a:cubicBezTo>
+                  <a:cubicBezTo>
+                    <a:pt x="5027010" y="187925"/>
+                    <a:pt x="4902803" y="182210"/>
+                    <a:pt x="4777073" y="170685"/>
+                  </a:cubicBezTo>
+                  <a:lnTo>
+                    <a:pt x="4729925" y="166208"/>
+                  </a:lnTo>
+                  <a:lnTo>
+                    <a:pt x="4682585" y="161064"/>
+                  </a:lnTo>
+                  <a:cubicBezTo>
+                    <a:pt x="4666869" y="159445"/>
+                    <a:pt x="4650963" y="157350"/>
+                    <a:pt x="4635151" y="155445"/>
+                  </a:cubicBezTo>
+                  <a:lnTo>
+                    <a:pt x="4611434" y="152492"/>
+                  </a:lnTo>
+                  <a:cubicBezTo>
+                    <a:pt x="4603623" y="151539"/>
+                    <a:pt x="4595622" y="150587"/>
+                    <a:pt x="4587145" y="149349"/>
+                  </a:cubicBezTo>
+                  <a:lnTo>
+                    <a:pt x="4387977" y="122774"/>
+                  </a:lnTo>
+                  <a:lnTo>
+                    <a:pt x="3989356" y="68577"/>
+                  </a:lnTo>
+                  <a:lnTo>
+                    <a:pt x="3789140" y="42192"/>
+                  </a:lnTo>
+                  <a:lnTo>
+                    <a:pt x="3689033" y="29143"/>
+                  </a:lnTo>
+                  <a:lnTo>
+                    <a:pt x="3634835" y="22571"/>
+                  </a:lnTo>
+                  <a:cubicBezTo>
+                    <a:pt x="3616452" y="20285"/>
+                    <a:pt x="3598069" y="18380"/>
+                    <a:pt x="3579876" y="16856"/>
+                  </a:cubicBezTo>
+                  <a:cubicBezTo>
+                    <a:pt x="3433667" y="3140"/>
+                    <a:pt x="3289840" y="-1622"/>
+                    <a:pt x="3147441" y="473"/>
+                  </a:cubicBezTo>
+                  <a:cubicBezTo>
+                    <a:pt x="3005138" y="2283"/>
+                    <a:pt x="2864263" y="10188"/>
+                    <a:pt x="2724722" y="22857"/>
+                  </a:cubicBezTo>
+                  <a:cubicBezTo>
+                    <a:pt x="2445353" y="48098"/>
+                    <a:pt x="2171129" y="90198"/>
+                    <a:pt x="1898428" y="147730"/>
+                  </a:cubicBezTo>
+                  <a:cubicBezTo>
+                    <a:pt x="1830134" y="162208"/>
+                    <a:pt x="1762030" y="177448"/>
+                    <a:pt x="1692878" y="195069"/>
+                  </a:cubicBezTo>
+                  <a:lnTo>
+                    <a:pt x="1640205" y="208785"/>
+                  </a:lnTo>
+                  <a:lnTo>
+                    <a:pt x="1592294" y="221643"/>
+                  </a:lnTo>
+                  <a:cubicBezTo>
+                    <a:pt x="1561624" y="229740"/>
+                    <a:pt x="1530858" y="238503"/>
+                    <a:pt x="1500092" y="245551"/>
+                  </a:cubicBezTo>
+                  <a:cubicBezTo>
+                    <a:pt x="1377125" y="276412"/>
+                    <a:pt x="1253490" y="300987"/>
+                    <a:pt x="1130046" y="318227"/>
+                  </a:cubicBezTo>
+                  <a:cubicBezTo>
+                    <a:pt x="1068229" y="326895"/>
+                    <a:pt x="1006602" y="333086"/>
+                    <a:pt x="944880" y="337658"/>
+                  </a:cubicBezTo>
+                  <a:cubicBezTo>
+                    <a:pt x="914114" y="339277"/>
+                    <a:pt x="883253" y="341563"/>
+                    <a:pt x="852583" y="341944"/>
+                  </a:cubicBezTo>
+                  <a:cubicBezTo>
+                    <a:pt x="821817" y="343278"/>
+                    <a:pt x="791147" y="342992"/>
+                    <a:pt x="760476" y="343087"/>
+                  </a:cubicBezTo>
+                  <a:cubicBezTo>
+                    <a:pt x="699230" y="342135"/>
+                    <a:pt x="638175" y="338706"/>
+                    <a:pt x="577215" y="332800"/>
+                  </a:cubicBezTo>
+                  <a:cubicBezTo>
+                    <a:pt x="516255" y="326895"/>
+                    <a:pt x="455771" y="317179"/>
+                    <a:pt x="394907" y="305463"/>
+                  </a:cubicBezTo>
+                  <a:cubicBezTo>
+                    <a:pt x="334137" y="293557"/>
+                    <a:pt x="273368" y="278412"/>
+                    <a:pt x="211265" y="261363"/>
+                  </a:cubicBezTo>
+                  <a:cubicBezTo>
+                    <a:pt x="149066" y="244123"/>
+                    <a:pt x="85820" y="224310"/>
+                    <a:pt x="17526" y="204880"/>
+                  </a:cubicBezTo>
+                  <a:cubicBezTo>
+                    <a:pt x="11716" y="203165"/>
+                    <a:pt x="5906" y="201546"/>
+                    <a:pt x="0" y="199927"/>
+                  </a:cubicBezTo>
+                  <a:lnTo>
+                    <a:pt x="0" y="526920"/>
+                  </a:lnTo>
+                  <a:cubicBezTo>
+                    <a:pt x="32576" y="541874"/>
+                    <a:pt x="66104" y="557114"/>
+                    <a:pt x="100298" y="571973"/>
+                  </a:cubicBezTo>
+                  <a:cubicBezTo>
+                    <a:pt x="164973" y="600167"/>
+                    <a:pt x="232410" y="626456"/>
+                    <a:pt x="301562" y="649697"/>
+                  </a:cubicBezTo>
+                  <a:cubicBezTo>
+                    <a:pt x="439865" y="696655"/>
+                    <a:pt x="585216" y="728754"/>
+                    <a:pt x="731044" y="746947"/>
+                  </a:cubicBezTo>
+                  <a:cubicBezTo>
+                    <a:pt x="876967" y="764664"/>
+                    <a:pt x="1023652" y="769426"/>
+                    <a:pt x="1168241" y="762759"/>
+                  </a:cubicBezTo>
+                  <a:cubicBezTo>
+                    <a:pt x="1313021" y="756663"/>
+                    <a:pt x="1455896" y="740185"/>
+                    <a:pt x="1596581" y="716944"/>
+                  </a:cubicBezTo>
+                  <a:cubicBezTo>
+                    <a:pt x="1632014" y="711610"/>
+                    <a:pt x="1666685" y="704371"/>
+                    <a:pt x="1701641" y="697894"/>
+                  </a:cubicBezTo>
+                  <a:lnTo>
+                    <a:pt x="1752124" y="688273"/>
+                  </a:lnTo>
+                  <a:lnTo>
+                    <a:pt x="1797939" y="679891"/>
+                  </a:lnTo>
+                  <a:cubicBezTo>
+                    <a:pt x="1860328" y="669128"/>
+                    <a:pt x="1924431" y="658746"/>
+                    <a:pt x="1988630" y="649316"/>
+                  </a:cubicBezTo>
+                  <a:cubicBezTo>
+                    <a:pt x="2117217" y="630838"/>
+                    <a:pt x="2246852" y="614645"/>
+                    <a:pt x="2376297" y="601691"/>
+                  </a:cubicBezTo>
+                  <a:cubicBezTo>
+                    <a:pt x="2441067" y="595214"/>
+                    <a:pt x="2505742" y="589118"/>
+                    <a:pt x="2570416" y="584165"/>
+                  </a:cubicBezTo>
+                  <a:cubicBezTo>
+                    <a:pt x="2635091" y="579402"/>
+                    <a:pt x="2699671" y="574831"/>
+                    <a:pt x="2764155" y="571497"/>
+                  </a:cubicBezTo>
+                  <a:cubicBezTo>
+                    <a:pt x="2828639" y="568068"/>
+                    <a:pt x="2892933" y="565401"/>
+                    <a:pt x="2956941" y="564163"/>
+                  </a:cubicBezTo>
+                  <a:cubicBezTo>
+                    <a:pt x="3021045" y="562353"/>
+                    <a:pt x="3084766" y="561972"/>
+                    <a:pt x="3148298" y="562639"/>
+                  </a:cubicBezTo>
+                  <a:cubicBezTo>
+                    <a:pt x="3211735" y="563305"/>
+                    <a:pt x="3274695" y="565591"/>
+                    <a:pt x="3337274" y="568544"/>
+                  </a:cubicBezTo>
+                  <a:cubicBezTo>
+                    <a:pt x="3399568" y="572259"/>
+                    <a:pt x="3461671" y="576259"/>
+                    <a:pt x="3522345" y="583308"/>
+                  </a:cubicBezTo>
+                  <a:cubicBezTo>
+                    <a:pt x="3537680" y="584737"/>
+                    <a:pt x="3552730" y="586737"/>
+                    <a:pt x="3567779" y="588642"/>
+                  </a:cubicBezTo>
+                  <a:lnTo>
+                    <a:pt x="3613785" y="594357"/>
+                  </a:lnTo>
+                  <a:lnTo>
+                    <a:pt x="3713798" y="607882"/>
+                  </a:lnTo>
+                  <a:lnTo>
+                    <a:pt x="3913823" y="634838"/>
+                  </a:lnTo>
+                  <a:cubicBezTo>
+                    <a:pt x="4047268" y="652078"/>
+                    <a:pt x="4180904" y="670366"/>
+                    <a:pt x="4315873" y="686273"/>
+                  </a:cubicBezTo>
+                  <a:lnTo>
+                    <a:pt x="4517422" y="710086"/>
+                  </a:lnTo>
+                  <a:cubicBezTo>
+                    <a:pt x="4586573" y="717896"/>
+                    <a:pt x="4657916" y="725992"/>
+                    <a:pt x="4728972" y="731422"/>
+                  </a:cubicBezTo>
+                  <a:cubicBezTo>
+                    <a:pt x="4871371" y="743042"/>
+                    <a:pt x="5016627" y="748376"/>
+                    <a:pt x="5162931" y="744185"/>
+                  </a:cubicBezTo>
+                  <a:cubicBezTo>
+                    <a:pt x="5308949" y="740566"/>
+                    <a:pt x="5456111" y="725611"/>
+                    <a:pt x="5594033" y="706466"/>
+                  </a:cubicBezTo>
+                  <a:cubicBezTo>
+                    <a:pt x="5732621" y="687511"/>
+                    <a:pt x="5859876" y="667033"/>
+                    <a:pt x="5982939" y="655793"/>
+                  </a:cubicBezTo>
+                  <a:cubicBezTo>
+                    <a:pt x="6013799" y="652936"/>
+                    <a:pt x="6044375" y="650364"/>
+                    <a:pt x="6075045" y="648459"/>
+                  </a:cubicBezTo>
+                  <a:cubicBezTo>
+                    <a:pt x="6105906" y="646363"/>
+                    <a:pt x="6135529" y="645125"/>
+                    <a:pt x="6167819" y="643887"/>
+                  </a:cubicBezTo>
+                  <a:cubicBezTo>
+                    <a:pt x="6230779" y="641125"/>
+                    <a:pt x="6295930" y="640077"/>
+                    <a:pt x="6361081" y="639124"/>
+                  </a:cubicBezTo>
+                  <a:cubicBezTo>
+                    <a:pt x="6491955" y="637981"/>
+                    <a:pt x="6624638" y="638553"/>
+                    <a:pt x="6757321" y="640458"/>
+                  </a:cubicBezTo>
+                  <a:cubicBezTo>
+                    <a:pt x="6890195" y="642553"/>
+                    <a:pt x="7023449" y="645030"/>
+                    <a:pt x="7156704" y="649030"/>
+                  </a:cubicBezTo>
+                  <a:cubicBezTo>
+                    <a:pt x="7289959" y="652650"/>
+                    <a:pt x="7423404" y="656841"/>
+                    <a:pt x="7556373" y="662365"/>
+                  </a:cubicBezTo>
+                  <a:cubicBezTo>
+                    <a:pt x="7689152" y="667509"/>
+                    <a:pt x="7822502" y="673986"/>
+                    <a:pt x="7952328" y="682177"/>
+                  </a:cubicBezTo>
+                  <a:lnTo>
+                    <a:pt x="8000714" y="685511"/>
+                  </a:lnTo>
+                  <a:cubicBezTo>
+                    <a:pt x="8016811" y="686654"/>
+                    <a:pt x="8031670" y="688178"/>
+                    <a:pt x="8047196" y="689416"/>
+                  </a:cubicBezTo>
+                  <a:lnTo>
+                    <a:pt x="8097965" y="693893"/>
+                  </a:lnTo>
+                  <a:cubicBezTo>
+                    <a:pt x="8116539" y="695417"/>
+                    <a:pt x="8134731" y="696846"/>
+                    <a:pt x="8152733" y="697894"/>
+                  </a:cubicBezTo>
+                  <a:cubicBezTo>
+                    <a:pt x="8224647" y="701989"/>
+                    <a:pt x="8294465" y="704085"/>
+                    <a:pt x="8363903" y="705133"/>
+                  </a:cubicBezTo>
+                  <a:cubicBezTo>
+                    <a:pt x="8502777" y="706657"/>
+                    <a:pt x="8640223" y="704180"/>
+                    <a:pt x="8777764" y="698084"/>
+                  </a:cubicBezTo>
+                  <a:cubicBezTo>
+                    <a:pt x="8912352" y="692083"/>
+                    <a:pt x="9046845" y="682749"/>
+                    <a:pt x="9182005" y="668366"/>
+                  </a:cubicBezTo>
+                  <a:lnTo>
+                    <a:pt x="9182005" y="351088"/>
+                  </a:lnTo>
+                  <a:close/>
+                </a:path>
+              </a:pathLst>
+            </a:custGeom>
+            <a:solidFill>
+              <a:schemeClr val="bg1">
+                <a:alpha val="30000"/>
+              </a:schemeClr>
+            </a:solidFill>
+            <a:ln w="9525" cap="flat">
+              <a:noFill/>
+              <a:prstDash val="solid"/>
+              <a:miter/>
+            </a:ln>
+          </p:spPr>
+          <p:txBody>
+            <a:bodyPr rtlCol="0" anchor="ctr"/>
+            <a:lstStyle/>
+            <a:p>
+              <a:endParaRPr lang="en-US"/>
+            </a:p>
+          </p:txBody>
+        </p:sp>
+      </p:grpSp>
       <p:sp>
         <p:nvSpPr>
           <p:cNvPr id="3" name="Subtitle 2"/>
@@ -3131,12 +6827,25 @@
             <p:ph type="subTitle" idx="1"/>
           </p:nvPr>
         </p:nvSpPr>
-        <p:spPr/>
+        <p:spPr>
+          <a:xfrm>
+            <a:off x="603504" y="4580785"/>
+            <a:ext cx="7062673" cy="484374"/>
+          </a:xfrm>
+        </p:spPr>
         <p:txBody>
-          <a:bodyPr/>
+          <a:bodyPr anchor="b">
+            <a:normAutofit/>
+          </a:bodyPr>
           <a:lstStyle/>
           <a:p>
+            <a:pPr algn="l"/>
             <a:r>
+              <a:rPr lang="en-AU" sz="1700">
+                <a:solidFill>
+                  <a:schemeClr val="tx2"/>
+                </a:solidFill>
+              </a:rPr>
               <a:t>ABS Census 2016 and 2021 | Australian males</a:t>
             </a:r>
           </a:p>
@@ -3150,9 +6859,17 @@
 </p:sld>
 </file>
 
-<file path=ppt/slides/slide10.xml><?xml version="1.0" encoding="utf-8"?>
+<file path=ppt/slides/slide2.xml><?xml version="1.0" encoding="utf-8"?>
 <p:sld xmlns:a="http://schemas.openxmlformats.org/drawingml/2006/main" xmlns:r="http://schemas.openxmlformats.org/officeDocument/2006/relationships" xmlns:p="http://schemas.openxmlformats.org/presentationml/2006/main">
   <p:cSld>
+    <p:bg>
+      <p:bgPr>
+        <a:solidFill>
+          <a:schemeClr val="bg1"/>
+        </a:solidFill>
+        <a:effectLst/>
+      </p:bgPr>
+    </p:bg>
     <p:spTree>
       <p:nvGrpSpPr>
         <p:cNvPr id="1" name=""/>
@@ -3167,6 +6884,66 @@
           <a:chExt cx="0" cy="0"/>
         </a:xfrm>
       </p:grpSpPr>
+      <p:sp useBgFill="1">
+        <p:nvSpPr>
+          <p:cNvPr id="1052" name="Slide Background">
+            <a:extLst>
+              <a:ext uri="{FF2B5EF4-FFF2-40B4-BE49-F238E27FC236}">
+                <a16:creationId xmlns:a16="http://schemas.microsoft.com/office/drawing/2014/main" id="{9F7D5CDA-D291-4307-BF55-1381FED29634}"/>
+              </a:ext>
+              <a:ext uri="{C183D7F6-B498-43B3-948B-1728B52AA6E4}">
+                <adec:decorative xmlns:adec="http://schemas.microsoft.com/office/drawing/2017/decorative" val="1"/>
+              </a:ext>
+            </a:extLst>
+          </p:cNvPr>
+          <p:cNvSpPr>
+            <a:spLocks noGrp="1" noRot="1" noChangeAspect="1" noMove="1" noResize="1" noEditPoints="1" noAdjustHandles="1" noChangeArrowheads="1" noChangeShapeType="1" noTextEdit="1"/>
+          </p:cNvSpPr>
+          <p:nvPr>
+            <p:extLst>
+              <p:ext uri="{386F3935-93C4-4BCD-93E2-E3B085C9AB24}">
+                <p16:designElem xmlns:p16="http://schemas.microsoft.com/office/powerpoint/2015/main" val="1"/>
+              </p:ext>
+            </p:extLst>
+          </p:nvPr>
+        </p:nvSpPr>
+        <p:spPr>
+          <a:xfrm>
+            <a:off x="0" y="0"/>
+            <a:ext cx="9144000" cy="6858000"/>
+          </a:xfrm>
+          <a:prstGeom prst="rect">
+            <a:avLst/>
+          </a:prstGeom>
+          <a:ln>
+            <a:noFill/>
+          </a:ln>
+        </p:spPr>
+        <p:style>
+          <a:lnRef idx="2">
+            <a:schemeClr val="accent1">
+              <a:shade val="50000"/>
+            </a:schemeClr>
+          </a:lnRef>
+          <a:fillRef idx="1">
+            <a:schemeClr val="accent1"/>
+          </a:fillRef>
+          <a:effectRef idx="0">
+            <a:schemeClr val="accent1"/>
+          </a:effectRef>
+          <a:fontRef idx="minor">
+            <a:schemeClr val="lt1"/>
+          </a:fontRef>
+        </p:style>
+        <p:txBody>
+          <a:bodyPr rtlCol="0" anchor="ctr"/>
+          <a:lstStyle/>
+          <a:p>
+            <a:pPr algn="ctr"/>
+            <a:endParaRPr lang="en-US"/>
+          </a:p>
+        </p:txBody>
+      </p:sp>
       <p:sp>
         <p:nvSpPr>
           <p:cNvPr id="2" name="Title 1"/>
@@ -3177,518 +6954,21 @@
             <p:ph type="title"/>
           </p:nvPr>
         </p:nvSpPr>
-        <p:spPr/>
+        <p:spPr>
+          <a:xfrm>
+            <a:off x="571350" y="762001"/>
+            <a:ext cx="4000647" cy="1708242"/>
+          </a:xfrm>
+        </p:spPr>
         <p:txBody>
-          <a:bodyPr/>
+          <a:bodyPr anchor="ctr">
+            <a:normAutofit/>
+          </a:bodyPr>
           <a:lstStyle/>
           <a:p>
             <a:r>
-              <a:t>Robustness summary</a:t>
-            </a:r>
-          </a:p>
-        </p:txBody>
-      </p:sp>
-      <p:graphicFrame>
-        <p:nvGraphicFramePr>
-          <p:cNvPr id="3" name="Table 2"/>
-          <p:cNvGraphicFramePr>
-            <a:graphicFrameLocks noGrp="1"/>
-          </p:cNvGraphicFramePr>
-          <p:nvPr/>
-        </p:nvGraphicFramePr>
-        <p:xfrm>
-          <a:off x="457200" y="1097280"/>
-          <a:ext cx="8229600" cy="3200400"/>
-        </p:xfrm>
-        <a:graphic>
-          <a:graphicData uri="http://schemas.openxmlformats.org/drawingml/2006/table">
-            <a:tbl>
-              <a:tblPr firstRow="1" bandRow="1">
-                <a:tableStyleId>{5C22544A-7EE6-4342-B048-85BDC9FD1C3A}</a:tableStyleId>
-              </a:tblPr>
-              <a:tblGrid>
-                <a:gridCol w="2057400">
-                  <a:extLst>
-                    <a:ext uri="{9D8B030D-6E8A-4147-A177-3AD203B41FA5}">
-                      <a16:colId xmlns:a16="http://schemas.microsoft.com/office/drawing/2014/main" val="20000"/>
-                    </a:ext>
-                  </a:extLst>
-                </a:gridCol>
-                <a:gridCol w="2057400">
-                  <a:extLst>
-                    <a:ext uri="{9D8B030D-6E8A-4147-A177-3AD203B41FA5}">
-                      <a16:colId xmlns:a16="http://schemas.microsoft.com/office/drawing/2014/main" val="20001"/>
-                    </a:ext>
-                  </a:extLst>
-                </a:gridCol>
-                <a:gridCol w="2057400">
-                  <a:extLst>
-                    <a:ext uri="{9D8B030D-6E8A-4147-A177-3AD203B41FA5}">
-                      <a16:colId xmlns:a16="http://schemas.microsoft.com/office/drawing/2014/main" val="20002"/>
-                    </a:ext>
-                  </a:extLst>
-                </a:gridCol>
-                <a:gridCol w="2057400">
-                  <a:extLst>
-                    <a:ext uri="{9D8B030D-6E8A-4147-A177-3AD203B41FA5}">
-                      <a16:colId xmlns:a16="http://schemas.microsoft.com/office/drawing/2014/main" val="20003"/>
-                    </a:ext>
-                  </a:extLst>
-                </a:gridCol>
-              </a:tblGrid>
-              <a:tr h="533400">
-                <a:tc>
-                  <a:txBody>
-                    <a:bodyPr/>
-                    <a:lstStyle/>
-                    <a:p>
-                      <a:pPr>
-                        <a:defRPr sz="1400" b="1"/>
-                      </a:pPr>
-                      <a:r>
-                        <a:rPr dirty="0"/>
-                        <a:t>Specification</a:t>
-                      </a:r>
-                    </a:p>
-                  </a:txBody>
-                  <a:tcPr/>
-                </a:tc>
-                <a:tc>
-                  <a:txBody>
-                    <a:bodyPr/>
-                    <a:lstStyle/>
-                    <a:p>
-                      <a:pPr>
-                        <a:defRPr sz="1400" b="1"/>
-                      </a:pPr>
-                      <a:r>
-                        <a:t>β (education rank)</a:t>
-                      </a:r>
-                    </a:p>
-                  </a:txBody>
-                  <a:tcPr/>
-                </a:tc>
-                <a:tc>
-                  <a:txBody>
-                    <a:bodyPr/>
-                    <a:lstStyle/>
-                    <a:p>
-                      <a:pPr>
-                        <a:defRPr sz="1400" b="1"/>
-                      </a:pPr>
-                      <a:r>
-                        <a:t>SE</a:t>
-                      </a:r>
-                    </a:p>
-                  </a:txBody>
-                  <a:tcPr/>
-                </a:tc>
-                <a:tc>
-                  <a:txBody>
-                    <a:bodyPr/>
-                    <a:lstStyle/>
-                    <a:p>
-                      <a:pPr>
-                        <a:defRPr sz="1400" b="1"/>
-                      </a:pPr>
-                      <a:r>
-                        <a:rPr dirty="0"/>
-                        <a:t>Note</a:t>
-                      </a:r>
-                    </a:p>
-                  </a:txBody>
-                  <a:tcPr/>
-                </a:tc>
-                <a:extLst>
-                  <a:ext uri="{0D108BD9-81ED-4DB2-BD59-A6C34878D82A}">
-                    <a16:rowId xmlns:a16="http://schemas.microsoft.com/office/drawing/2014/main" val="10000"/>
-                  </a:ext>
-                </a:extLst>
-              </a:tr>
-              <a:tr h="533400">
-                <a:tc>
-                  <a:txBody>
-                    <a:bodyPr/>
-                    <a:lstStyle/>
-                    <a:p>
-                      <a:pPr>
-                        <a:defRPr sz="1200"/>
-                      </a:pPr>
-                      <a:r>
-                        <a:t>Main</a:t>
-                      </a:r>
-                    </a:p>
-                  </a:txBody>
-                  <a:tcPr/>
-                </a:tc>
-                <a:tc>
-                  <a:txBody>
-                    <a:bodyPr/>
-                    <a:lstStyle/>
-                    <a:p>
-                      <a:pPr>
-                        <a:defRPr sz="1200"/>
-                      </a:pPr>
-                      <a:r>
-                        <a:t>$195.88</a:t>
-                      </a:r>
-                    </a:p>
-                  </a:txBody>
-                  <a:tcPr/>
-                </a:tc>
-                <a:tc>
-                  <a:txBody>
-                    <a:bodyPr/>
-                    <a:lstStyle/>
-                    <a:p>
-                      <a:pPr>
-                        <a:defRPr sz="1200"/>
-                      </a:pPr>
-                      <a:r>
-                        <a:t>$7.38</a:t>
-                      </a:r>
-                    </a:p>
-                  </a:txBody>
-                  <a:tcPr/>
-                </a:tc>
-                <a:tc>
-                  <a:txBody>
-                    <a:bodyPr/>
-                    <a:lstStyle/>
-                    <a:p>
-                      <a:pPr>
-                        <a:defRPr sz="1200"/>
-                      </a:pPr>
-                      <a:r>
-                        <a:t>WLS with year control</a:t>
-                      </a:r>
-                    </a:p>
-                  </a:txBody>
-                  <a:tcPr/>
-                </a:tc>
-                <a:extLst>
-                  <a:ext uri="{0D108BD9-81ED-4DB2-BD59-A6C34878D82A}">
-                    <a16:rowId xmlns:a16="http://schemas.microsoft.com/office/drawing/2014/main" val="10001"/>
-                  </a:ext>
-                </a:extLst>
-              </a:tr>
-              <a:tr h="533400">
-                <a:tc>
-                  <a:txBody>
-                    <a:bodyPr/>
-                    <a:lstStyle/>
-                    <a:p>
-                      <a:pPr>
-                        <a:defRPr sz="1200"/>
-                      </a:pPr>
-                      <a:r>
-                        <a:t>Drop top bracket</a:t>
-                      </a:r>
-                    </a:p>
-                  </a:txBody>
-                  <a:tcPr/>
-                </a:tc>
-                <a:tc>
-                  <a:txBody>
-                    <a:bodyPr/>
-                    <a:lstStyle/>
-                    <a:p>
-                      <a:pPr>
-                        <a:defRPr sz="1200"/>
-                      </a:pPr>
-                      <a:r>
-                        <a:rPr dirty="0"/>
-                        <a:t>$145.74</a:t>
-                      </a:r>
-                    </a:p>
-                  </a:txBody>
-                  <a:tcPr/>
-                </a:tc>
-                <a:tc>
-                  <a:txBody>
-                    <a:bodyPr/>
-                    <a:lstStyle/>
-                    <a:p>
-                      <a:pPr>
-                        <a:defRPr sz="1200"/>
-                      </a:pPr>
-                      <a:r>
-                        <a:t>$9.01</a:t>
-                      </a:r>
-                    </a:p>
-                  </a:txBody>
-                  <a:tcPr/>
-                </a:tc>
-                <a:tc>
-                  <a:txBody>
-                    <a:bodyPr/>
-                    <a:lstStyle/>
-                    <a:p>
-                      <a:pPr>
-                        <a:defRPr sz="1200"/>
-                      </a:pPr>
-                      <a:r>
-                        <a:t>Exclude open-ended top bracket</a:t>
-                      </a:r>
-                    </a:p>
-                  </a:txBody>
-                  <a:tcPr/>
-                </a:tc>
-                <a:extLst>
-                  <a:ext uri="{0D108BD9-81ED-4DB2-BD59-A6C34878D82A}">
-                    <a16:rowId xmlns:a16="http://schemas.microsoft.com/office/drawing/2014/main" val="10002"/>
-                  </a:ext>
-                </a:extLst>
-              </a:tr>
-              <a:tr h="533400">
-                <a:tc>
-                  <a:txBody>
-                    <a:bodyPr/>
-                    <a:lstStyle/>
-                    <a:p>
-                      <a:pPr>
-                        <a:defRPr sz="1200"/>
-                      </a:pPr>
-                      <a:r>
-                        <a:rPr dirty="0"/>
-                        <a:t>2021 only</a:t>
-                      </a:r>
-                    </a:p>
-                  </a:txBody>
-                  <a:tcPr/>
-                </a:tc>
-                <a:tc>
-                  <a:txBody>
-                    <a:bodyPr/>
-                    <a:lstStyle/>
-                    <a:p>
-                      <a:pPr>
-                        <a:defRPr sz="1200"/>
-                      </a:pPr>
-                      <a:r>
-                        <a:t>$202.64</a:t>
-                      </a:r>
-                    </a:p>
-                  </a:txBody>
-                  <a:tcPr/>
-                </a:tc>
-                <a:tc>
-                  <a:txBody>
-                    <a:bodyPr/>
-                    <a:lstStyle/>
-                    <a:p>
-                      <a:pPr>
-                        <a:defRPr sz="1200"/>
-                      </a:pPr>
-                      <a:r>
-                        <a:t>$12.11</a:t>
-                      </a:r>
-                    </a:p>
-                  </a:txBody>
-                  <a:tcPr/>
-                </a:tc>
-                <a:tc>
-                  <a:txBody>
-                    <a:bodyPr/>
-                    <a:lstStyle/>
-                    <a:p>
-                      <a:pPr>
-                        <a:defRPr sz="1200"/>
-                      </a:pPr>
-                      <a:r>
-                        <a:t>2021 sample only</a:t>
-                      </a:r>
-                    </a:p>
-                  </a:txBody>
-                  <a:tcPr/>
-                </a:tc>
-                <a:extLst>
-                  <a:ext uri="{0D108BD9-81ED-4DB2-BD59-A6C34878D82A}">
-                    <a16:rowId xmlns:a16="http://schemas.microsoft.com/office/drawing/2014/main" val="10003"/>
-                  </a:ext>
-                </a:extLst>
-              </a:tr>
-              <a:tr h="533400">
-                <a:tc>
-                  <a:txBody>
-                    <a:bodyPr/>
-                    <a:lstStyle/>
-                    <a:p>
-                      <a:pPr>
-                        <a:defRPr sz="1200"/>
-                      </a:pPr>
-                      <a:r>
-                        <a:t>2016 only</a:t>
-                      </a:r>
-                    </a:p>
-                  </a:txBody>
-                  <a:tcPr/>
-                </a:tc>
-                <a:tc>
-                  <a:txBody>
-                    <a:bodyPr/>
-                    <a:lstStyle/>
-                    <a:p>
-                      <a:pPr>
-                        <a:defRPr sz="1200"/>
-                      </a:pPr>
-                      <a:r>
-                        <a:t>$187.77</a:t>
-                      </a:r>
-                    </a:p>
-                  </a:txBody>
-                  <a:tcPr/>
-                </a:tc>
-                <a:tc>
-                  <a:txBody>
-                    <a:bodyPr/>
-                    <a:lstStyle/>
-                    <a:p>
-                      <a:pPr>
-                        <a:defRPr sz="1200"/>
-                      </a:pPr>
-                      <a:r>
-                        <a:t>$7.97</a:t>
-                      </a:r>
-                    </a:p>
-                  </a:txBody>
-                  <a:tcPr/>
-                </a:tc>
-                <a:tc>
-                  <a:txBody>
-                    <a:bodyPr/>
-                    <a:lstStyle/>
-                    <a:p>
-                      <a:pPr>
-                        <a:defRPr sz="1200"/>
-                      </a:pPr>
-                      <a:r>
-                        <a:t>2016 sample only</a:t>
-                      </a:r>
-                    </a:p>
-                  </a:txBody>
-                  <a:tcPr/>
-                </a:tc>
-                <a:extLst>
-                  <a:ext uri="{0D108BD9-81ED-4DB2-BD59-A6C34878D82A}">
-                    <a16:rowId xmlns:a16="http://schemas.microsoft.com/office/drawing/2014/main" val="10004"/>
-                  </a:ext>
-                </a:extLst>
-              </a:tr>
-              <a:tr h="533400">
-                <a:tc>
-                  <a:txBody>
-                    <a:bodyPr/>
-                    <a:lstStyle/>
-                    <a:p>
-                      <a:pPr>
-                        <a:defRPr sz="1200"/>
-                      </a:pPr>
-                      <a:r>
-                        <a:t>Unweighted OLS</a:t>
-                      </a:r>
-                    </a:p>
-                  </a:txBody>
-                  <a:tcPr/>
-                </a:tc>
-                <a:tc>
-                  <a:txBody>
-                    <a:bodyPr/>
-                    <a:lstStyle/>
-                    <a:p>
-                      <a:pPr>
-                        <a:defRPr sz="1200"/>
-                      </a:pPr>
-                      <a:r>
-                        <a:t>$205.16</a:t>
-                      </a:r>
-                    </a:p>
-                  </a:txBody>
-                  <a:tcPr/>
-                </a:tc>
-                <a:tc>
-                  <a:txBody>
-                    <a:bodyPr/>
-                    <a:lstStyle/>
-                    <a:p>
-                      <a:pPr>
-                        <a:defRPr sz="1200"/>
-                      </a:pPr>
-                      <a:r>
-                        <a:t>$13.11</a:t>
-                      </a:r>
-                    </a:p>
-                  </a:txBody>
-                  <a:tcPr/>
-                </a:tc>
-                <a:tc>
-                  <a:txBody>
-                    <a:bodyPr/>
-                    <a:lstStyle/>
-                    <a:p>
-                      <a:pPr>
-                        <a:defRPr sz="1200"/>
-                      </a:pPr>
-                      <a:r>
-                        <a:rPr dirty="0"/>
-                        <a:t>No weighting</a:t>
-                      </a:r>
-                    </a:p>
-                  </a:txBody>
-                  <a:tcPr/>
-                </a:tc>
-                <a:extLst>
-                  <a:ext uri="{0D108BD9-81ED-4DB2-BD59-A6C34878D82A}">
-                    <a16:rowId xmlns:a16="http://schemas.microsoft.com/office/drawing/2014/main" val="10005"/>
-                  </a:ext>
-                </a:extLst>
-              </a:tr>
-            </a:tbl>
-          </a:graphicData>
-        </a:graphic>
-      </p:graphicFrame>
-    </p:spTree>
-  </p:cSld>
-  <p:clrMapOvr>
-    <a:masterClrMapping/>
-  </p:clrMapOvr>
-</p:sld>
-</file>
-
-<file path=ppt/slides/slide11.xml><?xml version="1.0" encoding="utf-8"?>
-<p:sld xmlns:a="http://schemas.openxmlformats.org/drawingml/2006/main" xmlns:r="http://schemas.openxmlformats.org/officeDocument/2006/relationships" xmlns:p="http://schemas.openxmlformats.org/presentationml/2006/main">
-  <p:cSld>
-    <p:spTree>
-      <p:nvGrpSpPr>
-        <p:cNvPr id="1" name=""/>
-        <p:cNvGrpSpPr/>
-        <p:nvPr/>
-      </p:nvGrpSpPr>
-      <p:grpSpPr>
-        <a:xfrm>
-          <a:off x="0" y="0"/>
-          <a:ext cx="0" cy="0"/>
-          <a:chOff x="0" y="0"/>
-          <a:chExt cx="0" cy="0"/>
-        </a:xfrm>
-      </p:grpSpPr>
-      <p:sp>
-        <p:nvSpPr>
-          <p:cNvPr id="2" name="Title 1"/>
-          <p:cNvSpPr>
-            <a:spLocks noGrp="1"/>
-          </p:cNvSpPr>
-          <p:nvPr>
-            <p:ph type="title"/>
-          </p:nvPr>
-        </p:nvSpPr>
-        <p:spPr/>
-        <p:txBody>
-          <a:bodyPr/>
-          <a:lstStyle/>
-          <a:p>
-            <a:r>
-              <a:t>Conclusion and next steps</a:t>
+              <a:rPr lang="en-US" sz="3500" dirty="0"/>
+              <a:t>Research question and why it matters</a:t>
             </a:r>
           </a:p>
         </p:txBody>
@@ -3703,24 +6983,39 @@
             <p:ph idx="1"/>
           </p:nvPr>
         </p:nvSpPr>
-        <p:spPr/>
+        <p:spPr>
+          <a:xfrm>
+            <a:off x="571350" y="2470244"/>
+            <a:ext cx="4000647" cy="3769835"/>
+          </a:xfrm>
+        </p:spPr>
         <p:txBody>
-          <a:bodyPr/>
+          <a:bodyPr anchor="ctr">
+            <a:normAutofit fontScale="92500" lnSpcReduction="20000"/>
+          </a:bodyPr>
           <a:lstStyle/>
           <a:p>
             <a:pPr>
               <a:defRPr sz="1800"/>
             </a:pPr>
             <a:r>
-              <a:t>Conclusion: there is a strong descriptive education-income gradient for Australian males in 2016 and 2021 census aggregates.</a:t>
+              <a:rPr lang="en-US" sz="1800" dirty="0"/>
+              <a:t>How does educational attainment affect personal income for Australian males, and how did that relationship change from 2016 to 2021?</a:t>
             </a:r>
+          </a:p>
+          <a:p>
+            <a:pPr>
+              <a:defRPr sz="1800"/>
+            </a:pPr>
+            <a:endParaRPr lang="en-US" sz="1800" dirty="0"/>
           </a:p>
           <a:p>
             <a:pPr>
               <a:defRPr sz="1800"/>
             </a:pPr>
             <a:r>
-              <a:t>What we cannot conclude: a causal return to education from this grouped data.</a:t>
+              <a:rPr lang="en-US" sz="1800" dirty="0"/>
+              <a:t>Why it matters:</a:t>
             </a:r>
           </a:p>
           <a:p>
@@ -3728,119 +7023,92 @@
               <a:defRPr sz="1800"/>
             </a:pPr>
             <a:r>
-              <a:t>Next step: use individual-level microdata with controls, or seek quasi-experimental variation or longitudinal data to address the main threat.</a:t>
+              <a:rPr lang="en-US" sz="1800" dirty="0"/>
+              <a:t>- Education-income gradients are central to inequality and </a:t>
             </a:r>
-          </a:p>
-        </p:txBody>
-      </p:sp>
-    </p:spTree>
-  </p:cSld>
-  <p:clrMapOvr>
-    <a:masterClrMapping/>
-  </p:clrMapOvr>
-</p:sld>
-</file>
-
-<file path=ppt/slides/slide2.xml><?xml version="1.0" encoding="utf-8"?>
-<p:sld xmlns:a="http://schemas.openxmlformats.org/drawingml/2006/main" xmlns:r="http://schemas.openxmlformats.org/officeDocument/2006/relationships" xmlns:p="http://schemas.openxmlformats.org/presentationml/2006/main">
-  <p:cSld>
-    <p:spTree>
-      <p:nvGrpSpPr>
-        <p:cNvPr id="1" name=""/>
-        <p:cNvGrpSpPr/>
-        <p:nvPr/>
-      </p:nvGrpSpPr>
-      <p:grpSpPr>
-        <a:xfrm>
-          <a:off x="0" y="0"/>
-          <a:ext cx="0" cy="0"/>
-          <a:chOff x="0" y="0"/>
-          <a:chExt cx="0" cy="0"/>
-        </a:xfrm>
-      </p:grpSpPr>
-      <p:sp>
-        <p:nvSpPr>
-          <p:cNvPr id="2" name="Title 1"/>
-          <p:cNvSpPr>
-            <a:spLocks noGrp="1"/>
-          </p:cNvSpPr>
-          <p:nvPr>
-            <p:ph type="title"/>
-          </p:nvPr>
-        </p:nvSpPr>
-        <p:spPr/>
-        <p:txBody>
-          <a:bodyPr/>
-          <a:lstStyle/>
-          <a:p>
             <a:r>
-              <a:t>Research question and why it matters</a:t>
+              <a:rPr lang="en-US" sz="1800" dirty="0" err="1"/>
+              <a:t>labour</a:t>
             </a:r>
-          </a:p>
-        </p:txBody>
-      </p:sp>
-      <p:sp>
-        <p:nvSpPr>
-          <p:cNvPr id="3" name="Content Placeholder 2"/>
-          <p:cNvSpPr>
-            <a:spLocks noGrp="1"/>
-          </p:cNvSpPr>
-          <p:nvPr>
-            <p:ph idx="1"/>
-          </p:nvPr>
-        </p:nvSpPr>
-        <p:spPr/>
-        <p:txBody>
-          <a:bodyPr/>
-          <a:lstStyle/>
+            <a:r>
+              <a:rPr lang="en-US" sz="1800" dirty="0"/>
+              <a:t>-market policy.</a:t>
+            </a:r>
+          </a:p>
           <a:p>
             <a:pPr>
               <a:defRPr sz="1800"/>
             </a:pPr>
             <a:r>
-              <a:t>How does educational attainment affect personal income for Australian males, and how did that relationship change from 2016 to 2021?</a:t>
+              <a:rPr lang="en-US" sz="1800" dirty="0"/>
+              <a:t>- Governments, students, and employers all rely on returns-to-education evidence.</a:t>
             </a:r>
-          </a:p>
-          <a:p>
-            <a:pPr>
-              <a:defRPr sz="1800"/>
-            </a:pPr>
-            <a:endParaRPr/>
           </a:p>
           <a:p>
             <a:pPr>
               <a:defRPr sz="1800"/>
             </a:pPr>
             <a:r>
-              <a:t>Why it matters:</a:t>
-            </a:r>
-          </a:p>
-          <a:p>
-            <a:pPr>
-              <a:defRPr sz="1800"/>
-            </a:pPr>
-            <a:r>
-              <a:t>- Education-income gradients are central to inequality and labour-market policy.</a:t>
-            </a:r>
-          </a:p>
-          <a:p>
-            <a:pPr>
-              <a:defRPr sz="1800"/>
-            </a:pPr>
-            <a:r>
-              <a:t>- Governments, students, and employers all rely on returns-to-education evidence.</a:t>
-            </a:r>
-          </a:p>
-          <a:p>
-            <a:pPr>
-              <a:defRPr sz="1800"/>
-            </a:pPr>
-            <a:r>
+              <a:rPr lang="en-US" sz="1800" dirty="0"/>
               <a:t>- The census data let us compare population-level outcomes across two Census years.</a:t>
             </a:r>
           </a:p>
         </p:txBody>
       </p:sp>
+      <p:pic>
+        <p:nvPicPr>
+          <p:cNvPr id="1026" name="Picture 2" descr="Monash University Australia | Direct Admission | Study MBBS | Tuition ...">
+            <a:extLst>
+              <a:ext uri="{FF2B5EF4-FFF2-40B4-BE49-F238E27FC236}">
+                <a16:creationId xmlns:a16="http://schemas.microsoft.com/office/drawing/2014/main" id="{E72D8A67-6CCF-A01D-2092-0B924804857A}"/>
+              </a:ext>
+            </a:extLst>
+          </p:cNvPr>
+          <p:cNvPicPr>
+            <a:picLocks noChangeAspect="1" noChangeArrowheads="1"/>
+          </p:cNvPicPr>
+          <p:nvPr/>
+        </p:nvPicPr>
+        <p:blipFill>
+          <a:blip r:embed="rId2">
+            <a:extLst>
+              <a:ext uri="{28A0092B-C50C-407E-A947-70E740481C1C}">
+                <a14:useLocalDpi xmlns:a14="http://schemas.microsoft.com/office/drawing/2010/main" val="0"/>
+              </a:ext>
+            </a:extLst>
+          </a:blip>
+          <a:srcRect l="30608" r="32698" b="-2"/>
+          <a:stretch>
+            <a:fillRect/>
+          </a:stretch>
+        </p:blipFill>
+        <p:spPr bwMode="auto">
+          <a:xfrm>
+            <a:off x="5143347" y="-10886"/>
+            <a:ext cx="4000653" cy="6868886"/>
+          </a:xfrm>
+          <a:prstGeom prst="rect">
+            <a:avLst/>
+          </a:prstGeom>
+          <a:noFill/>
+          <a:effectLst>
+            <a:outerShdw blurRad="127000" dist="50800" dir="10800000" sx="99000" sy="99000" algn="r" rotWithShape="0">
+              <a:prstClr val="black">
+                <a:alpha val="40000"/>
+              </a:prstClr>
+            </a:outerShdw>
+          </a:effectLst>
+          <a:extLst>
+            <a:ext uri="{909E8E84-426E-40DD-AFC4-6F175D3DCCD1}">
+              <a14:hiddenFill xmlns:a14="http://schemas.microsoft.com/office/drawing/2010/main">
+                <a:solidFill>
+                  <a:srgbClr val="FFFFFF"/>
+                </a:solidFill>
+              </a14:hiddenFill>
+            </a:ext>
+          </a:extLst>
+        </p:spPr>
+      </p:pic>
     </p:spTree>
   </p:cSld>
   <p:clrMapOvr>
@@ -3922,11 +7190,17 @@
           <p:cNvGraphicFramePr>
             <a:graphicFrameLocks noGrp="1"/>
           </p:cNvGraphicFramePr>
-          <p:nvPr/>
+          <p:nvPr>
+            <p:extLst>
+              <p:ext uri="{D42A27DB-BD31-4B8C-83A1-F6EECF244321}">
+                <p14:modId xmlns:p14="http://schemas.microsoft.com/office/powerpoint/2010/main" val="359406712"/>
+              </p:ext>
+            </p:extLst>
+          </p:nvPr>
         </p:nvGraphicFramePr>
         <p:xfrm>
-          <a:off x="457200" y="2600000"/>
-          <a:ext cx="8229600" cy="3900000"/>
+          <a:off x="457200" y="2240280"/>
+          <a:ext cx="8394192" cy="4259723"/>
         </p:xfrm>
         <a:graphic>
           <a:graphicData uri="http://schemas.openxmlformats.org/drawingml/2006/table">
@@ -3935,28 +7209,28 @@
                 <a:tableStyleId>{5C22544A-7EE6-4342-B048-85BDC9FD1C3A}</a:tableStyleId>
               </a:tblPr>
               <a:tblGrid>
-                <a:gridCol w="3200000">
+                <a:gridCol w="3264000">
                   <a:extLst>
                     <a:ext uri="{9D8B030D-6E8A-4147-A177-3AD203B41FA5}">
                       <a16:colId xmlns:a16="http://schemas.microsoft.com/office/drawing/2014/main" val="20000"/>
                     </a:ext>
                   </a:extLst>
                 </a:gridCol>
-                <a:gridCol w="1514800">
+                <a:gridCol w="1545096">
                   <a:extLst>
                     <a:ext uri="{9D8B030D-6E8A-4147-A177-3AD203B41FA5}">
                       <a16:colId xmlns:a16="http://schemas.microsoft.com/office/drawing/2014/main" val="20001"/>
                     </a:ext>
                   </a:extLst>
                 </a:gridCol>
-                <a:gridCol w="1514800">
+                <a:gridCol w="1545096">
                   <a:extLst>
                     <a:ext uri="{9D8B030D-6E8A-4147-A177-3AD203B41FA5}">
                       <a16:colId xmlns:a16="http://schemas.microsoft.com/office/drawing/2014/main" val="20002"/>
                     </a:ext>
                   </a:extLst>
                 </a:gridCol>
-                <a:gridCol w="2000000">
+                <a:gridCol w="2040000">
                   <a:extLst>
                     <a:ext uri="{9D8B030D-6E8A-4147-A177-3AD203B41FA5}">
                       <a16:colId xmlns:a16="http://schemas.microsoft.com/office/drawing/2014/main" val="20003"/>
@@ -3964,7 +7238,7 @@
                   </a:extLst>
                 </a:gridCol>
               </a:tblGrid>
-              <a:tr h="480000">
+              <a:tr h="524273">
                 <a:tc>
                   <a:txBody>
                     <a:bodyPr/>
@@ -3974,6 +7248,7 @@
                         <a:defRPr sz="1200" b="1"/>
                       </a:pPr>
                       <a:r>
+                        <a:rPr sz="1600" dirty="0"/>
                         <a:t>Education Group</a:t>
                       </a:r>
                     </a:p>
@@ -3989,6 +7264,7 @@
                         <a:defRPr sz="1200" b="1"/>
                       </a:pPr>
                       <a:r>
+                        <a:rPr sz="1600" dirty="0"/>
                         <a:t>N (2016)</a:t>
                       </a:r>
                     </a:p>
@@ -4004,6 +7280,7 @@
                         <a:defRPr sz="1200" b="1"/>
                       </a:pPr>
                       <a:r>
+                        <a:rPr sz="1600" dirty="0"/>
                         <a:t>N (2021)</a:t>
                       </a:r>
                     </a:p>
@@ -4019,6 +7296,7 @@
                         <a:defRPr sz="1200" b="1"/>
                       </a:pPr>
                       <a:r>
+                        <a:rPr sz="1600" dirty="0"/>
                         <a:t>Ed. Rank (1=lowest)</a:t>
                       </a:r>
                     </a:p>
@@ -4031,7 +7309,7 @@
                   </a:ext>
                 </a:extLst>
               </a:tr>
-              <a:tr h="380000">
+              <a:tr h="415050">
                 <a:tc>
                   <a:txBody>
                     <a:bodyPr/>
@@ -4041,6 +7319,7 @@
                         <a:defRPr sz="1100"/>
                       </a:pPr>
                       <a:r>
+                        <a:rPr sz="1800" dirty="0"/>
                         <a:t>Secondary Yr 9 and below</a:t>
                       </a:r>
                     </a:p>
@@ -4056,6 +7335,7 @@
                         <a:defRPr sz="1100"/>
                       </a:pPr>
                       <a:r>
+                        <a:rPr sz="1800"/>
                         <a:t>674,970</a:t>
                       </a:r>
                     </a:p>
@@ -4071,6 +7351,7 @@
                         <a:defRPr sz="1100"/>
                       </a:pPr>
                       <a:r>
+                        <a:rPr sz="1800"/>
                         <a:t>683,386</a:t>
                       </a:r>
                     </a:p>
@@ -4086,6 +7367,7 @@
                         <a:defRPr sz="1100"/>
                       </a:pPr>
                       <a:r>
+                        <a:rPr sz="1800"/>
                         <a:t>1</a:t>
                       </a:r>
                     </a:p>
@@ -4098,7 +7380,7 @@
                   </a:ext>
                 </a:extLst>
               </a:tr>
-              <a:tr h="380000">
+              <a:tr h="415050">
                 <a:tc>
                   <a:txBody>
                     <a:bodyPr/>
@@ -4108,6 +7390,7 @@
                         <a:defRPr sz="1100"/>
                       </a:pPr>
                       <a:r>
+                        <a:rPr sz="1800" dirty="0"/>
                         <a:t>Secondary Yr 10 and above</a:t>
                       </a:r>
                     </a:p>
@@ -4123,6 +7406,7 @@
                         <a:defRPr sz="1100"/>
                       </a:pPr>
                       <a:r>
+                        <a:rPr sz="1800"/>
                         <a:t>2,699,216</a:t>
                       </a:r>
                     </a:p>
@@ -4138,6 +7422,7 @@
                         <a:defRPr sz="1100"/>
                       </a:pPr>
                       <a:r>
+                        <a:rPr sz="1800"/>
                         <a:t>2,869,337</a:t>
                       </a:r>
                     </a:p>
@@ -4153,6 +7438,7 @@
                         <a:defRPr sz="1100"/>
                       </a:pPr>
                       <a:r>
+                        <a:rPr sz="1800"/>
                         <a:t>2</a:t>
                       </a:r>
                     </a:p>
@@ -4165,7 +7451,7 @@
                   </a:ext>
                 </a:extLst>
               </a:tr>
-              <a:tr h="380000">
+              <a:tr h="415050">
                 <a:tc>
                   <a:txBody>
                     <a:bodyPr/>
@@ -4175,6 +7461,7 @@
                         <a:defRPr sz="1100"/>
                       </a:pPr>
                       <a:r>
+                        <a:rPr sz="1800"/>
                         <a:t>Certificate I &amp; II</a:t>
                       </a:r>
                     </a:p>
@@ -4190,6 +7477,7 @@
                         <a:defRPr sz="1100"/>
                       </a:pPr>
                       <a:r>
+                        <a:rPr sz="1800"/>
                         <a:t>6,049</a:t>
                       </a:r>
                     </a:p>
@@ -4205,6 +7493,7 @@
                         <a:defRPr sz="1100"/>
                       </a:pPr>
                       <a:r>
+                        <a:rPr sz="1800"/>
                         <a:t>6,179</a:t>
                       </a:r>
                     </a:p>
@@ -4220,6 +7509,7 @@
                         <a:defRPr sz="1100"/>
                       </a:pPr>
                       <a:r>
+                        <a:rPr sz="1800"/>
                         <a:t>3</a:t>
                       </a:r>
                     </a:p>
@@ -4232,7 +7522,7 @@
                   </a:ext>
                 </a:extLst>
               </a:tr>
-              <a:tr h="380000">
+              <a:tr h="415050">
                 <a:tc>
                   <a:txBody>
                     <a:bodyPr/>
@@ -4242,6 +7532,7 @@
                         <a:defRPr sz="1100"/>
                       </a:pPr>
                       <a:r>
+                        <a:rPr sz="1800" dirty="0"/>
                         <a:t>Certificate III &amp; IV</a:t>
                       </a:r>
                     </a:p>
@@ -4257,6 +7548,7 @@
                         <a:defRPr sz="1100"/>
                       </a:pPr>
                       <a:r>
+                        <a:rPr sz="1800"/>
                         <a:t>1,988,369</a:t>
                       </a:r>
                     </a:p>
@@ -4272,6 +7564,7 @@
                         <a:defRPr sz="1100"/>
                       </a:pPr>
                       <a:r>
+                        <a:rPr sz="1800"/>
                         <a:t>2,132,611</a:t>
                       </a:r>
                     </a:p>
@@ -4287,6 +7580,7 @@
                         <a:defRPr sz="1100"/>
                       </a:pPr>
                       <a:r>
+                        <a:rPr sz="1800"/>
                         <a:t>4</a:t>
                       </a:r>
                     </a:p>
@@ -4299,7 +7593,7 @@
                   </a:ext>
                 </a:extLst>
               </a:tr>
-              <a:tr h="380000">
+              <a:tr h="415050">
                 <a:tc>
                   <a:txBody>
                     <a:bodyPr/>
@@ -4309,6 +7603,7 @@
                         <a:defRPr sz="1100"/>
                       </a:pPr>
                       <a:r>
+                        <a:rPr sz="1800"/>
                         <a:t>Advanced Diploma / Diploma</a:t>
                       </a:r>
                     </a:p>
@@ -4324,6 +7619,7 @@
                         <a:defRPr sz="1100"/>
                       </a:pPr>
                       <a:r>
+                        <a:rPr sz="1800"/>
                         <a:t>701,942</a:t>
                       </a:r>
                     </a:p>
@@ -4339,6 +7635,7 @@
                         <a:defRPr sz="1100"/>
                       </a:pPr>
                       <a:r>
+                        <a:rPr sz="1800"/>
                         <a:t>817,960</a:t>
                       </a:r>
                     </a:p>
@@ -4354,6 +7651,7 @@
                         <a:defRPr sz="1100"/>
                       </a:pPr>
                       <a:r>
+                        <a:rPr sz="1800"/>
                         <a:t>5</a:t>
                       </a:r>
                     </a:p>
@@ -4366,7 +7664,7 @@
                   </a:ext>
                 </a:extLst>
               </a:tr>
-              <a:tr h="380000">
+              <a:tr h="415050">
                 <a:tc>
                   <a:txBody>
                     <a:bodyPr/>
@@ -4376,6 +7674,7 @@
                         <a:defRPr sz="1100"/>
                       </a:pPr>
                       <a:r>
+                        <a:rPr sz="1800"/>
                         <a:t>Bachelor Degree</a:t>
                       </a:r>
                     </a:p>
@@ -4391,6 +7690,7 @@
                         <a:defRPr sz="1100"/>
                       </a:pPr>
                       <a:r>
+                        <a:rPr sz="1800"/>
                         <a:t>1,236,667</a:t>
                       </a:r>
                     </a:p>
@@ -4406,6 +7706,7 @@
                         <a:defRPr sz="1100"/>
                       </a:pPr>
                       <a:r>
+                        <a:rPr sz="1800"/>
                         <a:t>1,552,228</a:t>
                       </a:r>
                     </a:p>
@@ -4421,6 +7722,7 @@
                         <a:defRPr sz="1100"/>
                       </a:pPr>
                       <a:r>
+                        <a:rPr sz="1800"/>
                         <a:t>6</a:t>
                       </a:r>
                     </a:p>
@@ -4433,7 +7735,7 @@
                   </a:ext>
                 </a:extLst>
               </a:tr>
-              <a:tr h="380000">
+              <a:tr h="415050">
                 <a:tc>
                   <a:txBody>
                     <a:bodyPr/>
@@ -4443,6 +7745,7 @@
                         <a:defRPr sz="1100"/>
                       </a:pPr>
                       <a:r>
+                        <a:rPr sz="1800"/>
                         <a:t>Grad. Diploma / Certificate</a:t>
                       </a:r>
                     </a:p>
@@ -4458,6 +7761,7 @@
                         <a:defRPr sz="1100"/>
                       </a:pPr>
                       <a:r>
+                        <a:rPr sz="1800"/>
                         <a:t>133,704</a:t>
                       </a:r>
                     </a:p>
@@ -4473,6 +7777,7 @@
                         <a:defRPr sz="1100"/>
                       </a:pPr>
                       <a:r>
+                        <a:rPr sz="1800"/>
                         <a:t>167,361</a:t>
                       </a:r>
                     </a:p>
@@ -4488,6 +7793,7 @@
                         <a:defRPr sz="1100"/>
                       </a:pPr>
                       <a:r>
+                        <a:rPr sz="1800"/>
                         <a:t>7</a:t>
                       </a:r>
                     </a:p>
@@ -4500,7 +7806,7 @@
                   </a:ext>
                 </a:extLst>
               </a:tr>
-              <a:tr h="380000">
+              <a:tr h="415050">
                 <a:tc>
                   <a:txBody>
                     <a:bodyPr/>
@@ -4510,6 +7816,7 @@
                         <a:defRPr sz="1100"/>
                       </a:pPr>
                       <a:r>
+                        <a:rPr sz="1800"/>
                         <a:t>Postgraduate Degree</a:t>
                       </a:r>
                     </a:p>
@@ -4525,6 +7832,7 @@
                         <a:defRPr sz="1100"/>
                       </a:pPr>
                       <a:r>
+                        <a:rPr sz="1800"/>
                         <a:t>459,793</a:t>
                       </a:r>
                     </a:p>
@@ -4540,6 +7848,7 @@
                         <a:defRPr sz="1100"/>
                       </a:pPr>
                       <a:r>
+                        <a:rPr sz="1800"/>
                         <a:t>658,828</a:t>
                       </a:r>
                     </a:p>
@@ -4555,6 +7864,7 @@
                         <a:defRPr sz="1100"/>
                       </a:pPr>
                       <a:r>
+                        <a:rPr sz="1800"/>
                         <a:t>8</a:t>
                       </a:r>
                     </a:p>
@@ -4567,7 +7877,7 @@
                   </a:ext>
                 </a:extLst>
               </a:tr>
-              <a:tr h="380000">
+              <a:tr h="415050">
                 <a:tc>
                   <a:txBody>
                     <a:bodyPr/>
@@ -4577,6 +7887,7 @@
                         <a:defRPr sz="1100" b="1"/>
                       </a:pPr>
                       <a:r>
+                        <a:rPr sz="1800"/>
                         <a:t>Total</a:t>
                       </a:r>
                     </a:p>
@@ -4592,6 +7903,7 @@
                         <a:defRPr sz="1100" b="1"/>
                       </a:pPr>
                       <a:r>
+                        <a:rPr sz="1800"/>
                         <a:t>7,900,710</a:t>
                       </a:r>
                     </a:p>
@@ -4607,6 +7919,7 @@
                         <a:defRPr sz="1100" b="1"/>
                       </a:pPr>
                       <a:r>
+                        <a:rPr sz="1800"/>
                         <a:t>8,887,890</a:t>
                       </a:r>
                     </a:p>
@@ -4622,6 +7935,7 @@
                         <a:defRPr sz="1100" b="1"/>
                       </a:pPr>
                       <a:r>
+                        <a:rPr sz="1800" dirty="0"/>
                         <a:t>—</a:t>
                       </a:r>
                     </a:p>
@@ -4696,13 +8010,16 @@
         </p:nvSpPr>
         <p:spPr/>
         <p:txBody>
-          <a:bodyPr/>
+          <a:bodyPr>
+            <a:normAutofit/>
+          </a:bodyPr>
           <a:lstStyle/>
           <a:p>
             <a:pPr>
               <a:defRPr sz="1800"/>
             </a:pPr>
             <a:r>
+              <a:rPr sz="2400" dirty="0"/>
               <a:t>Model: weighted mean income = α + β * education rank + γ * year indicator.</a:t>
             </a:r>
           </a:p>
@@ -4711,6 +8028,7 @@
               <a:defRPr sz="1800"/>
             </a:pPr>
             <a:r>
+              <a:rPr sz="2400" dirty="0"/>
               <a:t>Key coefficient: β is the average weekly income gap per education rank step.</a:t>
             </a:r>
           </a:p>
@@ -4719,6 +8037,7 @@
               <a:defRPr sz="1800"/>
             </a:pPr>
             <a:r>
+              <a:rPr sz="2400" dirty="0"/>
               <a:t>Weights: use cell counts because rows represent different population sizes.</a:t>
             </a:r>
           </a:p>
@@ -4727,6 +8046,7 @@
               <a:defRPr sz="1800"/>
             </a:pPr>
             <a:r>
+              <a:rPr sz="2400" dirty="0"/>
               <a:t>Assumption: this is descriptive, not causal. Education rank is not exogenous to income because age, occupation, hours, and location may differ by education group.</a:t>
             </a:r>
           </a:p>
@@ -4769,11 +8089,14 @@
         </p:nvSpPr>
         <p:spPr/>
         <p:txBody>
-          <a:bodyPr/>
+          <a:bodyPr>
+            <a:normAutofit/>
+          </a:bodyPr>
           <a:lstStyle/>
           <a:p>
             <a:r>
-              <a:t>Main results — Education-Income Summary</a:t>
+              <a:rPr dirty="0"/>
+              <a:t>Main results — Education-Income</a:t>
             </a:r>
           </a:p>
         </p:txBody>
@@ -4784,11 +8107,17 @@
           <p:cNvGraphicFramePr>
             <a:graphicFrameLocks noGrp="1"/>
           </p:cNvGraphicFramePr>
-          <p:nvPr/>
+          <p:nvPr>
+            <p:extLst>
+              <p:ext uri="{D42A27DB-BD31-4B8C-83A1-F6EECF244321}">
+                <p14:modId xmlns:p14="http://schemas.microsoft.com/office/powerpoint/2010/main" val="1452451576"/>
+              </p:ext>
+            </p:extLst>
+          </p:nvPr>
         </p:nvGraphicFramePr>
         <p:xfrm>
-          <a:off x="457200" y="1097280"/>
-          <a:ext cx="8229600" cy="4629600"/>
+          <a:off x="192024" y="2249424"/>
+          <a:ext cx="8650223" cy="3505200"/>
         </p:xfrm>
         <a:graphic>
           <a:graphicData uri="http://schemas.openxmlformats.org/drawingml/2006/table">
@@ -4797,35 +8126,35 @@
                 <a:tableStyleId>{5C22544A-7EE6-4342-B048-85BDC9FD1C3A}</a:tableStyleId>
               </a:tblPr>
               <a:tblGrid>
-                <a:gridCol w="3200000">
+                <a:gridCol w="3363555">
                   <a:extLst>
                     <a:ext uri="{9D8B030D-6E8A-4147-A177-3AD203B41FA5}">
                       <a16:colId xmlns:a16="http://schemas.microsoft.com/office/drawing/2014/main" val="20000"/>
                     </a:ext>
                   </a:extLst>
                 </a:gridCol>
-                <a:gridCol w="1257400">
+                <a:gridCol w="1321667">
                   <a:extLst>
                     <a:ext uri="{9D8B030D-6E8A-4147-A177-3AD203B41FA5}">
                       <a16:colId xmlns:a16="http://schemas.microsoft.com/office/drawing/2014/main" val="20001"/>
                     </a:ext>
                   </a:extLst>
                 </a:gridCol>
-                <a:gridCol w="1257400">
+                <a:gridCol w="1321667">
                   <a:extLst>
                     <a:ext uri="{9D8B030D-6E8A-4147-A177-3AD203B41FA5}">
                       <a16:colId xmlns:a16="http://schemas.microsoft.com/office/drawing/2014/main" val="20002"/>
                     </a:ext>
                   </a:extLst>
                 </a:gridCol>
-                <a:gridCol w="1257400">
+                <a:gridCol w="1321667">
                   <a:extLst>
                     <a:ext uri="{9D8B030D-6E8A-4147-A177-3AD203B41FA5}">
                       <a16:colId xmlns:a16="http://schemas.microsoft.com/office/drawing/2014/main" val="20003"/>
                     </a:ext>
                   </a:extLst>
                 </a:gridCol>
-                <a:gridCol w="1257400">
+                <a:gridCol w="1321667">
                   <a:extLst>
                     <a:ext uri="{9D8B030D-6E8A-4147-A177-3AD203B41FA5}">
                       <a16:colId xmlns:a16="http://schemas.microsoft.com/office/drawing/2014/main" val="20004"/>
@@ -4833,7 +8162,7 @@
                   </a:extLst>
                 </a:gridCol>
               </a:tblGrid>
-              <a:tr h="457200">
+              <a:tr h="0">
                 <a:tc>
                   <a:txBody>
                     <a:bodyPr/>
@@ -4843,6 +8172,7 @@
                         <a:defRPr sz="1100" b="1"/>
                       </a:pPr>
                       <a:r>
+                        <a:rPr sz="1600" dirty="0"/>
                         <a:t>Education Group</a:t>
                       </a:r>
                     </a:p>
@@ -4858,7 +8188,12 @@
                         <a:defRPr sz="1100" b="1"/>
                       </a:pPr>
                       <a:r>
-                        <a:t>Wtd. Mean Income 2016</a:t>
+                        <a:rPr sz="1600" dirty="0" err="1"/>
+                        <a:t>Wtd</a:t>
+                      </a:r>
+                      <a:r>
+                        <a:rPr sz="1600" dirty="0"/>
+                        <a:t>. Mean Income 2016</a:t>
                       </a:r>
                     </a:p>
                   </a:txBody>
@@ -4873,6 +8208,7 @@
                         <a:defRPr sz="1100" b="1"/>
                       </a:pPr>
                       <a:r>
+                        <a:rPr sz="1600"/>
                         <a:t>Wtd. Mean Income 2021</a:t>
                       </a:r>
                     </a:p>
@@ -4888,6 +8224,7 @@
                         <a:defRPr sz="1100" b="1"/>
                       </a:pPr>
                       <a:r>
+                        <a:rPr sz="1600"/>
                         <a:t>High Income Share 2016</a:t>
                       </a:r>
                     </a:p>
@@ -4903,6 +8240,7 @@
                         <a:defRPr sz="1100" b="1"/>
                       </a:pPr>
                       <a:r>
+                        <a:rPr sz="1600" dirty="0"/>
                         <a:t>High Income Share 2021</a:t>
                       </a:r>
                     </a:p>
@@ -4915,7 +8253,7 @@
                   </a:ext>
                 </a:extLst>
               </a:tr>
-              <a:tr h="457200">
+              <a:tr h="329184">
                 <a:tc>
                   <a:txBody>
                     <a:bodyPr/>
@@ -4925,6 +8263,7 @@
                         <a:defRPr sz="1000"/>
                       </a:pPr>
                       <a:r>
+                        <a:rPr sz="1800"/>
                         <a:t>Postgraduate Degree</a:t>
                       </a:r>
                     </a:p>
@@ -4940,6 +8279,7 @@
                         <a:defRPr sz="1000"/>
                       </a:pPr>
                       <a:r>
+                        <a:rPr sz="1800" dirty="0"/>
                         <a:t>$1,755</a:t>
                       </a:r>
                     </a:p>
@@ -4955,6 +8295,7 @@
                         <a:defRPr sz="1000"/>
                       </a:pPr>
                       <a:r>
+                        <a:rPr sz="1800"/>
                         <a:t>$1,893</a:t>
                       </a:r>
                     </a:p>
@@ -4970,6 +8311,7 @@
                         <a:defRPr sz="1000"/>
                       </a:pPr>
                       <a:r>
+                        <a:rPr sz="1800"/>
                         <a:t>38.7%</a:t>
                       </a:r>
                     </a:p>
@@ -4985,6 +8327,7 @@
                         <a:defRPr sz="1000"/>
                       </a:pPr>
                       <a:r>
+                        <a:rPr sz="1800"/>
                         <a:t>44.3%</a:t>
                       </a:r>
                     </a:p>
@@ -4997,7 +8340,7 @@
                   </a:ext>
                 </a:extLst>
               </a:tr>
-              <a:tr h="457200">
+              <a:tr h="329184">
                 <a:tc>
                   <a:txBody>
                     <a:bodyPr/>
@@ -5007,6 +8350,7 @@
                         <a:defRPr sz="1000"/>
                       </a:pPr>
                       <a:r>
+                        <a:rPr sz="1800"/>
                         <a:t>Grad. Diploma / Cert.</a:t>
                       </a:r>
                     </a:p>
@@ -5022,6 +8366,7 @@
                         <a:defRPr sz="1000"/>
                       </a:pPr>
                       <a:r>
+                        <a:rPr sz="1800"/>
                         <a:t>$1,695</a:t>
                       </a:r>
                     </a:p>
@@ -5037,6 +8382,7 @@
                         <a:defRPr sz="1000"/>
                       </a:pPr>
                       <a:r>
+                        <a:rPr sz="1800"/>
                         <a:t>$1,844</a:t>
                       </a:r>
                     </a:p>
@@ -5052,6 +8398,7 @@
                         <a:defRPr sz="1000"/>
                       </a:pPr>
                       <a:r>
+                        <a:rPr sz="1800"/>
                         <a:t>34.3%</a:t>
                       </a:r>
                     </a:p>
@@ -5067,6 +8414,7 @@
                         <a:defRPr sz="1000"/>
                       </a:pPr>
                       <a:r>
+                        <a:rPr sz="1800"/>
                         <a:t>42.9%</a:t>
                       </a:r>
                     </a:p>
@@ -5079,7 +8427,7 @@
                   </a:ext>
                 </a:extLst>
               </a:tr>
-              <a:tr h="457200">
+              <a:tr h="329184">
                 <a:tc>
                   <a:txBody>
                     <a:bodyPr/>
@@ -5089,6 +8437,7 @@
                         <a:defRPr sz="1000"/>
                       </a:pPr>
                       <a:r>
+                        <a:rPr sz="1800"/>
                         <a:t>Bachelor Degree</a:t>
                       </a:r>
                     </a:p>
@@ -5104,6 +8453,7 @@
                         <a:defRPr sz="1000"/>
                       </a:pPr>
                       <a:r>
+                        <a:rPr sz="1800"/>
                         <a:t>$1,535</a:t>
                       </a:r>
                     </a:p>
@@ -5119,6 +8469,7 @@
                         <a:defRPr sz="1000"/>
                       </a:pPr>
                       <a:r>
+                        <a:rPr sz="1800"/>
                         <a:t>$1,705</a:t>
                       </a:r>
                     </a:p>
@@ -5134,6 +8485,7 @@
                         <a:defRPr sz="1000"/>
                       </a:pPr>
                       <a:r>
+                        <a:rPr sz="1800"/>
                         <a:t>28.8%</a:t>
                       </a:r>
                     </a:p>
@@ -5149,6 +8501,7 @@
                         <a:defRPr sz="1000"/>
                       </a:pPr>
                       <a:r>
+                        <a:rPr sz="1800"/>
                         <a:t>36.1%</a:t>
                       </a:r>
                     </a:p>
@@ -5161,7 +8514,7 @@
                   </a:ext>
                 </a:extLst>
               </a:tr>
-              <a:tr h="457200">
+              <a:tr h="329184">
                 <a:tc>
                   <a:txBody>
                     <a:bodyPr/>
@@ -5171,6 +8524,7 @@
                         <a:defRPr sz="1000"/>
                       </a:pPr>
                       <a:r>
+                        <a:rPr sz="1800"/>
                         <a:t>Adv. Diploma / Diploma</a:t>
                       </a:r>
                     </a:p>
@@ -5186,6 +8540,7 @@
                         <a:defRPr sz="1000"/>
                       </a:pPr>
                       <a:r>
+                        <a:rPr sz="1800" dirty="0"/>
                         <a:t>$1,276</a:t>
                       </a:r>
                     </a:p>
@@ -5201,6 +8556,7 @@
                         <a:defRPr sz="1000"/>
                       </a:pPr>
                       <a:r>
+                        <a:rPr sz="1800"/>
                         <a:t>$1,407</a:t>
                       </a:r>
                     </a:p>
@@ -5216,6 +8572,7 @@
                         <a:defRPr sz="1000"/>
                       </a:pPr>
                       <a:r>
+                        <a:rPr sz="1800"/>
                         <a:t>18.3%</a:t>
                       </a:r>
                     </a:p>
@@ -5231,6 +8588,7 @@
                         <a:defRPr sz="1000"/>
                       </a:pPr>
                       <a:r>
+                        <a:rPr sz="1800"/>
                         <a:t>23.6%</a:t>
                       </a:r>
                     </a:p>
@@ -5243,7 +8601,7 @@
                   </a:ext>
                 </a:extLst>
               </a:tr>
-              <a:tr h="457200">
+              <a:tr h="329184">
                 <a:tc>
                   <a:txBody>
                     <a:bodyPr/>
@@ -5253,6 +8611,7 @@
                         <a:defRPr sz="1000"/>
                       </a:pPr>
                       <a:r>
+                        <a:rPr sz="1800"/>
                         <a:t>Certificate III &amp; IV</a:t>
                       </a:r>
                     </a:p>
@@ -5268,6 +8627,7 @@
                         <a:defRPr sz="1000"/>
                       </a:pPr>
                       <a:r>
+                        <a:rPr sz="1800" dirty="0"/>
                         <a:t>$1,091</a:t>
                       </a:r>
                     </a:p>
@@ -5283,6 +8643,7 @@
                         <a:defRPr sz="1000"/>
                       </a:pPr>
                       <a:r>
+                        <a:rPr sz="1800"/>
                         <a:t>$1,241</a:t>
                       </a:r>
                     </a:p>
@@ -5298,6 +8659,7 @@
                         <a:defRPr sz="1000"/>
                       </a:pPr>
                       <a:r>
+                        <a:rPr sz="1800"/>
                         <a:t>10.3%</a:t>
                       </a:r>
                     </a:p>
@@ -5313,6 +8675,7 @@
                         <a:defRPr sz="1000"/>
                       </a:pPr>
                       <a:r>
+                        <a:rPr sz="1800"/>
                         <a:t>15.4%</a:t>
                       </a:r>
                     </a:p>
@@ -5325,7 +8688,7 @@
                   </a:ext>
                 </a:extLst>
               </a:tr>
-              <a:tr h="457200">
+              <a:tr h="329184">
                 <a:tc>
                   <a:txBody>
                     <a:bodyPr/>
@@ -5335,6 +8698,7 @@
                         <a:defRPr sz="1000"/>
                       </a:pPr>
                       <a:r>
+                        <a:rPr sz="1800"/>
                         <a:t>Secondary Yr 10+</a:t>
                       </a:r>
                     </a:p>
@@ -5350,6 +8714,7 @@
                         <a:defRPr sz="1000"/>
                       </a:pPr>
                       <a:r>
+                        <a:rPr sz="1800"/>
                         <a:t>$739</a:t>
                       </a:r>
                     </a:p>
@@ -5365,6 +8730,7 @@
                         <a:defRPr sz="1000"/>
                       </a:pPr>
                       <a:r>
+                        <a:rPr sz="1800"/>
                         <a:t>$832</a:t>
                       </a:r>
                     </a:p>
@@ -5380,6 +8746,7 @@
                         <a:defRPr sz="1000"/>
                       </a:pPr>
                       <a:r>
+                        <a:rPr sz="1800"/>
                         <a:t>5.7%</a:t>
                       </a:r>
                     </a:p>
@@ -5395,6 +8762,7 @@
                         <a:defRPr sz="1000"/>
                       </a:pPr>
                       <a:r>
+                        <a:rPr sz="1800"/>
                         <a:t>7.5%</a:t>
                       </a:r>
                     </a:p>
@@ -5407,7 +8775,7 @@
                   </a:ext>
                 </a:extLst>
               </a:tr>
-              <a:tr h="457200">
+              <a:tr h="329184">
                 <a:tc>
                   <a:txBody>
                     <a:bodyPr/>
@@ -5417,6 +8785,7 @@
                         <a:defRPr sz="1000"/>
                       </a:pPr>
                       <a:r>
+                        <a:rPr sz="1800"/>
                         <a:t>Secondary Yr 9 and below</a:t>
                       </a:r>
                     </a:p>
@@ -5432,6 +8801,7 @@
                         <a:defRPr sz="1000"/>
                       </a:pPr>
                       <a:r>
+                        <a:rPr sz="1800"/>
                         <a:t>$487</a:t>
                       </a:r>
                     </a:p>
@@ -5447,6 +8817,7 @@
                         <a:defRPr sz="1000"/>
                       </a:pPr>
                       <a:r>
+                        <a:rPr sz="1800"/>
                         <a:t>$507</a:t>
                       </a:r>
                     </a:p>
@@ -5462,6 +8833,7 @@
                         <a:defRPr sz="1000"/>
                       </a:pPr>
                       <a:r>
+                        <a:rPr sz="1800"/>
                         <a:t>1.9%</a:t>
                       </a:r>
                     </a:p>
@@ -5477,6 +8849,7 @@
                         <a:defRPr sz="1000"/>
                       </a:pPr>
                       <a:r>
+                        <a:rPr sz="1800"/>
                         <a:t>2.5%</a:t>
                       </a:r>
                     </a:p>
@@ -5489,7 +8862,7 @@
                   </a:ext>
                 </a:extLst>
               </a:tr>
-              <a:tr h="457200">
+              <a:tr h="329184">
                 <a:tc>
                   <a:txBody>
                     <a:bodyPr/>
@@ -5499,6 +8872,7 @@
                         <a:defRPr sz="1000" b="1"/>
                       </a:pPr>
                       <a:r>
+                        <a:rPr sz="1800" dirty="0"/>
                         <a:t>Top-to-bottom gap</a:t>
                       </a:r>
                     </a:p>
@@ -5514,8 +8888,14 @@
                         <a:defRPr sz="1000" b="1"/>
                       </a:pPr>
                       <a:r>
-                        <a:t>$1,268/wk</a:t>
-                      </a:r>
+                        <a:rPr sz="1800" dirty="0"/>
+                        <a:t>$1,268/</a:t>
+                      </a:r>
+                      <a:r>
+                        <a:rPr sz="1800" dirty="0" err="1"/>
+                        <a:t>wk</a:t>
+                      </a:r>
+                      <a:endParaRPr sz="1800" dirty="0"/>
                     </a:p>
                   </a:txBody>
                   <a:tcPr/>
@@ -5529,6 +8909,7 @@
                         <a:defRPr sz="1000" b="1"/>
                       </a:pPr>
                       <a:r>
+                        <a:rPr sz="1800"/>
                         <a:t>$1,386/wk</a:t>
                       </a:r>
                     </a:p>
@@ -5544,6 +8925,7 @@
                         <a:defRPr sz="1000" b="1"/>
                       </a:pPr>
                       <a:r>
+                        <a:rPr sz="1800"/>
                         <a:t>36.8 pp gap</a:t>
                       </a:r>
                     </a:p>
@@ -5559,6 +8941,7 @@
                         <a:defRPr sz="1000" b="1"/>
                       </a:pPr>
                       <a:r>
+                        <a:rPr sz="1800" dirty="0"/>
                         <a:t>41.8 pp gap</a:t>
                       </a:r>
                     </a:p>
@@ -5604,6 +8987,55 @@
           </a:p>
         </p:txBody>
       </p:sp>
+      <p:sp>
+        <p:nvSpPr>
+          <p:cNvPr id="4" name="TextBox 3">
+            <a:extLst>
+              <a:ext uri="{FF2B5EF4-FFF2-40B4-BE49-F238E27FC236}">
+                <a16:creationId xmlns:a16="http://schemas.microsoft.com/office/drawing/2014/main" id="{0C56EC9B-3CC7-5D47-81B3-512901F32CF5}"/>
+              </a:ext>
+            </a:extLst>
+          </p:cNvPr>
+          <p:cNvSpPr txBox="1"/>
+          <p:nvPr/>
+        </p:nvSpPr>
+        <p:spPr>
+          <a:xfrm>
+            <a:off x="722376" y="1261691"/>
+            <a:ext cx="7863840" cy="923330"/>
+          </a:xfrm>
+          <a:prstGeom prst="rect">
+            <a:avLst/>
+          </a:prstGeom>
+          <a:noFill/>
+        </p:spPr>
+        <p:txBody>
+          <a:bodyPr wrap="square">
+            <a:spAutoFit/>
+          </a:bodyPr>
+          <a:lstStyle/>
+          <a:p>
+            <a:pPr>
+              <a:defRPr sz="1800"/>
+            </a:pPr>
+            <a:r>
+              <a:rPr dirty="0"/>
+              <a:t>Headline finding: each one-step increase in education rank is associated with about $196 more per week in weighted mean income.</a:t>
+            </a:r>
+            <a:endParaRPr lang="en-AU" dirty="0"/>
+          </a:p>
+          <a:p>
+            <a:pPr>
+              <a:defRPr sz="1800"/>
+            </a:pPr>
+            <a:r>
+              <a:rPr lang="en-AU" dirty="0"/>
+              <a:t>High Income Share &gt;$2,000 </a:t>
+            </a:r>
+            <a:endParaRPr dirty="0"/>
+          </a:p>
+        </p:txBody>
+      </p:sp>
     </p:spTree>
   </p:cSld>
   <p:clrMapOvr>
@@ -5629,9 +9061,40 @@
           <a:chExt cx="0" cy="0"/>
         </a:xfrm>
       </p:grpSpPr>
+      <p:pic>
+        <p:nvPicPr>
+          <p:cNvPr id="4" name="Picture 3" descr="weighted_mean_income_by_education.png"/>
+          <p:cNvPicPr>
+            <a:picLocks noChangeAspect="1"/>
+          </p:cNvPicPr>
+          <p:nvPr/>
+        </p:nvPicPr>
+        <p:blipFill>
+          <a:blip r:embed="rId2"/>
+          <a:srcRect/>
+          <a:stretch>
+            <a:fillRect/>
+          </a:stretch>
+        </p:blipFill>
+        <p:spPr>
+          <a:xfrm>
+            <a:off x="37121" y="1015302"/>
+            <a:ext cx="9106879" cy="5312346"/>
+          </a:xfrm>
+          <a:prstGeom prst="rect">
+            <a:avLst/>
+          </a:prstGeom>
+        </p:spPr>
+      </p:pic>
       <p:sp>
         <p:nvSpPr>
-          <p:cNvPr id="2" name="Title 1"/>
+          <p:cNvPr id="6" name="Title 5">
+            <a:extLst>
+              <a:ext uri="{FF2B5EF4-FFF2-40B4-BE49-F238E27FC236}">
+                <a16:creationId xmlns:a16="http://schemas.microsoft.com/office/drawing/2014/main" id="{D688E792-2A76-50BD-4B8E-FC104A823315}"/>
+              </a:ext>
+            </a:extLst>
+          </p:cNvPr>
           <p:cNvSpPr>
             <a:spLocks noGrp="1"/>
           </p:cNvSpPr>
@@ -5644,68 +9107,10 @@
           <a:bodyPr/>
           <a:lstStyle/>
           <a:p>
-            <a:r>
-              <a:t>Main results</a:t>
-            </a:r>
+            <a:endParaRPr lang="en-AU"/>
           </a:p>
         </p:txBody>
       </p:sp>
-      <p:sp>
-        <p:nvSpPr>
-          <p:cNvPr id="3" name="TextBox 2"/>
-          <p:cNvSpPr txBox="1"/>
-          <p:nvPr/>
-        </p:nvSpPr>
-        <p:spPr>
-          <a:xfrm>
-            <a:off x="640080" y="1097280"/>
-            <a:ext cx="7863840" cy="646331"/>
-          </a:xfrm>
-          <a:prstGeom prst="rect">
-            <a:avLst/>
-          </a:prstGeom>
-          <a:noFill/>
-        </p:spPr>
-        <p:txBody>
-          <a:bodyPr wrap="square">
-            <a:spAutoFit/>
-          </a:bodyPr>
-          <a:lstStyle/>
-          <a:p>
-            <a:pPr>
-              <a:defRPr sz="1800"/>
-            </a:pPr>
-            <a:r>
-              <a:rPr dirty="0"/>
-              <a:t>Headline finding: each one-step increase in education rank is associated with about $196 more per week in weighted mean income.</a:t>
-            </a:r>
-          </a:p>
-        </p:txBody>
-      </p:sp>
-      <p:pic>
-        <p:nvPicPr>
-          <p:cNvPr id="4" name="Picture 3" descr="weighted_mean_income_by_education.png"/>
-          <p:cNvPicPr>
-            <a:picLocks noChangeAspect="1"/>
-          </p:cNvPicPr>
-          <p:nvPr/>
-        </p:nvPicPr>
-        <p:blipFill>
-          <a:blip r:embed="rId2"/>
-          <a:stretch>
-            <a:fillRect/>
-          </a:stretch>
-        </p:blipFill>
-        <p:spPr>
-          <a:xfrm>
-            <a:off x="457200" y="1782762"/>
-            <a:ext cx="8229600" cy="4800600"/>
-          </a:xfrm>
-          <a:prstGeom prst="rect">
-            <a:avLst/>
-          </a:prstGeom>
-        </p:spPr>
-      </p:pic>
     </p:spTree>
   </p:cSld>
   <p:clrMapOvr>
@@ -5801,8 +9206,8 @@
         </p:blipFill>
         <p:spPr>
           <a:xfrm>
-            <a:off x="457200" y="1394301"/>
-            <a:ext cx="8229600" cy="4937760"/>
+            <a:off x="31374" y="1054222"/>
+            <a:ext cx="8953235" cy="5371941"/>
           </a:xfrm>
           <a:prstGeom prst="rect">
             <a:avLst/>
@@ -5841,13 +9246,7 @@
       </p:grpSpPr>
       <p:sp>
         <p:nvSpPr>
-          <p:cNvPr id="2" name="Title 1">
-            <a:extLst>
-              <a:ext uri="{FF2B5EF4-FFF2-40B4-BE49-F238E27FC236}">
-                <a16:creationId xmlns:a16="http://schemas.microsoft.com/office/drawing/2014/main" id="{DAECE564-5A39-6977-8E6D-4E05AAC5B72C}"/>
-              </a:ext>
-            </a:extLst>
-          </p:cNvPr>
+          <p:cNvPr id="2" name="Title 1"/>
           <p:cNvSpPr>
             <a:spLocks noGrp="1"/>
           </p:cNvSpPr>
@@ -5860,19 +9259,15 @@
           <a:bodyPr/>
           <a:lstStyle/>
           <a:p>
-            <a:endParaRPr lang="en-AU"/>
+            <a:r>
+              <a:t>Robustness and limitations</a:t>
+            </a:r>
           </a:p>
         </p:txBody>
       </p:sp>
       <p:sp>
         <p:nvSpPr>
-          <p:cNvPr id="3" name="Content Placeholder 2">
-            <a:extLst>
-              <a:ext uri="{FF2B5EF4-FFF2-40B4-BE49-F238E27FC236}">
-                <a16:creationId xmlns:a16="http://schemas.microsoft.com/office/drawing/2014/main" id="{6C56DA7F-2591-7FE2-0C60-E18F8A2D461A}"/>
-              </a:ext>
-            </a:extLst>
-          </p:cNvPr>
+          <p:cNvPr id="3" name="Content Placeholder 2"/>
           <p:cNvSpPr>
             <a:spLocks noGrp="1"/>
           </p:cNvSpPr>
@@ -5885,69 +9280,525 @@
           <a:bodyPr/>
           <a:lstStyle/>
           <a:p>
-            <a:endParaRPr lang="en-AU"/>
+            <a:pPr>
+              <a:defRPr sz="1800"/>
+            </a:pPr>
+            <a:r>
+              <a:rPr dirty="0"/>
+              <a:t>Robustness: the association survives unweighted models, no-year models, alternative income transformations, and year-specific samples.</a:t>
+            </a:r>
+          </a:p>
+          <a:p>
+            <a:pPr>
+              <a:defRPr sz="1800"/>
+            </a:pPr>
+            <a:r>
+              <a:rPr dirty="0"/>
+              <a:t>Limitation: grouped census data lack individual-level controls for age, occupation, hours worked, region, and firm characteristics.</a:t>
+            </a:r>
+          </a:p>
+          <a:p>
+            <a:pPr>
+              <a:defRPr sz="1800"/>
+            </a:pPr>
+            <a:r>
+              <a:rPr dirty="0"/>
+              <a:t>Largest threat: omitted-variable bias from composition differences across education groups and measurement error from income bracket midpoints.</a:t>
+            </a:r>
           </a:p>
         </p:txBody>
       </p:sp>
-      <p:sp>
-        <p:nvSpPr>
-          <p:cNvPr id="6" name="TitleText 5"/>
-          <p:cNvSpPr txBox="1"/>
-          <p:nvPr/>
-        </p:nvSpPr>
-        <p:spPr>
-          <a:xfrm>
-            <a:off x="457200" y="200000"/>
-            <a:ext cx="8229600" cy="600000"/>
-          </a:xfrm>
-          <a:prstGeom prst="rect">
-            <a:avLst/>
-          </a:prstGeom>
-          <a:noFill/>
-        </p:spPr>
-        <p:txBody>
-          <a:bodyPr wrap="square">
-            <a:spAutoFit/>
-          </a:bodyPr>
-          <a:lstStyle/>
-          <a:p>
-            <a:r>
-              <a:rPr lang="en-AU" sz="2800" b="1" dirty="0"/>
-              <a:t>Income CDF by Year: Rightward Shift from 2016 to 2021</a:t>
-            </a:r>
-          </a:p>
-        </p:txBody>
-      </p:sp>
-      <p:pic>
-        <p:nvPicPr>
-          <p:cNvPr id="5" name="Picture 4"/>
-          <p:cNvPicPr>
-            <a:picLocks noChangeAspect="1"/>
-          </p:cNvPicPr>
-          <p:nvPr/>
-        </p:nvPicPr>
-        <p:blipFill>
-          <a:blip r:embed="rId2"/>
-          <a:stretch>
-            <a:fillRect/>
-          </a:stretch>
-        </p:blipFill>
-        <p:spPr>
-          <a:xfrm>
-            <a:off x="0" y="914400"/>
-            <a:ext cx="9144000" cy="5029200"/>
-          </a:xfrm>
-          <a:prstGeom prst="rect">
-            <a:avLst/>
-          </a:prstGeom>
-        </p:spPr>
-      </p:pic>
+      <p:graphicFrame>
+        <p:nvGraphicFramePr>
+          <p:cNvPr id="4" name="Table 3">
+            <a:extLst>
+              <a:ext uri="{FF2B5EF4-FFF2-40B4-BE49-F238E27FC236}">
+                <a16:creationId xmlns:a16="http://schemas.microsoft.com/office/drawing/2014/main" id="{FDC5C96E-FD2C-4B67-8F6E-B943FDC8D1BB}"/>
+              </a:ext>
+            </a:extLst>
+          </p:cNvPr>
+          <p:cNvGraphicFramePr>
+            <a:graphicFrameLocks noGrp="1"/>
+          </p:cNvGraphicFramePr>
+          <p:nvPr>
+            <p:extLst>
+              <p:ext uri="{D42A27DB-BD31-4B8C-83A1-F6EECF244321}">
+                <p14:modId xmlns:p14="http://schemas.microsoft.com/office/powerpoint/2010/main" val="1693160951"/>
+              </p:ext>
+            </p:extLst>
+          </p:nvPr>
+        </p:nvGraphicFramePr>
+        <p:xfrm>
+          <a:off x="571500" y="3584448"/>
+          <a:ext cx="8001000" cy="3162300"/>
+        </p:xfrm>
+        <a:graphic>
+          <a:graphicData uri="http://schemas.openxmlformats.org/drawingml/2006/table">
+            <a:tbl>
+              <a:tblPr firstRow="1" bandRow="1">
+                <a:tableStyleId>{5C22544A-7EE6-4342-B048-85BDC9FD1C3A}</a:tableStyleId>
+              </a:tblPr>
+              <a:tblGrid>
+                <a:gridCol w="2000250">
+                  <a:extLst>
+                    <a:ext uri="{9D8B030D-6E8A-4147-A177-3AD203B41FA5}">
+                      <a16:colId xmlns:a16="http://schemas.microsoft.com/office/drawing/2014/main" val="20000"/>
+                    </a:ext>
+                  </a:extLst>
+                </a:gridCol>
+                <a:gridCol w="2000250">
+                  <a:extLst>
+                    <a:ext uri="{9D8B030D-6E8A-4147-A177-3AD203B41FA5}">
+                      <a16:colId xmlns:a16="http://schemas.microsoft.com/office/drawing/2014/main" val="20001"/>
+                    </a:ext>
+                  </a:extLst>
+                </a:gridCol>
+                <a:gridCol w="2000250">
+                  <a:extLst>
+                    <a:ext uri="{9D8B030D-6E8A-4147-A177-3AD203B41FA5}">
+                      <a16:colId xmlns:a16="http://schemas.microsoft.com/office/drawing/2014/main" val="20002"/>
+                    </a:ext>
+                  </a:extLst>
+                </a:gridCol>
+                <a:gridCol w="2000250">
+                  <a:extLst>
+                    <a:ext uri="{9D8B030D-6E8A-4147-A177-3AD203B41FA5}">
+                      <a16:colId xmlns:a16="http://schemas.microsoft.com/office/drawing/2014/main" val="20003"/>
+                    </a:ext>
+                  </a:extLst>
+                </a:gridCol>
+              </a:tblGrid>
+              <a:tr h="516636">
+                <a:tc>
+                  <a:txBody>
+                    <a:bodyPr/>
+                    <a:lstStyle/>
+                    <a:p>
+                      <a:pPr>
+                        <a:defRPr sz="1400" b="1"/>
+                      </a:pPr>
+                      <a:r>
+                        <a:rPr sz="1800" dirty="0"/>
+                        <a:t>Specification</a:t>
+                      </a:r>
+                    </a:p>
+                  </a:txBody>
+                  <a:tcPr/>
+                </a:tc>
+                <a:tc>
+                  <a:txBody>
+                    <a:bodyPr/>
+                    <a:lstStyle/>
+                    <a:p>
+                      <a:pPr>
+                        <a:defRPr sz="1400" b="1"/>
+                      </a:pPr>
+                      <a:r>
+                        <a:rPr sz="1800"/>
+                        <a:t>β (education rank)</a:t>
+                      </a:r>
+                    </a:p>
+                  </a:txBody>
+                  <a:tcPr/>
+                </a:tc>
+                <a:tc>
+                  <a:txBody>
+                    <a:bodyPr/>
+                    <a:lstStyle/>
+                    <a:p>
+                      <a:pPr>
+                        <a:defRPr sz="1400" b="1"/>
+                      </a:pPr>
+                      <a:r>
+                        <a:rPr sz="1800"/>
+                        <a:t>SE</a:t>
+                      </a:r>
+                    </a:p>
+                  </a:txBody>
+                  <a:tcPr/>
+                </a:tc>
+                <a:tc>
+                  <a:txBody>
+                    <a:bodyPr/>
+                    <a:lstStyle/>
+                    <a:p>
+                      <a:pPr>
+                        <a:defRPr sz="1400" b="1"/>
+                      </a:pPr>
+                      <a:r>
+                        <a:rPr sz="1800" dirty="0"/>
+                        <a:t>Note</a:t>
+                      </a:r>
+                    </a:p>
+                  </a:txBody>
+                  <a:tcPr/>
+                </a:tc>
+                <a:extLst>
+                  <a:ext uri="{0D108BD9-81ED-4DB2-BD59-A6C34878D82A}">
+                    <a16:rowId xmlns:a16="http://schemas.microsoft.com/office/drawing/2014/main" val="10000"/>
+                  </a:ext>
+                </a:extLst>
+              </a:tr>
+              <a:tr h="516636">
+                <a:tc>
+                  <a:txBody>
+                    <a:bodyPr/>
+                    <a:lstStyle/>
+                    <a:p>
+                      <a:pPr>
+                        <a:defRPr sz="1200"/>
+                      </a:pPr>
+                      <a:r>
+                        <a:rPr sz="1600"/>
+                        <a:t>Main</a:t>
+                      </a:r>
+                    </a:p>
+                  </a:txBody>
+                  <a:tcPr/>
+                </a:tc>
+                <a:tc>
+                  <a:txBody>
+                    <a:bodyPr/>
+                    <a:lstStyle/>
+                    <a:p>
+                      <a:pPr>
+                        <a:defRPr sz="1200"/>
+                      </a:pPr>
+                      <a:r>
+                        <a:rPr sz="1600"/>
+                        <a:t>$195.88</a:t>
+                      </a:r>
+                    </a:p>
+                  </a:txBody>
+                  <a:tcPr/>
+                </a:tc>
+                <a:tc>
+                  <a:txBody>
+                    <a:bodyPr/>
+                    <a:lstStyle/>
+                    <a:p>
+                      <a:pPr>
+                        <a:defRPr sz="1200"/>
+                      </a:pPr>
+                      <a:r>
+                        <a:rPr sz="1600"/>
+                        <a:t>$7.38</a:t>
+                      </a:r>
+                    </a:p>
+                  </a:txBody>
+                  <a:tcPr/>
+                </a:tc>
+                <a:tc>
+                  <a:txBody>
+                    <a:bodyPr/>
+                    <a:lstStyle/>
+                    <a:p>
+                      <a:pPr>
+                        <a:defRPr sz="1200"/>
+                      </a:pPr>
+                      <a:r>
+                        <a:rPr sz="1600"/>
+                        <a:t>WLS with year control</a:t>
+                      </a:r>
+                    </a:p>
+                  </a:txBody>
+                  <a:tcPr/>
+                </a:tc>
+                <a:extLst>
+                  <a:ext uri="{0D108BD9-81ED-4DB2-BD59-A6C34878D82A}">
+                    <a16:rowId xmlns:a16="http://schemas.microsoft.com/office/drawing/2014/main" val="10001"/>
+                  </a:ext>
+                </a:extLst>
+              </a:tr>
+              <a:tr h="516636">
+                <a:tc>
+                  <a:txBody>
+                    <a:bodyPr/>
+                    <a:lstStyle/>
+                    <a:p>
+                      <a:pPr>
+                        <a:defRPr sz="1200"/>
+                      </a:pPr>
+                      <a:r>
+                        <a:rPr sz="1600"/>
+                        <a:t>Drop top bracket</a:t>
+                      </a:r>
+                    </a:p>
+                  </a:txBody>
+                  <a:tcPr/>
+                </a:tc>
+                <a:tc>
+                  <a:txBody>
+                    <a:bodyPr/>
+                    <a:lstStyle/>
+                    <a:p>
+                      <a:pPr>
+                        <a:defRPr sz="1200"/>
+                      </a:pPr>
+                      <a:r>
+                        <a:rPr sz="1600" dirty="0"/>
+                        <a:t>$145.74</a:t>
+                      </a:r>
+                    </a:p>
+                  </a:txBody>
+                  <a:tcPr/>
+                </a:tc>
+                <a:tc>
+                  <a:txBody>
+                    <a:bodyPr/>
+                    <a:lstStyle/>
+                    <a:p>
+                      <a:pPr>
+                        <a:defRPr sz="1200"/>
+                      </a:pPr>
+                      <a:r>
+                        <a:rPr sz="1600"/>
+                        <a:t>$9.01</a:t>
+                      </a:r>
+                    </a:p>
+                  </a:txBody>
+                  <a:tcPr/>
+                </a:tc>
+                <a:tc>
+                  <a:txBody>
+                    <a:bodyPr/>
+                    <a:lstStyle/>
+                    <a:p>
+                      <a:pPr>
+                        <a:defRPr sz="1200"/>
+                      </a:pPr>
+                      <a:r>
+                        <a:rPr sz="1600"/>
+                        <a:t>Exclude open-ended top bracket</a:t>
+                      </a:r>
+                    </a:p>
+                  </a:txBody>
+                  <a:tcPr/>
+                </a:tc>
+                <a:extLst>
+                  <a:ext uri="{0D108BD9-81ED-4DB2-BD59-A6C34878D82A}">
+                    <a16:rowId xmlns:a16="http://schemas.microsoft.com/office/drawing/2014/main" val="10002"/>
+                  </a:ext>
+                </a:extLst>
+              </a:tr>
+              <a:tr h="516636">
+                <a:tc>
+                  <a:txBody>
+                    <a:bodyPr/>
+                    <a:lstStyle/>
+                    <a:p>
+                      <a:pPr>
+                        <a:defRPr sz="1200"/>
+                      </a:pPr>
+                      <a:r>
+                        <a:rPr sz="1600" dirty="0"/>
+                        <a:t>2021 only</a:t>
+                      </a:r>
+                    </a:p>
+                  </a:txBody>
+                  <a:tcPr/>
+                </a:tc>
+                <a:tc>
+                  <a:txBody>
+                    <a:bodyPr/>
+                    <a:lstStyle/>
+                    <a:p>
+                      <a:pPr>
+                        <a:defRPr sz="1200"/>
+                      </a:pPr>
+                      <a:r>
+                        <a:rPr sz="1600"/>
+                        <a:t>$202.64</a:t>
+                      </a:r>
+                    </a:p>
+                  </a:txBody>
+                  <a:tcPr/>
+                </a:tc>
+                <a:tc>
+                  <a:txBody>
+                    <a:bodyPr/>
+                    <a:lstStyle/>
+                    <a:p>
+                      <a:pPr>
+                        <a:defRPr sz="1200"/>
+                      </a:pPr>
+                      <a:r>
+                        <a:rPr sz="1600"/>
+                        <a:t>$12.11</a:t>
+                      </a:r>
+                    </a:p>
+                  </a:txBody>
+                  <a:tcPr/>
+                </a:tc>
+                <a:tc>
+                  <a:txBody>
+                    <a:bodyPr/>
+                    <a:lstStyle/>
+                    <a:p>
+                      <a:pPr>
+                        <a:defRPr sz="1200"/>
+                      </a:pPr>
+                      <a:r>
+                        <a:rPr sz="1600"/>
+                        <a:t>2021 sample only</a:t>
+                      </a:r>
+                    </a:p>
+                  </a:txBody>
+                  <a:tcPr/>
+                </a:tc>
+                <a:extLst>
+                  <a:ext uri="{0D108BD9-81ED-4DB2-BD59-A6C34878D82A}">
+                    <a16:rowId xmlns:a16="http://schemas.microsoft.com/office/drawing/2014/main" val="10003"/>
+                  </a:ext>
+                </a:extLst>
+              </a:tr>
+              <a:tr h="516636">
+                <a:tc>
+                  <a:txBody>
+                    <a:bodyPr/>
+                    <a:lstStyle/>
+                    <a:p>
+                      <a:pPr>
+                        <a:defRPr sz="1200"/>
+                      </a:pPr>
+                      <a:r>
+                        <a:rPr sz="1600"/>
+                        <a:t>2016 only</a:t>
+                      </a:r>
+                    </a:p>
+                  </a:txBody>
+                  <a:tcPr/>
+                </a:tc>
+                <a:tc>
+                  <a:txBody>
+                    <a:bodyPr/>
+                    <a:lstStyle/>
+                    <a:p>
+                      <a:pPr>
+                        <a:defRPr sz="1200"/>
+                      </a:pPr>
+                      <a:r>
+                        <a:rPr sz="1600"/>
+                        <a:t>$187.77</a:t>
+                      </a:r>
+                    </a:p>
+                  </a:txBody>
+                  <a:tcPr/>
+                </a:tc>
+                <a:tc>
+                  <a:txBody>
+                    <a:bodyPr/>
+                    <a:lstStyle/>
+                    <a:p>
+                      <a:pPr>
+                        <a:defRPr sz="1200"/>
+                      </a:pPr>
+                      <a:r>
+                        <a:rPr sz="1600" dirty="0"/>
+                        <a:t>$7.97</a:t>
+                      </a:r>
+                    </a:p>
+                  </a:txBody>
+                  <a:tcPr/>
+                </a:tc>
+                <a:tc>
+                  <a:txBody>
+                    <a:bodyPr/>
+                    <a:lstStyle/>
+                    <a:p>
+                      <a:pPr>
+                        <a:defRPr sz="1200"/>
+                      </a:pPr>
+                      <a:r>
+                        <a:rPr sz="1600"/>
+                        <a:t>2016 sample only</a:t>
+                      </a:r>
+                    </a:p>
+                  </a:txBody>
+                  <a:tcPr/>
+                </a:tc>
+                <a:extLst>
+                  <a:ext uri="{0D108BD9-81ED-4DB2-BD59-A6C34878D82A}">
+                    <a16:rowId xmlns:a16="http://schemas.microsoft.com/office/drawing/2014/main" val="10004"/>
+                  </a:ext>
+                </a:extLst>
+              </a:tr>
+              <a:tr h="516636">
+                <a:tc>
+                  <a:txBody>
+                    <a:bodyPr/>
+                    <a:lstStyle/>
+                    <a:p>
+                      <a:pPr>
+                        <a:defRPr sz="1200"/>
+                      </a:pPr>
+                      <a:r>
+                        <a:rPr sz="1600"/>
+                        <a:t>Unweighted OLS</a:t>
+                      </a:r>
+                    </a:p>
+                  </a:txBody>
+                  <a:tcPr/>
+                </a:tc>
+                <a:tc>
+                  <a:txBody>
+                    <a:bodyPr/>
+                    <a:lstStyle/>
+                    <a:p>
+                      <a:pPr>
+                        <a:defRPr sz="1200"/>
+                      </a:pPr>
+                      <a:r>
+                        <a:rPr sz="1600"/>
+                        <a:t>$205.16</a:t>
+                      </a:r>
+                    </a:p>
+                  </a:txBody>
+                  <a:tcPr/>
+                </a:tc>
+                <a:tc>
+                  <a:txBody>
+                    <a:bodyPr/>
+                    <a:lstStyle/>
+                    <a:p>
+                      <a:pPr>
+                        <a:defRPr sz="1200"/>
+                      </a:pPr>
+                      <a:r>
+                        <a:rPr sz="1600"/>
+                        <a:t>$13.11</a:t>
+                      </a:r>
+                    </a:p>
+                  </a:txBody>
+                  <a:tcPr/>
+                </a:tc>
+                <a:tc>
+                  <a:txBody>
+                    <a:bodyPr/>
+                    <a:lstStyle/>
+                    <a:p>
+                      <a:pPr>
+                        <a:defRPr sz="1200"/>
+                      </a:pPr>
+                      <a:r>
+                        <a:rPr sz="1600" dirty="0"/>
+                        <a:t>No weighting</a:t>
+                      </a:r>
+                    </a:p>
+                  </a:txBody>
+                  <a:tcPr/>
+                </a:tc>
+                <a:extLst>
+                  <a:ext uri="{0D108BD9-81ED-4DB2-BD59-A6C34878D82A}">
+                    <a16:rowId xmlns:a16="http://schemas.microsoft.com/office/drawing/2014/main" val="10005"/>
+                  </a:ext>
+                </a:extLst>
+              </a:tr>
+            </a:tbl>
+          </a:graphicData>
+        </a:graphic>
+      </p:graphicFrame>
     </p:spTree>
-    <p:extLst>
-      <p:ext uri="{BB962C8B-B14F-4D97-AF65-F5344CB8AC3E}">
-        <p14:creationId xmlns:p14="http://schemas.microsoft.com/office/powerpoint/2010/main" val="1808836265"/>
-      </p:ext>
-    </p:extLst>
   </p:cSld>
   <p:clrMapOvr>
     <a:masterClrMapping/>
@@ -5988,7 +9839,7 @@
           <a:lstStyle/>
           <a:p>
             <a:r>
-              <a:t>Robustness and limitations</a:t>
+              <a:t>Conclusion and next steps</a:t>
             </a:r>
           </a:p>
         </p:txBody>
@@ -6005,15 +9856,17 @@
         </p:nvSpPr>
         <p:spPr/>
         <p:txBody>
-          <a:bodyPr/>
+          <a:bodyPr>
+            <a:normAutofit/>
+          </a:bodyPr>
           <a:lstStyle/>
           <a:p>
             <a:pPr>
               <a:defRPr sz="1800"/>
             </a:pPr>
             <a:r>
-              <a:rPr dirty="0"/>
-              <a:t>Robustness: the association survives unweighted models, no-year models, alternative income transformations, and year-specific samples.</a:t>
+              <a:rPr sz="2400" dirty="0"/>
+              <a:t>Conclusion: there is a strong descriptive education-income gradient for Australian males in 2016 and 2021 census aggregates.</a:t>
             </a:r>
           </a:p>
           <a:p>
@@ -6021,8 +9874,8 @@
               <a:defRPr sz="1800"/>
             </a:pPr>
             <a:r>
-              <a:rPr dirty="0"/>
-              <a:t>Limitation: grouped census data lack individual-level controls for age, occupation, hours worked, region, and firm characteristics.</a:t>
+              <a:rPr sz="2400" dirty="0"/>
+              <a:t>What we cannot conclude: a causal return to education from this grouped data.</a:t>
             </a:r>
           </a:p>
           <a:p>
@@ -6030,8 +9883,8 @@
               <a:defRPr sz="1800"/>
             </a:pPr>
             <a:r>
-              <a:rPr dirty="0"/>
-              <a:t>Largest threat: omitted-variable bias from composition differences across education groups and measurement error from income bracket midpoints.</a:t>
+              <a:rPr sz="2400" dirty="0"/>
+              <a:t>Next step: use individual-level microdata with controls, or seek quasi-experimental variation or longitudinal data to address the main threat.</a:t>
             </a:r>
           </a:p>
         </p:txBody>
